--- a/presentation/CPeak-Consultancy-Kurumsal-Sunum-TR.pptx
+++ b/presentation/CPeak-Consultancy-Kurumsal-Sunum-TR.pptx
@@ -515,7 +515,7 @@
           <a:p>
             <a:r>
               <a:rPr lang="en-US" dirty="0"/>
-              <a:t>Açılış. CPeak; SAP finans modülleri, bulut mimarisi ve uygulamalı yapay zeka üzerine çalışan bağımsız bir danışmanlık şirketidir. 2021, İstanbul.</a:t>
+              <a:t>CPeak; SAP finans modülleri, bulut mimarisi ve uygulamalı yapay zeka üzerine çalışan bağımsız bir danışmanlık şirketidir. 2021, İstanbul.</a:t>
             </a:r>
             <a:endParaRPr lang="en-US" dirty="0"/>
           </a:p>
@@ -603,7 +603,7 @@
           <a:p>
             <a:r>
               <a:rPr lang="en-US" dirty="0"/>
-              <a:t>Yapay zeka hem teslim edilen sistemde hem de çalışma yönteminde; insan denetimi sınırı açıkça yazılı.</a:t>
+              <a:t>Yapay zeka hem teslim edilen sistemde hem çalışma yönteminde; insan denetimi sınırı açıkça yazılı.</a:t>
             </a:r>
             <a:endParaRPr lang="en-US" dirty="0"/>
           </a:p>
@@ -867,7 +867,7 @@
           <a:p>
             <a:r>
               <a:rPr lang="en-US" dirty="0"/>
-              <a:t>CPeak’in yayımladığı referans logoları. Müşteri adı, rakam veya sonuç iddiası eklenmemiştir.</a:t>
+              <a:t>CPeak’in yayımladığı referans logoları. Müşteri adı veya sonuç iddiası eklenmemiştir.</a:t>
             </a:r>
             <a:endParaRPr lang="en-US" dirty="0"/>
           </a:p>
@@ -2237,7 +2237,7 @@
                 <a:ea typeface="Inter" pitchFamily="34" charset="-122"/>
                 <a:cs typeface="Inter" pitchFamily="34" charset="-120"/>
               </a:rPr>
-              <a:t>Bilinçli olarak dar kurulmuş bağımsız bir danışmanlık: geri dönüşü en pahalı kararların üzerinde bizzat biz çalışırız.</a:t>
+              <a:t>Bağımsız ve bilinçli olarak dar: en zor kararların üzerinde bizzat biz çalışırız.</a:t>
             </a:r>
             <a:endParaRPr lang="en-US" sz="1400" dirty="0"/>
           </a:p>
@@ -2804,7 +2804,7 @@
                 <a:ea typeface="Inter" pitchFamily="34" charset="-122"/>
                 <a:cs typeface="Inter" pitchFamily="34" charset="-120"/>
               </a:rPr>
-              <a:t>Akıllı eşleştirme — banka ve açık kalemler otomatik kapatılır</a:t>
+              <a:t>Akıllı eşleştirme — kalemler otomatik kapatılır</a:t>
             </a:r>
             <a:endParaRPr lang="en-US" sz="1100" dirty="0"/>
           </a:p>
@@ -2866,7 +2866,7 @@
                 <a:ea typeface="Inter" pitchFamily="34" charset="-122"/>
                 <a:cs typeface="Inter" pitchFamily="34" charset="-120"/>
               </a:rPr>
-              <a:t>Anomali tespiti — olağandışı kayıtlar kapanıştan önce işaretlenir</a:t>
+              <a:t>Anomali tespiti — kapanıştan sonra değil, önce</a:t>
             </a:r>
             <a:endParaRPr lang="en-US" sz="1100" dirty="0"/>
           </a:p>
@@ -2928,7 +2928,7 @@
                 <a:ea typeface="Inter" pitchFamily="34" charset="-122"/>
                 <a:cs typeface="Inter" pitchFamily="34" charset="-120"/>
               </a:rPr>
-              <a:t>Tahmine dayalı muhasebe — kesinleşmemiş işlemlerin etkisi</a:t>
+              <a:t>Tahmine dayalı muhasebe — dönem içinde görünür</a:t>
             </a:r>
             <a:endParaRPr lang="en-US" sz="1100" dirty="0"/>
           </a:p>
@@ -3279,7 +3279,7 @@
                 <a:ea typeface="Inter" pitchFamily="34" charset="-122"/>
                 <a:cs typeface="Inter" pitchFamily="34" charset="-120"/>
               </a:rPr>
-              <a:t>Migrasyon mutabakat kontrollerinin hazırlanması</a:t>
+              <a:t>Migrasyon mutabakat kontrolleri</a:t>
             </a:r>
             <a:endParaRPr lang="en-US" sz="1100" dirty="0"/>
           </a:p>
@@ -3405,7 +3405,7 @@
                 <a:ea typeface="Schibsted Grotesk" pitchFamily="34" charset="-122"/>
                 <a:cs typeface="Schibsted Grotesk" pitchFamily="34" charset="-120"/>
               </a:rPr>
-              <a:t>Finansal kayıt üreten hiçbir karar insan denetimi olmadan kesinleşmez — bu pazarlık konusu değildir.</a:t>
+              <a:t>Kayıt üreten hiçbir karar insan denetimi olmadan kesinleşmez.</a:t>
             </a:r>
             <a:endParaRPr lang="en-US" sz="1250" dirty="0"/>
           </a:p>
@@ -3681,7 +3681,7 @@
                 <a:ea typeface="Inter" pitchFamily="34" charset="-122"/>
                 <a:cs typeface="Inter" pitchFamily="34" charset="-120"/>
               </a:rPr>
-              <a:t>Neyi yapmadığımızı söylemek, ne yaptığımızı söylemek kadar önemlidir.</a:t>
+              <a:t>Neyi yapmadığımız, ne yaptığımız kadar önemlidir.</a:t>
             </a:r>
             <a:endParaRPr lang="en-US" sz="1250" dirty="0"/>
           </a:p>
@@ -3746,7 +3746,7 @@
                 <a:ea typeface="Schibsted Grotesk" pitchFamily="34" charset="-122"/>
                 <a:cs typeface="Schibsted Grotesk" pitchFamily="34" charset="-120"/>
               </a:rPr>
-              <a:t>Bu bize iş kaybettirir. Aldığımız işleri bitirebilmemizin sebebi de budur.</a:t>
+              <a:t>Bu bize iş kaybettirir. Aldığımız işi bitirmemizin sebebi de budur.</a:t>
             </a:r>
             <a:endParaRPr lang="en-US" sz="1500" dirty="0"/>
           </a:p>
@@ -3850,7 +3850,7 @@
                 <a:ea typeface="Inter" pitchFamily="34" charset="-122"/>
                 <a:cs typeface="Inter" pitchFamily="34" charset="-120"/>
               </a:rPr>
-              <a:t>Uzmanlık alanımız dışındaki modüllerin ana sorumluluğu — lojistik, üretim planlama, İK</a:t>
+              <a:t>Uzmanlık alanımız dışındaki modüller — lojistik, üretim planlama, İK</a:t>
             </a:r>
             <a:endParaRPr lang="en-US" sz="1200" dirty="0"/>
           </a:p>
@@ -3954,7 +3954,7 @@
                 <a:ea typeface="Inter" pitchFamily="34" charset="-122"/>
                 <a:cs typeface="Inter" pitchFamily="34" charset="-120"/>
               </a:rPr>
-              <a:t>Mimari ya da teslim sorumluluğu üstlenmeden kaynak sağlama</a:t>
+              <a:t>Mimari ya da teslim sorumluluğu olmadan kaynak sağlama</a:t>
             </a:r>
             <a:endParaRPr lang="en-US" sz="1200" dirty="0"/>
           </a:p>
@@ -4058,7 +4058,7 @@
                 <a:ea typeface="Inter" pitchFamily="34" charset="-122"/>
                 <a:cs typeface="Inter" pitchFamily="34" charset="-120"/>
               </a:rPr>
-              <a:t>Değerlendirme yapılmadan verilen sabit fiyat taahhütleri</a:t>
+              <a:t>Değerlendirme yapılmadan verilen kesin taahhütler</a:t>
             </a:r>
             <a:endParaRPr lang="en-US" sz="1200" dirty="0"/>
           </a:p>
@@ -4433,8 +4433,8 @@
         </p:nvSpPr>
         <p:spPr>
           <a:xfrm>
-            <a:off x="777240" y="2395728"/>
-            <a:ext cx="3310128" cy="3127248"/>
+            <a:off x="777240" y="2487168"/>
+            <a:ext cx="3310128" cy="2798064"/>
           </a:xfrm>
           <a:prstGeom prst="rect">
             <a:avLst/>
@@ -4465,7 +4465,7 @@
         </p:nvSpPr>
         <p:spPr>
           <a:xfrm>
-            <a:off x="1129284" y="2802636"/>
+            <a:off x="1129284" y="2894076"/>
             <a:ext cx="137160" cy="137160"/>
           </a:xfrm>
           <a:prstGeom prst="ellipse">
@@ -4485,7 +4485,7 @@
         </p:nvSpPr>
         <p:spPr>
           <a:xfrm>
-            <a:off x="1197864" y="3072384"/>
+            <a:off x="1197864" y="3163824"/>
             <a:ext cx="2468880" cy="384048"/>
           </a:xfrm>
           <a:prstGeom prst="rect">
@@ -4524,8 +4524,8 @@
         </p:nvSpPr>
         <p:spPr>
           <a:xfrm>
-            <a:off x="1197864" y="3547872"/>
-            <a:ext cx="2468880" cy="1097280"/>
+            <a:off x="1197864" y="3639312"/>
+            <a:ext cx="2468880" cy="731520"/>
           </a:xfrm>
           <a:prstGeom prst="rect">
             <a:avLst/>
@@ -4552,7 +4552,7 @@
                 <a:ea typeface="Inter" pitchFamily="34" charset="-122"/>
                 <a:cs typeface="Inter" pitchFamily="34" charset="-120"/>
               </a:rPr>
-              <a:t>Bir karar vermeniz gerekiyor ve elinizde veri yok: geçiş yöntemi, bulut modeli, sağlık kontrolü.</a:t>
+              <a:t>Karar vermeniz gerekiyor, elinizde veri yok.</a:t>
             </a:r>
             <a:endParaRPr lang="en-US" sz="1100" dirty="0"/>
           </a:p>
@@ -4566,7 +4566,7 @@
         </p:nvSpPr>
         <p:spPr>
           <a:xfrm>
-            <a:off x="1197864" y="4700016"/>
+            <a:off x="1197864" y="4407408"/>
             <a:ext cx="2468880" cy="0"/>
           </a:xfrm>
           <a:prstGeom prst="line">
@@ -4589,8 +4589,8 @@
         </p:nvSpPr>
         <p:spPr>
           <a:xfrm>
-            <a:off x="1197864" y="4809744"/>
-            <a:ext cx="2468880" cy="475488"/>
+            <a:off x="1197864" y="4517136"/>
+            <a:ext cx="2468880" cy="457200"/>
           </a:xfrm>
           <a:prstGeom prst="rect">
             <a:avLst/>
@@ -4631,7 +4631,7 @@
         </p:nvSpPr>
         <p:spPr>
           <a:xfrm>
-            <a:off x="1197864" y="5230368"/>
+            <a:off x="1197864" y="5010912"/>
             <a:ext cx="2468880" cy="237744"/>
           </a:xfrm>
           <a:prstGeom prst="rect">
@@ -4670,8 +4670,8 @@
         </p:nvSpPr>
         <p:spPr>
           <a:xfrm>
-            <a:off x="4471416" y="2395728"/>
-            <a:ext cx="3310128" cy="3127248"/>
+            <a:off x="4471416" y="2487168"/>
+            <a:ext cx="3310128" cy="2798064"/>
           </a:xfrm>
           <a:prstGeom prst="rect">
             <a:avLst/>
@@ -4702,7 +4702,7 @@
         </p:nvSpPr>
         <p:spPr>
           <a:xfrm>
-            <a:off x="4823460" y="2802636"/>
+            <a:off x="4823460" y="2894076"/>
             <a:ext cx="137160" cy="137160"/>
           </a:xfrm>
           <a:prstGeom prst="ellipse">
@@ -4722,7 +4722,7 @@
         </p:nvSpPr>
         <p:spPr>
           <a:xfrm>
-            <a:off x="4892040" y="3072384"/>
+            <a:off x="4892040" y="3163824"/>
             <a:ext cx="2468880" cy="384048"/>
           </a:xfrm>
           <a:prstGeom prst="rect">
@@ -4761,8 +4761,8 @@
         </p:nvSpPr>
         <p:spPr>
           <a:xfrm>
-            <a:off x="4892040" y="3547872"/>
-            <a:ext cx="2468880" cy="1097280"/>
+            <a:off x="4892040" y="3639312"/>
+            <a:ext cx="2468880" cy="731520"/>
           </a:xfrm>
           <a:prstGeom prst="rect">
             <a:avLst/>
@@ -4789,7 +4789,7 @@
                 <a:ea typeface="Inter" pitchFamily="34" charset="-122"/>
                 <a:cs typeface="Inter" pitchFamily="34" charset="-120"/>
               </a:rPr>
-              <a:t>Karar verilmiş ve uygulanması gerekiyor: dönüşüm, kurulum ya da yeniden yapılandırma.</a:t>
+              <a:t>Karar verilmiş; uygulanması gerekiyor.</a:t>
             </a:r>
             <a:endParaRPr lang="en-US" sz="1100" dirty="0"/>
           </a:p>
@@ -4803,7 +4803,7 @@
         </p:nvSpPr>
         <p:spPr>
           <a:xfrm>
-            <a:off x="4892040" y="4700016"/>
+            <a:off x="4892040" y="4407408"/>
             <a:ext cx="2468880" cy="0"/>
           </a:xfrm>
           <a:prstGeom prst="line">
@@ -4826,8 +4826,8 @@
         </p:nvSpPr>
         <p:spPr>
           <a:xfrm>
-            <a:off x="4892040" y="4809744"/>
-            <a:ext cx="2468880" cy="475488"/>
+            <a:off x="4892040" y="4517136"/>
+            <a:ext cx="2468880" cy="457200"/>
           </a:xfrm>
           <a:prstGeom prst="rect">
             <a:avLst/>
@@ -4854,7 +4854,7 @@
                 <a:ea typeface="Inter" pitchFamily="34" charset="-122"/>
                 <a:cs typeface="Inter" pitchFamily="34" charset="-120"/>
               </a:rPr>
-              <a:t>Fazlı plan, haftalık rapor, devreye alma ve hypercare dahil.</a:t>
+              <a:t>Fazlı plan, haftalık rapor, hypercare dahil.</a:t>
             </a:r>
             <a:endParaRPr lang="en-US" sz="1050" dirty="0"/>
           </a:p>
@@ -4868,7 +4868,7 @@
         </p:nvSpPr>
         <p:spPr>
           <a:xfrm>
-            <a:off x="4892040" y="5230368"/>
+            <a:off x="4892040" y="5010912"/>
             <a:ext cx="2468880" cy="237744"/>
           </a:xfrm>
           <a:prstGeom prst="rect">
@@ -4907,8 +4907,8 @@
         </p:nvSpPr>
         <p:spPr>
           <a:xfrm>
-            <a:off x="8165592" y="2395728"/>
-            <a:ext cx="3310128" cy="3127248"/>
+            <a:off x="8165592" y="2487168"/>
+            <a:ext cx="3310128" cy="2798064"/>
           </a:xfrm>
           <a:prstGeom prst="rect">
             <a:avLst/>
@@ -4939,7 +4939,7 @@
         </p:nvSpPr>
         <p:spPr>
           <a:xfrm>
-            <a:off x="8517636" y="2802636"/>
+            <a:off x="8517636" y="2894076"/>
             <a:ext cx="137160" cy="137160"/>
           </a:xfrm>
           <a:prstGeom prst="ellipse">
@@ -4959,7 +4959,7 @@
         </p:nvSpPr>
         <p:spPr>
           <a:xfrm>
-            <a:off x="8586216" y="3072384"/>
+            <a:off x="8586216" y="3163824"/>
             <a:ext cx="2468880" cy="384048"/>
           </a:xfrm>
           <a:prstGeom prst="rect">
@@ -4998,8 +4998,8 @@
         </p:nvSpPr>
         <p:spPr>
           <a:xfrm>
-            <a:off x="8586216" y="3547872"/>
-            <a:ext cx="2468880" cy="1097280"/>
+            <a:off x="8586216" y="3639312"/>
+            <a:ext cx="2468880" cy="731520"/>
           </a:xfrm>
           <a:prstGeom prst="rect">
             <a:avLst/>
@@ -5026,7 +5026,7 @@
                 <a:ea typeface="Inter" pitchFamily="34" charset="-122"/>
                 <a:cs typeface="Inter" pitchFamily="34" charset="-120"/>
               </a:rPr>
-              <a:t>Projeyi başkası yürütüyor, tek bir noktada derinlik gerekiyor: gözden geçirme, ikinci görüş, tek iş kalemi.</a:t>
+              <a:t>Projeyi başkası yürütüyor, tek noktada derinlik gerekiyor.</a:t>
             </a:r>
             <a:endParaRPr lang="en-US" sz="1100" dirty="0"/>
           </a:p>
@@ -5040,7 +5040,7 @@
         </p:nvSpPr>
         <p:spPr>
           <a:xfrm>
-            <a:off x="8586216" y="4700016"/>
+            <a:off x="8586216" y="4407408"/>
             <a:ext cx="2468880" cy="0"/>
           </a:xfrm>
           <a:prstGeom prst="line">
@@ -5063,8 +5063,8 @@
         </p:nvSpPr>
         <p:spPr>
           <a:xfrm>
-            <a:off x="8586216" y="4809744"/>
-            <a:ext cx="2468880" cy="475488"/>
+            <a:off x="8586216" y="4517136"/>
+            <a:ext cx="2468880" cy="457200"/>
           </a:xfrm>
           <a:prstGeom prst="rect">
             <a:avLst/>
@@ -5091,7 +5091,7 @@
                 <a:ea typeface="Inter" pitchFamily="34" charset="-122"/>
                 <a:cs typeface="Inter" pitchFamily="34" charset="-120"/>
               </a:rPr>
-              <a:t>Sınırlı kapsam, baştan anlaşılmış çıktı, gereksiz uzatma yok.</a:t>
+              <a:t>Sınırlı kapsam, baştan anlaşılmış çıktı.</a:t>
             </a:r>
             <a:endParaRPr lang="en-US" sz="1050" dirty="0"/>
           </a:p>
@@ -5105,7 +5105,7 @@
         </p:nvSpPr>
         <p:spPr>
           <a:xfrm>
-            <a:off x="8586216" y="5230368"/>
+            <a:off x="8586216" y="5010912"/>
             <a:ext cx="2468880" cy="237744"/>
           </a:xfrm>
           <a:prstGeom prst="rect">
@@ -5144,7 +5144,7 @@
         </p:nvSpPr>
         <p:spPr>
           <a:xfrm>
-            <a:off x="777240" y="5705856"/>
+            <a:off x="777240" y="5669280"/>
             <a:ext cx="10424160" cy="274320"/>
           </a:xfrm>
           <a:prstGeom prst="rect">
@@ -5169,7 +5169,7 @@
                 <a:ea typeface="Inter" pitchFamily="34" charset="-122"/>
                 <a:cs typeface="Inter" pitchFamily="34" charset="-120"/>
               </a:rPr>
-              <a:t>Her ihtiyaç tam kapsamlı bir proje gerektirmez — gerektirmediğinde bunu söyleriz.</a:t>
+              <a:t>Her ihtiyaç tam kapsamlı bir proje gerektirmez.</a:t>
             </a:r>
             <a:endParaRPr lang="en-US" sz="1200" dirty="0"/>
           </a:p>
@@ -5445,7 +5445,7 @@
                 <a:ea typeface="Inter" pitchFamily="34" charset="-122"/>
                 <a:cs typeface="Inter" pitchFamily="34" charset="-120"/>
               </a:rPr>
-              <a:t>SAP finans modülleri ve bulut mimarisinde on yılı aşkın saha deneyimi.</a:t>
+              <a:t>SAP finans modülleri ve bulut mimarisinde on yılı aşkın deneyim.</a:t>
             </a:r>
             <a:endParaRPr lang="en-US" sz="1200" dirty="0"/>
           </a:p>
@@ -6205,7 +6205,7 @@
                 <a:ea typeface="Inter" pitchFamily="34" charset="-122"/>
                 <a:cs typeface="Inter" pitchFamily="34" charset="-120"/>
               </a:rPr>
-              <a:t>Küçük ve kıdemli bir ekip. Öğrenme süresi sizin bütçenizden çıkmaz.</a:t>
+              <a:t>Tanıştığınız danışman, projede çalışan kişidir.</a:t>
             </a:r>
             <a:endParaRPr lang="en-US" sz="1100" dirty="0"/>
           </a:p>
@@ -6331,7 +6331,7 @@
                 <a:ea typeface="Inter" pitchFamily="34" charset="-122"/>
                 <a:cs typeface="Inter" pitchFamily="34" charset="-120"/>
               </a:rPr>
-              <a:t>Yalnızca finans ve bulut mimarisi. Zor kısım dışarıya verilmez.</a:t>
+              <a:t>Finans ve bulut mimarisi. Zor kısım bizde kalır.</a:t>
             </a:r>
             <a:endParaRPr lang="en-US" sz="1100" dirty="0"/>
           </a:p>
@@ -7188,7 +7188,7 @@
                 <a:ea typeface="Inter" pitchFamily="34" charset="-122"/>
                 <a:cs typeface="Inter" pitchFamily="34" charset="-120"/>
               </a:rPr>
-              <a:t>Geniş kapsam satılır, sonra her alan için ayrı bir uzman aranır — ve en kritik finans kararı, o konuyu en az görmüş kişiye kalır.</a:t>
+              <a:t>Geniş kapsam satılır, her alana ayrı uzman aranır — ve en zor karar, o konuyu en az görmüş kişiye kalır.</a:t>
             </a:r>
             <a:endParaRPr lang="en-US" sz="1300" dirty="0"/>
           </a:p>
@@ -8327,7 +8327,7 @@
                 <a:ea typeface="Inter" pitchFamily="34" charset="-122"/>
                 <a:cs typeface="Inter" pitchFamily="34" charset="-120"/>
               </a:rPr>
-              <a:t>Şirket yapısı. Geçiş yöntemi. Bulut modeli. İlk haftalarda karara bağlanır — bedeli on yıl boyunca ödenir.</a:t>
+              <a:t>Şirket yapısı. Geçiş yöntemi. Bulut modeli. İlk haftalarda karara bağlanır, on yıl boyunca yaşanır.</a:t>
             </a:r>
             <a:endParaRPr lang="en-US" sz="1300" dirty="0"/>
           </a:p>
@@ -8392,7 +8392,7 @@
                 <a:ea typeface="Schibsted Grotesk" pitchFamily="34" charset="-122"/>
                 <a:cs typeface="Schibsted Grotesk" pitchFamily="34" charset="-120"/>
               </a:rPr>
-              <a:t>Ölçmeden verilen tavsiye bir tahmindir; tahminin maliyeti ise size kalır.</a:t>
+              <a:t>Ölçmeden verilen tavsiye bir tahmindir; sonucuna siz katlanırsınız.</a:t>
             </a:r>
             <a:endParaRPr lang="en-US" sz="1500" dirty="0"/>
           </a:p>
@@ -8431,7 +8431,7 @@
                 <a:ea typeface="IBM Plex Mono" pitchFamily="34" charset="-122"/>
                 <a:cs typeface="IBM Plex Mono" pitchFamily="34" charset="-120"/>
               </a:rPr>
-              <a:t>KARARI GERİ ALMANIN MALİYETİ</a:t>
+              <a:t>KARARI GERİ ALMANIN ZORLUĞU</a:t>
             </a:r>
             <a:endParaRPr lang="en-US" sz="900" dirty="0"/>
           </a:p>
@@ -8819,7 +8819,7 @@
                 <a:ea typeface="Inter" pitchFamily="34" charset="-122"/>
                 <a:cs typeface="Inter" pitchFamily="34" charset="-120"/>
               </a:rPr>
-              <a:t>bedeli burada ödenir</a:t>
+              <a:t>burada yaşanır</a:t>
             </a:r>
             <a:endParaRPr lang="en-US" sz="1000" dirty="0"/>
           </a:p>
@@ -9092,7 +9092,7 @@
                 <a:ea typeface="Inter" pitchFamily="34" charset="-122"/>
                 <a:cs typeface="Inter" pitchFamily="34" charset="-120"/>
               </a:rPr>
-              <a:t>SAP sorunlarının çoğu modül sorunu değildir. Bu üçünün arasındaki dikişlerde durur.</a:t>
+              <a:t>SAP sorunlarının çoğu bu üçünün arasındaki dikişlerde durur.</a:t>
             </a:r>
             <a:endParaRPr lang="en-US" sz="1250" dirty="0"/>
           </a:p>
@@ -9193,7 +9193,7 @@
                 <a:ea typeface="Schibsted Grotesk" pitchFamily="34" charset="-122"/>
                 <a:cs typeface="Schibsted Grotesk" pitchFamily="34" charset="-120"/>
               </a:rPr>
-              <a:t>İşin defterlerini gerçekte nasıl kapattığı</a:t>
+              <a:t>Defterlerin gerçekte nasıl kapandığı</a:t>
             </a:r>
             <a:endParaRPr lang="en-US" sz="1500" dirty="0"/>
           </a:p>
@@ -9359,7 +9359,7 @@
                 <a:ea typeface="Schibsted Grotesk" pitchFamily="34" charset="-122"/>
                 <a:cs typeface="Schibsted Grotesk" pitchFamily="34" charset="-120"/>
               </a:rPr>
-              <a:t>Sürecin üzerinde koştuğu zemin</a:t>
+              <a:t>Üzerinde koşmak zorunda olduğu zemin</a:t>
             </a:r>
             <a:endParaRPr lang="en-US" sz="1500" dirty="0"/>
           </a:p>
@@ -9525,7 +9525,7 @@
                 <a:ea typeface="Schibsted Grotesk" pitchFamily="34" charset="-122"/>
                 <a:cs typeface="Schibsted Grotesk" pitchFamily="34" charset="-120"/>
               </a:rPr>
-              <a:t>Güvenle elden çıkabilecek işler</a:t>
+              <a:t>Elle yapılmaktan çıkabilecek işler</a:t>
             </a:r>
             <a:endParaRPr lang="en-US" sz="1500" dirty="0"/>
           </a:p>
@@ -10598,7 +10598,7 @@
                 <a:ea typeface="Schibsted Grotesk" pitchFamily="34" charset="-122"/>
                 <a:cs typeface="Schibsted Grotesk" pitchFamily="34" charset="-120"/>
               </a:rPr>
-              <a:t>Kullanım istatistikleri. Veri kalitesi. Custom kod envanteri. Adım adım ölçülen kapanış süreleri.</a:t>
+              <a:t>Kullanım istatistikleri. Veri kalitesi. Custom kod. Kapanış süreleri.</a:t>
             </a:r>
             <a:endParaRPr lang="en-US" sz="1500" dirty="0"/>
           </a:p>
@@ -10640,7 +10640,7 @@
                 <a:ea typeface="Inter" pitchFamily="34" charset="-122"/>
                 <a:cs typeface="Inter" pitchFamily="34" charset="-120"/>
               </a:rPr>
-              <a:t>Sistemin ne yaptığı — dokümanın ne dediği değil. İkisi arasındaki fark çoğu zaman sorunun kendisidir.</a:t>
+              <a:t>Sistemin ne yaptığı — dokümanın ne dediği değil. Aradaki fark, çoğu zaman sorunun kendisidir.</a:t>
             </a:r>
             <a:endParaRPr lang="en-US" sz="1150" dirty="0"/>
           </a:p>
@@ -10705,7 +10705,7 @@
                 <a:ea typeface="Inter" pitchFamily="34" charset="-122"/>
                 <a:cs typeface="Inter" pitchFamily="34" charset="-120"/>
               </a:rPr>
-              <a:t>Hemen her çalışma bir değerlendirmeyle başlar</a:t>
+              <a:t>Her çalışma bir değerlendirmeyle başlar</a:t>
             </a:r>
             <a:endParaRPr lang="en-US" sz="1050" dirty="0"/>
           </a:p>
@@ -11172,7 +11172,7 @@
                 <a:ea typeface="Inter" pitchFamily="34" charset="-122"/>
                 <a:cs typeface="Inter" pitchFamily="34" charset="-120"/>
               </a:rPr>
-              <a:t>Hız ve öngörülebilir işletme maliyeti — değiştirilemeyen bir çekirdek karşılığında.</a:t>
+              <a:t>Hız ve düşük işletme yükü — değiştiremeyeceğiniz bir çekirdek karşılığında.</a:t>
             </a:r>
             <a:endParaRPr lang="en-US" sz="1150" dirty="0"/>
           </a:p>
@@ -11395,7 +11395,7 @@
                 <a:ea typeface="Inter" pitchFamily="34" charset="-122"/>
                 <a:cs typeface="Inter" pitchFamily="34" charset="-120"/>
               </a:rPr>
-              <a:t>Kendi geliştirmeleriniz kalır — daha fazla sorumluluk ve daha uzun bir kurulum karşılığında.</a:t>
+              <a:t>Kendi geliştirmeleriniz kalır — daha fazla sorumluluk ve daha uzun kurulum karşılığında.</a:t>
             </a:r>
             <a:endParaRPr lang="en-US" sz="1150" dirty="0"/>
           </a:p>
@@ -11599,7 +11599,7 @@
                 <a:ea typeface="Inter" pitchFamily="34" charset="-122"/>
                 <a:cs typeface="Inter" pitchFamily="34" charset="-120"/>
               </a:rPr>
-              <a:t>Biri diğerinin gelişmiş sürümü değildir. İki maliyeti ve iki kısıtı yan yana koyarız; karar sizde kalır ve verilecek an sözleşmeden öncedir.</a:t>
+              <a:t>Biri diğerinin gelişmiş sürümü değildir. İki modelin kısıtlarını yan yana koyarız; karar sizde kalır.</a:t>
             </a:r>
             <a:endParaRPr lang="en-US" sz="1150" dirty="0"/>
           </a:p>
@@ -11875,7 +11875,7 @@
                 <a:ea typeface="Inter" pitchFamily="34" charset="-122"/>
                 <a:cs typeface="Inter" pitchFamily="34" charset="-120"/>
               </a:rPr>
-              <a:t>Her adımın sonunda ne teslim edileceği baştan bellidir. Her kapıda devam kararı yeniden verilir.</a:t>
+              <a:t>Her adımın çıktısı baştan bellidir. Her kapıda devam kararı yeniden verilir.</a:t>
             </a:r>
             <a:endParaRPr lang="en-US" sz="1150" dirty="0"/>
           </a:p>
@@ -12862,7 +12862,7 @@
                 <a:ea typeface="Inter" pitchFamily="34" charset="-122"/>
                 <a:cs typeface="Inter" pitchFamily="34" charset="-120"/>
               </a:rPr>
-              <a:t>İlk kapanış ekibinizle birlikte, iyileştirme listesi</a:t>
+              <a:t>İlk kapanış birlikte, iyileştirme listesi</a:t>
             </a:r>
             <a:endParaRPr lang="en-US" sz="1050" dirty="0"/>
           </a:p>
@@ -13340,7 +13340,7 @@
                 <a:ea typeface="Inter" pitchFamily="34" charset="-122"/>
                 <a:cs typeface="Inter" pitchFamily="34" charset="-120"/>
               </a:rPr>
-              <a:t>FI ve CO’da derinlik, yan yetkinlik değil</a:t>
+              <a:t>FI ve CO’da derinlik</a:t>
             </a:r>
             <a:endParaRPr lang="en-US" sz="1150" dirty="0"/>
           </a:p>
@@ -13382,7 +13382,7 @@
                 <a:ea typeface="Inter" pitchFamily="34" charset="-122"/>
                 <a:cs typeface="Inter" pitchFamily="34" charset="-120"/>
               </a:rPr>
-              <a:t>Kapanışı sıralı değil, paralel işleyecek biçimde yeniden kurmak</a:t>
+              <a:t>Kapanışı paralel işleyecek biçimde yeniden kurmak</a:t>
             </a:r>
             <a:endParaRPr lang="en-US" sz="1150" dirty="0"/>
           </a:p>
@@ -13529,7 +13529,7 @@
                 <a:ea typeface="Inter" pitchFamily="34" charset="-122"/>
                 <a:cs typeface="Inter" pitchFamily="34" charset="-120"/>
               </a:rPr>
-              <a:t>Bulut modellerinde tarafsız bir okuma</a:t>
+              <a:t>Bulut modellerinde tarafsız okuma</a:t>
             </a:r>
             <a:endParaRPr lang="en-US" sz="1150" dirty="0"/>
           </a:p>
@@ -13571,7 +13571,7 @@
                 <a:ea typeface="Inter" pitchFamily="34" charset="-122"/>
                 <a:cs typeface="Inter" pitchFamily="34" charset="-120"/>
               </a:rPr>
-              <a:t>Süreçlerinizi standart kapsamla, sözleşmeden önce karşılaştırmak</a:t>
+              <a:t>Süreçleri standart kapsamla ölçmek</a:t>
             </a:r>
             <a:endParaRPr lang="en-US" sz="1150" dirty="0"/>
           </a:p>
@@ -13613,7 +13613,7 @@
                 <a:ea typeface="Schibsted Grotesk" pitchFamily="34" charset="-122"/>
                 <a:cs typeface="Schibsted Grotesk" pitchFamily="34" charset="-120"/>
               </a:rPr>
-              <a:t>Projenin ortasında ayakta kalan bir model kararı</a:t>
+              <a:t>Projenin ortasında ayakta kalan model kararı</a:t>
             </a:r>
             <a:endParaRPr lang="en-US" sz="1300" dirty="0"/>
           </a:p>
@@ -13760,7 +13760,7 @@
                 <a:ea typeface="Inter" pitchFamily="34" charset="-122"/>
                 <a:cs typeface="Inter" pitchFamily="34" charset="-120"/>
               </a:rPr>
-              <a:t>Eşikleri kendi verinizle kalibre etmek, denetim kurallarını yazmak</a:t>
+              <a:t>Eşikleri kendi verinizle kalibre etmek</a:t>
             </a:r>
             <a:endParaRPr lang="en-US" sz="1150" dirty="0"/>
           </a:p>
@@ -13802,7 +13802,7 @@
                 <a:ea typeface="Schibsted Grotesk" pitchFamily="34" charset="-122"/>
                 <a:cs typeface="Schibsted Grotesk" pitchFamily="34" charset="-120"/>
               </a:rPr>
-              <a:t>Ekip, kalem eşleştirmekten istisna incelemeye geçer</a:t>
+              <a:t>Ekip, eşleştirme yerine istisna inceler</a:t>
             </a:r>
             <a:endParaRPr lang="en-US" sz="1300" dirty="0"/>
           </a:p>
@@ -14236,7 +14236,7 @@
                 <a:ea typeface="Inter" pitchFamily="34" charset="-122"/>
                 <a:cs typeface="Inter" pitchFamily="34" charset="-120"/>
               </a:rPr>
-              <a:t>FI, CO, PA ve PS; beş paralel yapı değil, tek bir süreç mimarisi olarak.</a:t>
+              <a:t>FI, CO, PA ve PS; beş paralel yapı değil, tek mimari.</a:t>
             </a:r>
             <a:endParaRPr lang="en-US" sz="1050" dirty="0"/>
           </a:p>
@@ -14556,7 +14556,7 @@
                 <a:ea typeface="Inter" pitchFamily="34" charset="-122"/>
                 <a:cs typeface="Inter" pitchFamily="34" charset="-120"/>
               </a:rPr>
-              <a:t>Süreçlerinizin ne kadarı standarda oturuyor — taahhütten önce belirlenir.</a:t>
+              <a:t>Süreçlerinizin ne kadarı standarda oturuyor.</a:t>
             </a:r>
             <a:endParaRPr lang="en-US" sz="1050" dirty="0"/>
           </a:p>
@@ -14716,7 +14716,7 @@
                 <a:ea typeface="Inter" pitchFamily="34" charset="-122"/>
                 <a:cs typeface="Inter" pitchFamily="34" charset="-120"/>
               </a:rPr>
-              <a:t>Mimari, göç ve RISE sözleşmesinin açık bıraktığı sorumluluk sınırları.</a:t>
+              <a:t>Mimari, göç ve RISE’ın açık bıraktığı sorumluluk sınırları.</a:t>
             </a:r>
             <a:endParaRPr lang="en-US" sz="1050" dirty="0"/>
           </a:p>
@@ -14876,7 +14876,7 @@
                 <a:ea typeface="Inter" pitchFamily="34" charset="-122"/>
                 <a:cs typeface="Inter" pitchFamily="34" charset="-120"/>
               </a:rPr>
-              <a:t>Veri hacmi ve süreç disiplininin desteklediği yetenekler — sıralanarak.</a:t>
+              <a:t>Verinizin ve disiplininizin gerçekten taşıdığı yetenekler.</a:t>
             </a:r>
             <a:endParaRPr lang="en-US" sz="1050" dirty="0"/>
           </a:p>

--- a/presentation/CPeak-Consultancy-Kurumsal-Sunum-TR.pptx
+++ b/presentation/CPeak-Consultancy-Kurumsal-Sunum-TR.pptx
@@ -1659,7 +1659,7 @@
           <a:p>
             <a:r>
               <a:rPr lang="en-US" dirty="0"/>
-              <a:t>Beş yetkinlik alanı, müşterinin geldiği soru üzerinden.</a:t>
+              <a:t>Beş yetkinlik alanı.</a:t>
             </a:r>
             <a:endParaRPr lang="en-US" dirty="0"/>
           </a:p>
@@ -2127,8 +2127,8 @@
         </p:nvSpPr>
         <p:spPr>
           <a:xfrm>
-            <a:off x="777240" y="2377440"/>
-            <a:ext cx="8595360" cy="2011680"/>
+            <a:off x="777240" y="2542032"/>
+            <a:ext cx="8595360" cy="1645920"/>
           </a:xfrm>
           <a:prstGeom prst="rect">
             <a:avLst/>
@@ -2155,7 +2155,7 @@
                 <a:ea typeface="Schibsted Grotesk" pitchFamily="34" charset="-122"/>
                 <a:cs typeface="Schibsted Grotesk" pitchFamily="34" charset="-120"/>
               </a:rPr>
-              <a:t>Finans, bir ERP’nin</a:t>
+              <a:t>Finans odaklı</a:t>
             </a:r>
             <a:endParaRPr lang="en-US" sz="4400" dirty="0"/>
           </a:p>
@@ -2175,27 +2175,7 @@
                 <a:ea typeface="Schibsted Grotesk" pitchFamily="34" charset="-122"/>
                 <a:cs typeface="Schibsted Grotesk" pitchFamily="34" charset="-120"/>
               </a:rPr>
-              <a:t>en affetmez</a:t>
-            </a:r>
-            <a:endParaRPr lang="en-US" sz="4400" dirty="0"/>
-          </a:p>
-          <a:p>
-            <a:pPr indent="0" marL="0">
-              <a:lnSpc>
-                <a:spcPts val="5100"/>
-              </a:lnSpc>
-              <a:buNone/>
-            </a:pPr>
-            <a:r>
-              <a:rPr lang="en-US" sz="4400" b="1" dirty="0">
-                <a:solidFill>
-                  <a:srgbClr val="FFFFFF"/>
-                </a:solidFill>
-                <a:latin typeface="Schibsted Grotesk" pitchFamily="34" charset="0"/>
-                <a:ea typeface="Schibsted Grotesk" pitchFamily="34" charset="-122"/>
-                <a:cs typeface="Schibsted Grotesk" pitchFamily="34" charset="-120"/>
-              </a:rPr>
-              <a:t>alanıdır.</a:t>
+              <a:t>SAP dönüşümü.</a:t>
             </a:r>
             <a:endParaRPr lang="en-US" sz="4400" dirty="0"/>
           </a:p>
@@ -2503,12 +2483,12 @@
           <a:p>
             <a:pPr indent="0" marL="0">
               <a:lnSpc>
-                <a:spcPts val="3364"/>
+                <a:spcPts val="4176"/>
               </a:lnSpc>
               <a:buNone/>
             </a:pPr>
             <a:r>
-              <a:rPr lang="en-US" sz="2900" b="1" dirty="0">
+              <a:rPr lang="en-US" sz="3600" b="1" dirty="0">
                 <a:solidFill>
                   <a:srgbClr val="FFFFFF"/>
                 </a:solidFill>
@@ -2516,29 +2496,9 @@
                 <a:ea typeface="Schibsted Grotesk" pitchFamily="34" charset="-122"/>
                 <a:cs typeface="Schibsted Grotesk" pitchFamily="34" charset="-120"/>
               </a:rPr>
-              <a:t>Yapay zekayı iki yerde kullanırız:</a:t>
-            </a:r>
-            <a:endParaRPr lang="en-US" sz="2900" dirty="0"/>
-          </a:p>
-          <a:p>
-            <a:pPr indent="0" marL="0">
-              <a:lnSpc>
-                <a:spcPts val="3364"/>
-              </a:lnSpc>
-              <a:buNone/>
-            </a:pPr>
-            <a:r>
-              <a:rPr lang="en-US" sz="2900" b="1" dirty="0">
-                <a:solidFill>
-                  <a:srgbClr val="FFFFFF"/>
-                </a:solidFill>
-                <a:latin typeface="Schibsted Grotesk" pitchFamily="34" charset="0"/>
-                <a:ea typeface="Schibsted Grotesk" pitchFamily="34" charset="-122"/>
-                <a:cs typeface="Schibsted Grotesk" pitchFamily="34" charset="-120"/>
-              </a:rPr>
-              <a:t>sizin süreçlerinizde ve kendi işimizde.</a:t>
-            </a:r>
-            <a:endParaRPr lang="en-US" sz="2900" dirty="0"/>
+              <a:t>Sistemde ve teslimde yapay zeka.</a:t>
+            </a:r>
+            <a:endParaRPr lang="en-US" sz="3600" dirty="0"/>
           </a:p>
         </p:txBody>
       </p:sp>
@@ -2653,7 +2613,7 @@
         </p:nvSpPr>
         <p:spPr>
           <a:xfrm>
-            <a:off x="777240" y="2340864"/>
+            <a:off x="777240" y="2395728"/>
             <a:ext cx="4754880" cy="237744"/>
           </a:xfrm>
           <a:prstGeom prst="rect">
@@ -2692,7 +2652,7 @@
         </p:nvSpPr>
         <p:spPr>
           <a:xfrm>
-            <a:off x="777240" y="2651760"/>
+            <a:off x="777240" y="2706624"/>
             <a:ext cx="4754880" cy="365760"/>
           </a:xfrm>
           <a:prstGeom prst="rect">
@@ -2731,7 +2691,7 @@
         </p:nvSpPr>
         <p:spPr>
           <a:xfrm>
-            <a:off x="777240" y="3145536"/>
+            <a:off x="777240" y="3200400"/>
             <a:ext cx="4754880" cy="0"/>
           </a:xfrm>
           <a:prstGeom prst="line">
@@ -2756,7 +2716,7 @@
         </p:nvSpPr>
         <p:spPr>
           <a:xfrm>
-            <a:off x="777240" y="3355848"/>
+            <a:off x="777240" y="3465576"/>
             <a:ext cx="91440" cy="91440"/>
           </a:xfrm>
           <a:prstGeom prst="ellipse">
@@ -2776,7 +2736,7 @@
         </p:nvSpPr>
         <p:spPr>
           <a:xfrm>
-            <a:off x="1051560" y="3291840"/>
+            <a:off x="1051560" y="3401568"/>
             <a:ext cx="4480560" cy="566928"/>
           </a:xfrm>
           <a:prstGeom prst="rect">
@@ -2818,7 +2778,7 @@
         </p:nvSpPr>
         <p:spPr>
           <a:xfrm>
-            <a:off x="777240" y="3995928"/>
+            <a:off x="777240" y="4251960"/>
             <a:ext cx="91440" cy="91440"/>
           </a:xfrm>
           <a:prstGeom prst="ellipse">
@@ -2838,7 +2798,7 @@
         </p:nvSpPr>
         <p:spPr>
           <a:xfrm>
-            <a:off x="1051560" y="3931920"/>
+            <a:off x="1051560" y="4187952"/>
             <a:ext cx="4480560" cy="566928"/>
           </a:xfrm>
           <a:prstGeom prst="rect">
@@ -2880,7 +2840,7 @@
         </p:nvSpPr>
         <p:spPr>
           <a:xfrm>
-            <a:off x="777240" y="4636008"/>
+            <a:off x="777240" y="5038344"/>
             <a:ext cx="91440" cy="91440"/>
           </a:xfrm>
           <a:prstGeom prst="ellipse">
@@ -2900,7 +2860,7 @@
         </p:nvSpPr>
         <p:spPr>
           <a:xfrm>
-            <a:off x="1051560" y="4572000"/>
+            <a:off x="1051560" y="4974336"/>
             <a:ext cx="4480560" cy="566928"/>
           </a:xfrm>
           <a:prstGeom prst="rect">
@@ -2936,75 +2896,13 @@
       </p:sp>
       <p:sp>
         <p:nvSpPr>
-          <p:cNvPr id="17" name="Shape 14"/>
-          <p:cNvSpPr/>
-          <p:nvPr/>
-        </p:nvSpPr>
-        <p:spPr>
-          <a:xfrm>
-            <a:off x="777240" y="5276088"/>
-            <a:ext cx="91440" cy="91440"/>
-          </a:xfrm>
-          <a:prstGeom prst="ellipse">
-            <a:avLst/>
-          </a:prstGeom>
-          <a:solidFill>
-            <a:srgbClr val="E8B33A"/>
-          </a:solidFill>
-          <a:ln/>
-        </p:spPr>
-      </p:sp>
-      <p:sp>
-        <p:nvSpPr>
-          <p:cNvPr id="18" name="Text 15"/>
-          <p:cNvSpPr txBox="1"/>
-          <p:nvPr/>
-        </p:nvSpPr>
-        <p:spPr>
-          <a:xfrm>
-            <a:off x="1051560" y="5212080"/>
-            <a:ext cx="4480560" cy="566928"/>
-          </a:xfrm>
-          <a:prstGeom prst="rect">
-            <a:avLst/>
-          </a:prstGeom>
-          <a:noFill/>
-          <a:ln/>
-        </p:spPr>
-        <p:txBody>
-          <a:bodyPr wrap="square" lIns="0" tIns="0" rIns="0" bIns="0" rtlCol="0" anchor="t"/>
-          <a:lstStyle/>
-          <a:p>
-            <a:pPr indent="0" marL="0">
-              <a:lnSpc>
-                <a:spcPts val="1700"/>
-              </a:lnSpc>
-              <a:buNone/>
-            </a:pPr>
-            <a:r>
-              <a:rPr lang="en-US" sz="1100" dirty="0">
-                <a:solidFill>
-                  <a:srgbClr val="FFFFFF"/>
-                </a:solidFill>
-                <a:latin typeface="Inter" pitchFamily="34" charset="0"/>
-                <a:ea typeface="Inter" pitchFamily="34" charset="-122"/>
-                <a:cs typeface="Inter" pitchFamily="34" charset="-120"/>
-              </a:rPr>
-              <a:t>Joule — doğal dille sorgulama ve gezinme</a:t>
-            </a:r>
-            <a:endParaRPr lang="en-US" sz="1100" dirty="0"/>
-          </a:p>
-        </p:txBody>
-      </p:sp>
-      <p:sp>
-        <p:nvSpPr>
-          <p:cNvPr id="19" name="Text 16"/>
-          <p:cNvSpPr txBox="1"/>
-          <p:nvPr/>
-        </p:nvSpPr>
-        <p:spPr>
-          <a:xfrm>
-            <a:off x="6659575" y="2340864"/>
+          <p:cNvPr id="17" name="Text 14"/>
+          <p:cNvSpPr txBox="1"/>
+          <p:nvPr/>
+        </p:nvSpPr>
+        <p:spPr>
+          <a:xfrm>
+            <a:off x="6659575" y="2395728"/>
             <a:ext cx="4754880" cy="237744"/>
           </a:xfrm>
           <a:prstGeom prst="rect">
@@ -3037,13 +2935,13 @@
       </p:sp>
       <p:sp>
         <p:nvSpPr>
-          <p:cNvPr id="20" name="Text 17"/>
-          <p:cNvSpPr txBox="1"/>
-          <p:nvPr/>
-        </p:nvSpPr>
-        <p:spPr>
-          <a:xfrm>
-            <a:off x="6659575" y="2651760"/>
+          <p:cNvPr id="18" name="Text 15"/>
+          <p:cNvSpPr txBox="1"/>
+          <p:nvPr/>
+        </p:nvSpPr>
+        <p:spPr>
+          <a:xfrm>
+            <a:off x="6659575" y="2706624"/>
             <a:ext cx="4754880" cy="365760"/>
           </a:xfrm>
           <a:prstGeom prst="rect">
@@ -3076,13 +2974,13 @@
       </p:sp>
       <p:sp>
         <p:nvSpPr>
-          <p:cNvPr id="21" name="Shape 18"/>
+          <p:cNvPr id="19" name="Shape 16"/>
           <p:cNvSpPr/>
           <p:nvPr/>
         </p:nvSpPr>
         <p:spPr>
           <a:xfrm>
-            <a:off x="6659575" y="3145536"/>
+            <a:off x="6659575" y="3200400"/>
             <a:ext cx="4754880" cy="0"/>
           </a:xfrm>
           <a:prstGeom prst="line">
@@ -3101,13 +2999,13 @@
       </p:sp>
       <p:sp>
         <p:nvSpPr>
-          <p:cNvPr id="22" name="Shape 19"/>
+          <p:cNvPr id="20" name="Shape 17"/>
           <p:cNvSpPr/>
           <p:nvPr/>
         </p:nvSpPr>
         <p:spPr>
           <a:xfrm>
-            <a:off x="6659575" y="3355848"/>
+            <a:off x="6659575" y="3465576"/>
             <a:ext cx="91440" cy="91440"/>
           </a:xfrm>
           <a:prstGeom prst="ellipse">
@@ -3121,13 +3019,13 @@
       </p:sp>
       <p:sp>
         <p:nvSpPr>
-          <p:cNvPr id="23" name="Text 20"/>
-          <p:cNvSpPr txBox="1"/>
-          <p:nvPr/>
-        </p:nvSpPr>
-        <p:spPr>
-          <a:xfrm>
-            <a:off x="6933895" y="3291840"/>
+          <p:cNvPr id="21" name="Text 18"/>
+          <p:cNvSpPr txBox="1"/>
+          <p:nvPr/>
+        </p:nvSpPr>
+        <p:spPr>
+          <a:xfrm>
+            <a:off x="6933895" y="3401568"/>
             <a:ext cx="4480560" cy="566928"/>
           </a:xfrm>
           <a:prstGeom prst="rect">
@@ -3163,13 +3061,13 @@
       </p:sp>
       <p:sp>
         <p:nvSpPr>
-          <p:cNvPr id="24" name="Shape 21"/>
+          <p:cNvPr id="22" name="Shape 19"/>
           <p:cNvSpPr/>
           <p:nvPr/>
         </p:nvSpPr>
         <p:spPr>
           <a:xfrm>
-            <a:off x="6659575" y="3995928"/>
+            <a:off x="6659575" y="4251960"/>
             <a:ext cx="91440" cy="91440"/>
           </a:xfrm>
           <a:prstGeom prst="ellipse">
@@ -3183,13 +3081,13 @@
       </p:sp>
       <p:sp>
         <p:nvSpPr>
-          <p:cNvPr id="25" name="Text 22"/>
-          <p:cNvSpPr txBox="1"/>
-          <p:nvPr/>
-        </p:nvSpPr>
-        <p:spPr>
-          <a:xfrm>
-            <a:off x="6933895" y="3931920"/>
+          <p:cNvPr id="23" name="Text 20"/>
+          <p:cNvSpPr txBox="1"/>
+          <p:nvPr/>
+        </p:nvSpPr>
+        <p:spPr>
+          <a:xfrm>
+            <a:off x="6933895" y="4187952"/>
             <a:ext cx="4480560" cy="566928"/>
           </a:xfrm>
           <a:prstGeom prst="rect">
@@ -3225,13 +3123,13 @@
       </p:sp>
       <p:sp>
         <p:nvSpPr>
-          <p:cNvPr id="26" name="Shape 23"/>
+          <p:cNvPr id="24" name="Shape 21"/>
           <p:cNvSpPr/>
           <p:nvPr/>
         </p:nvSpPr>
         <p:spPr>
           <a:xfrm>
-            <a:off x="6659575" y="4636008"/>
+            <a:off x="6659575" y="5038344"/>
             <a:ext cx="91440" cy="91440"/>
           </a:xfrm>
           <a:prstGeom prst="ellipse">
@@ -3245,13 +3143,13 @@
       </p:sp>
       <p:sp>
         <p:nvSpPr>
-          <p:cNvPr id="27" name="Text 24"/>
-          <p:cNvSpPr txBox="1"/>
-          <p:nvPr/>
-        </p:nvSpPr>
-        <p:spPr>
-          <a:xfrm>
-            <a:off x="6933895" y="4572000"/>
+          <p:cNvPr id="25" name="Text 22"/>
+          <p:cNvSpPr txBox="1"/>
+          <p:nvPr/>
+        </p:nvSpPr>
+        <p:spPr>
+          <a:xfrm>
+            <a:off x="6933895" y="4974336"/>
             <a:ext cx="4480560" cy="566928"/>
           </a:xfrm>
           <a:prstGeom prst="rect">
@@ -3287,75 +3185,13 @@
       </p:sp>
       <p:sp>
         <p:nvSpPr>
-          <p:cNvPr id="28" name="Shape 25"/>
+          <p:cNvPr id="26" name="Shape 23"/>
           <p:cNvSpPr/>
           <p:nvPr/>
         </p:nvSpPr>
         <p:spPr>
           <a:xfrm>
-            <a:off x="6659575" y="5276088"/>
-            <a:ext cx="91440" cy="91440"/>
-          </a:xfrm>
-          <a:prstGeom prst="ellipse">
-            <a:avLst/>
-          </a:prstGeom>
-          <a:solidFill>
-            <a:srgbClr val="E8B33A"/>
-          </a:solidFill>
-          <a:ln/>
-        </p:spPr>
-      </p:sp>
-      <p:sp>
-        <p:nvSpPr>
-          <p:cNvPr id="29" name="Text 26"/>
-          <p:cNvSpPr txBox="1"/>
-          <p:nvPr/>
-        </p:nvSpPr>
-        <p:spPr>
-          <a:xfrm>
-            <a:off x="6933895" y="5212080"/>
-            <a:ext cx="4480560" cy="566928"/>
-          </a:xfrm>
-          <a:prstGeom prst="rect">
-            <a:avLst/>
-          </a:prstGeom>
-          <a:noFill/>
-          <a:ln/>
-        </p:spPr>
-        <p:txBody>
-          <a:bodyPr wrap="square" lIns="0" tIns="0" rIns="0" bIns="0" rtlCol="0" anchor="t"/>
-          <a:lstStyle/>
-          <a:p>
-            <a:pPr indent="0" marL="0">
-              <a:lnSpc>
-                <a:spcPts val="1700"/>
-              </a:lnSpc>
-              <a:buNone/>
-            </a:pPr>
-            <a:r>
-              <a:rPr lang="en-US" sz="1100" dirty="0">
-                <a:solidFill>
-                  <a:srgbClr val="FFFFFF"/>
-                </a:solidFill>
-                <a:latin typeface="Inter" pitchFamily="34" charset="0"/>
-                <a:ea typeface="Inter" pitchFamily="34" charset="-122"/>
-                <a:cs typeface="Inter" pitchFamily="34" charset="-120"/>
-              </a:rPr>
-              <a:t>Konfigürasyon dokümanlarının ilk sürümleri</a:t>
-            </a:r>
-            <a:endParaRPr lang="en-US" sz="1100" dirty="0"/>
-          </a:p>
-        </p:txBody>
-      </p:sp>
-      <p:sp>
-        <p:nvSpPr>
-          <p:cNvPr id="30" name="Shape 27"/>
-          <p:cNvSpPr/>
-          <p:nvPr/>
-        </p:nvSpPr>
-        <p:spPr>
-          <a:xfrm>
-            <a:off x="777240" y="5687568"/>
+            <a:off x="777240" y="5449824"/>
             <a:ext cx="10637215" cy="0"/>
           </a:xfrm>
           <a:prstGeom prst="line">
@@ -3374,13 +3210,13 @@
       </p:sp>
       <p:sp>
         <p:nvSpPr>
-          <p:cNvPr id="31" name="Text 28"/>
-          <p:cNvSpPr txBox="1"/>
-          <p:nvPr/>
-        </p:nvSpPr>
-        <p:spPr>
-          <a:xfrm>
-            <a:off x="777240" y="5815584"/>
+          <p:cNvPr id="27" name="Text 24"/>
+          <p:cNvSpPr txBox="1"/>
+          <p:nvPr/>
+        </p:nvSpPr>
+        <p:spPr>
+          <a:xfrm>
+            <a:off x="777240" y="5577840"/>
             <a:ext cx="10607040" cy="310896"/>
           </a:xfrm>
           <a:prstGeom prst="rect">
@@ -3505,12 +3341,12 @@
           <a:p>
             <a:pPr indent="0" marL="0">
               <a:lnSpc>
-                <a:spcPts val="3480"/>
+                <a:spcPts val="4640"/>
               </a:lnSpc>
               <a:buNone/>
             </a:pPr>
             <a:r>
-              <a:rPr lang="en-US" sz="3000" b="1" dirty="0">
+              <a:rPr lang="en-US" sz="4000" b="1" dirty="0">
                 <a:solidFill>
                   <a:srgbClr val="0E1620"/>
                 </a:solidFill>
@@ -3518,29 +3354,9 @@
                 <a:ea typeface="Schibsted Grotesk" pitchFamily="34" charset="-122"/>
                 <a:cs typeface="Schibsted Grotesk" pitchFamily="34" charset="-120"/>
               </a:rPr>
-              <a:t>Bir uzmanlık, dışarıda</a:t>
-            </a:r>
-            <a:endParaRPr lang="en-US" sz="3000" dirty="0"/>
-          </a:p>
-          <a:p>
-            <a:pPr indent="0" marL="0">
-              <a:lnSpc>
-                <a:spcPts val="3480"/>
-              </a:lnSpc>
-              <a:buNone/>
-            </a:pPr>
-            <a:r>
-              <a:rPr lang="en-US" sz="3000" b="1" dirty="0">
-                <a:solidFill>
-                  <a:srgbClr val="0E1620"/>
-                </a:solidFill>
-                <a:latin typeface="Schibsted Grotesk" pitchFamily="34" charset="0"/>
-                <a:ea typeface="Schibsted Grotesk" pitchFamily="34" charset="-122"/>
-                <a:cs typeface="Schibsted Grotesk" pitchFamily="34" charset="-120"/>
-              </a:rPr>
-              <a:t>bıraktıklarıyla tanımlanır.</a:t>
-            </a:r>
-            <a:endParaRPr lang="en-US" sz="3000" dirty="0"/>
+              <a:t>Net sınırlar.</a:t>
+            </a:r>
+            <a:endParaRPr lang="en-US" sz="4000" dirty="0"/>
           </a:p>
         </p:txBody>
       </p:sp>
@@ -4256,7 +4072,7 @@
                 <a:ea typeface="IBM Plex Mono" pitchFamily="34" charset="-122"/>
                 <a:cs typeface="IBM Plex Mono" pitchFamily="34" charset="-120"/>
               </a:rPr>
-              <a:t>ÇALIŞMA BIÇIMLERI</a:t>
+              <a:t>ÇALIŞMA MODELLERI</a:t>
             </a:r>
             <a:endParaRPr lang="en-US" sz="950" dirty="0"/>
           </a:p>
@@ -4271,7 +4087,7 @@
         <p:spPr>
           <a:xfrm>
             <a:off x="777240" y="960120"/>
-            <a:ext cx="9692640" cy="1463040"/>
+            <a:ext cx="10058400" cy="1463040"/>
           </a:xfrm>
           <a:prstGeom prst="rect">
             <a:avLst/>
@@ -4285,12 +4101,12 @@
           <a:p>
             <a:pPr indent="0" marL="0">
               <a:lnSpc>
-                <a:spcPts val="3596"/>
+                <a:spcPts val="4640"/>
               </a:lnSpc>
               <a:buNone/>
             </a:pPr>
             <a:r>
-              <a:rPr lang="en-US" sz="3100" b="1" dirty="0">
+              <a:rPr lang="en-US" sz="4000" b="1" dirty="0">
                 <a:solidFill>
                   <a:srgbClr val="0E1620"/>
                 </a:solidFill>
@@ -4298,29 +4114,9 @@
                 <a:ea typeface="Schibsted Grotesk" pitchFamily="34" charset="-122"/>
                 <a:cs typeface="Schibsted Grotesk" pitchFamily="34" charset="-120"/>
               </a:rPr>
-              <a:t>Üç biçim. Hangisinin uygun olduğu</a:t>
-            </a:r>
-            <a:endParaRPr lang="en-US" sz="3100" dirty="0"/>
-          </a:p>
-          <a:p>
-            <a:pPr indent="0" marL="0">
-              <a:lnSpc>
-                <a:spcPts val="3596"/>
-              </a:lnSpc>
-              <a:buNone/>
-            </a:pPr>
-            <a:r>
-              <a:rPr lang="en-US" sz="3100" b="1" dirty="0">
-                <a:solidFill>
-                  <a:srgbClr val="0E1620"/>
-                </a:solidFill>
-                <a:latin typeface="Schibsted Grotesk" pitchFamily="34" charset="0"/>
-                <a:ea typeface="Schibsted Grotesk" pitchFamily="34" charset="-122"/>
-                <a:cs typeface="Schibsted Grotesk" pitchFamily="34" charset="-120"/>
-              </a:rPr>
-              <a:t>tek görüşmede belli olur.</a:t>
-            </a:r>
-            <a:endParaRPr lang="en-US" sz="3100" dirty="0"/>
+              <a:t>Üç çalışma modeli.</a:t>
+            </a:r>
+            <a:endParaRPr lang="en-US" sz="4000" dirty="0"/>
           </a:p>
         </p:txBody>
       </p:sp>
@@ -5269,12 +5065,12 @@
           <a:p>
             <a:pPr indent="0" marL="0">
               <a:lnSpc>
-                <a:spcPts val="3828"/>
+                <a:spcPts val="3944"/>
               </a:lnSpc>
               <a:buNone/>
             </a:pPr>
             <a:r>
-              <a:rPr lang="en-US" sz="3300" b="1" dirty="0">
+              <a:rPr lang="en-US" sz="3400" b="1" dirty="0">
                 <a:solidFill>
                   <a:srgbClr val="0E1620"/>
                 </a:solidFill>
@@ -5282,19 +5078,19 @@
                 <a:ea typeface="Schibsted Grotesk" pitchFamily="34" charset="-122"/>
                 <a:cs typeface="Schibsted Grotesk" pitchFamily="34" charset="-120"/>
               </a:rPr>
-              <a:t>Deneyimin geldiği</a:t>
-            </a:r>
-            <a:endParaRPr lang="en-US" sz="3300" dirty="0"/>
+              <a:t>Karmaşık yapılarda</a:t>
+            </a:r>
+            <a:endParaRPr lang="en-US" sz="3400" dirty="0"/>
           </a:p>
           <a:p>
             <a:pPr indent="0" marL="0">
               <a:lnSpc>
-                <a:spcPts val="3828"/>
+                <a:spcPts val="3944"/>
               </a:lnSpc>
               <a:buNone/>
             </a:pPr>
             <a:r>
-              <a:rPr lang="en-US" sz="3300" b="1" dirty="0">
+              <a:rPr lang="en-US" sz="3400" b="1" dirty="0">
                 <a:solidFill>
                   <a:srgbClr val="0E1620"/>
                 </a:solidFill>
@@ -5302,9 +5098,9 @@
                 <a:ea typeface="Schibsted Grotesk" pitchFamily="34" charset="-122"/>
                 <a:cs typeface="Schibsted Grotesk" pitchFamily="34" charset="-120"/>
               </a:rPr>
-              <a:t>kurumsal yapılar.</a:t>
-            </a:r>
-            <a:endParaRPr lang="en-US" sz="3300" dirty="0"/>
+              <a:t>deneyim.</a:t>
+            </a:r>
+            <a:endParaRPr lang="en-US" sz="3400" dirty="0"/>
           </a:p>
         </p:txBody>
       </p:sp>
@@ -5417,7 +5213,7 @@
         </p:nvSpPr>
         <p:spPr>
           <a:xfrm>
-            <a:off x="7589520" y="1060704"/>
+            <a:off x="7589520" y="1097280"/>
             <a:ext cx="3794760" cy="1097280"/>
           </a:xfrm>
           <a:prstGeom prst="rect">
@@ -6046,12 +5842,12 @@
           <a:p>
             <a:pPr indent="0" marL="0">
               <a:lnSpc>
-                <a:spcPts val="4400"/>
+                <a:spcPts val="4800"/>
               </a:lnSpc>
               <a:buNone/>
             </a:pPr>
             <a:r>
-              <a:rPr lang="en-US" sz="3600" b="1" dirty="0">
+              <a:rPr lang="en-US" sz="4000" b="1" dirty="0">
                 <a:solidFill>
                   <a:srgbClr val="FFFFFF"/>
                 </a:solidFill>
@@ -6059,29 +5855,9 @@
                 <a:ea typeface="Schibsted Grotesk" pitchFamily="34" charset="-122"/>
                 <a:cs typeface="Schibsted Grotesk" pitchFamily="34" charset="-120"/>
               </a:rPr>
-              <a:t>Teklifte adı geçen kişiler,</a:t>
-            </a:r>
-            <a:endParaRPr lang="en-US" sz="3600" dirty="0"/>
-          </a:p>
-          <a:p>
-            <a:pPr indent="0" marL="0">
-              <a:lnSpc>
-                <a:spcPts val="4400"/>
-              </a:lnSpc>
-              <a:buNone/>
-            </a:pPr>
-            <a:r>
-              <a:rPr lang="en-US" sz="3600" b="1" dirty="0">
-                <a:solidFill>
-                  <a:srgbClr val="FFFFFF"/>
-                </a:solidFill>
-                <a:latin typeface="Schibsted Grotesk" pitchFamily="34" charset="0"/>
-                <a:ea typeface="Schibsted Grotesk" pitchFamily="34" charset="-122"/>
-                <a:cs typeface="Schibsted Grotesk" pitchFamily="34" charset="-120"/>
-              </a:rPr>
-              <a:t>projeye gelen kişilerdir.</a:t>
-            </a:r>
-            <a:endParaRPr lang="en-US" sz="3600" dirty="0"/>
+              <a:t>Baştan sona kıdemli ekip.</a:t>
+            </a:r>
+            <a:endParaRPr lang="en-US" sz="4000" dirty="0"/>
           </a:p>
         </p:txBody>
       </p:sp>
@@ -7012,12 +6788,12 @@
           <a:p>
             <a:pPr indent="0" marL="0">
               <a:lnSpc>
-                <a:spcPts val="4408"/>
+                <a:spcPts val="4640"/>
               </a:lnSpc>
               <a:buNone/>
             </a:pPr>
             <a:r>
-              <a:rPr lang="en-US" sz="3800" b="1" dirty="0">
+              <a:rPr lang="en-US" sz="4000" b="1" dirty="0">
                 <a:solidFill>
                   <a:srgbClr val="0E1620"/>
                 </a:solidFill>
@@ -7025,19 +6801,19 @@
                 <a:ea typeface="Schibsted Grotesk" pitchFamily="34" charset="-122"/>
                 <a:cs typeface="Schibsted Grotesk" pitchFamily="34" charset="-120"/>
               </a:rPr>
-              <a:t>Derinlik bir tercihtir,</a:t>
-            </a:r>
-            <a:endParaRPr lang="en-US" sz="3800" dirty="0"/>
+              <a:t>Genişlik değil,</a:t>
+            </a:r>
+            <a:endParaRPr lang="en-US" sz="4000" dirty="0"/>
           </a:p>
           <a:p>
             <a:pPr indent="0" marL="0">
               <a:lnSpc>
-                <a:spcPts val="4408"/>
+                <a:spcPts val="4640"/>
               </a:lnSpc>
               <a:buNone/>
             </a:pPr>
             <a:r>
-              <a:rPr lang="en-US" sz="3800" b="1" dirty="0">
+              <a:rPr lang="en-US" sz="4000" b="1" dirty="0">
                 <a:solidFill>
                   <a:srgbClr val="0E1620"/>
                 </a:solidFill>
@@ -7045,9 +6821,9 @@
                 <a:ea typeface="Schibsted Grotesk" pitchFamily="34" charset="-122"/>
                 <a:cs typeface="Schibsted Grotesk" pitchFamily="34" charset="-120"/>
               </a:rPr>
-              <a:t>kısıt değil.</a:t>
-            </a:r>
-            <a:endParaRPr lang="en-US" sz="3800" dirty="0"/>
+              <a:t>derinlik.</a:t>
+            </a:r>
+            <a:endParaRPr lang="en-US" sz="4000" dirty="0"/>
           </a:p>
         </p:txBody>
       </p:sp>
@@ -7924,88 +7700,6 @@
                 <a:cs typeface="Inter" pitchFamily="34" charset="-120"/>
               </a:rPr>
               <a:t>Bulut modeli, savunulan değil ölçülen</a:t>
-            </a:r>
-            <a:endParaRPr lang="en-US" sz="1000" dirty="0"/>
-          </a:p>
-        </p:txBody>
-      </p:sp>
-      <p:sp>
-        <p:nvSpPr>
-          <p:cNvPr id="35" name="Shape 33"/>
-          <p:cNvSpPr/>
-          <p:nvPr/>
-        </p:nvSpPr>
-        <p:spPr>
-          <a:xfrm>
-            <a:off x="7607808" y="5321808"/>
-            <a:ext cx="201168" cy="0"/>
-          </a:xfrm>
-          <a:prstGeom prst="line">
-            <a:avLst/>
-          </a:prstGeom>
-          <a:noFill/>
-          <a:ln w="12700">
-            <a:solidFill>
-              <a:srgbClr val="11676A"/>
-            </a:solidFill>
-            <a:prstDash val="solid"/>
-          </a:ln>
-        </p:spPr>
-      </p:sp>
-      <p:sp>
-        <p:nvSpPr>
-          <p:cNvPr id="36" name="Shape 34"/>
-          <p:cNvSpPr/>
-          <p:nvPr/>
-        </p:nvSpPr>
-        <p:spPr>
-          <a:xfrm>
-            <a:off x="7566660" y="5280660"/>
-            <a:ext cx="82296" cy="82296"/>
-          </a:xfrm>
-          <a:prstGeom prst="ellipse">
-            <a:avLst/>
-          </a:prstGeom>
-          <a:solidFill>
-            <a:srgbClr val="11676A"/>
-          </a:solidFill>
-          <a:ln/>
-        </p:spPr>
-      </p:sp>
-      <p:sp>
-        <p:nvSpPr>
-          <p:cNvPr id="37" name="Text 35"/>
-          <p:cNvSpPr txBox="1"/>
-          <p:nvPr/>
-        </p:nvSpPr>
-        <p:spPr>
-          <a:xfrm>
-            <a:off x="7936992" y="5198364"/>
-            <a:ext cx="3017520" cy="274320"/>
-          </a:xfrm>
-          <a:prstGeom prst="rect">
-            <a:avLst/>
-          </a:prstGeom>
-          <a:noFill/>
-          <a:ln/>
-        </p:spPr>
-        <p:txBody>
-          <a:bodyPr wrap="square" lIns="0" tIns="0" rIns="0" bIns="0" rtlCol="0" anchor="ctr"/>
-          <a:lstStyle/>
-          <a:p>
-            <a:pPr indent="0" marL="0">
-              <a:buNone/>
-            </a:pPr>
-            <a:r>
-              <a:rPr lang="en-US" sz="1000" dirty="0">
-                <a:solidFill>
-                  <a:srgbClr val="0E1620"/>
-                </a:solidFill>
-                <a:latin typeface="Inter" pitchFamily="34" charset="0"/>
-                <a:ea typeface="Inter" pitchFamily="34" charset="-122"/>
-                <a:cs typeface="Inter" pitchFamily="34" charset="-120"/>
-              </a:rPr>
-              <a:t>Kendi verinizle kalibre edilmiş otomasyon</a:t>
             </a:r>
             <a:endParaRPr lang="en-US" sz="1000" dirty="0"/>
           </a:p>
@@ -8100,7 +7794,7 @@
                 <a:ea typeface="IBM Plex Mono" pitchFamily="34" charset="-122"/>
                 <a:cs typeface="IBM Plex Mono" pitchFamily="34" charset="-120"/>
               </a:rPr>
-              <a:t>ÇÖZMEK ÜZERE ÇAĞRILDIĞIMIZ SORUN</a:t>
+              <a:t>TEMEL SORUN</a:t>
             </a:r>
             <a:endParaRPr lang="en-US" sz="950" dirty="0"/>
           </a:p>
@@ -8115,7 +7809,7 @@
         <p:spPr>
           <a:xfrm>
             <a:off x="777240" y="960120"/>
-            <a:ext cx="5943600" cy="1463040"/>
+            <a:ext cx="5760720" cy="1463040"/>
           </a:xfrm>
           <a:prstGeom prst="rect">
             <a:avLst/>
@@ -8129,12 +7823,12 @@
           <a:p>
             <a:pPr indent="0" marL="0">
               <a:lnSpc>
-                <a:spcPts val="3480"/>
+                <a:spcPts val="3944"/>
               </a:lnSpc>
               <a:buNone/>
             </a:pPr>
             <a:r>
-              <a:rPr lang="en-US" sz="3000" b="1" dirty="0">
+              <a:rPr lang="en-US" sz="3400" b="1" dirty="0">
                 <a:solidFill>
                   <a:srgbClr val="FFFFFF"/>
                 </a:solidFill>
@@ -8142,19 +7836,19 @@
                 <a:ea typeface="Schibsted Grotesk" pitchFamily="34" charset="-122"/>
                 <a:cs typeface="Schibsted Grotesk" pitchFamily="34" charset="-120"/>
               </a:rPr>
-              <a:t>En pahalı kararlar en başta</a:t>
-            </a:r>
-            <a:endParaRPr lang="en-US" sz="3000" dirty="0"/>
+              <a:t>Erken kararlar,</a:t>
+            </a:r>
+            <a:endParaRPr lang="en-US" sz="3400" dirty="0"/>
           </a:p>
           <a:p>
             <a:pPr indent="0" marL="0">
               <a:lnSpc>
-                <a:spcPts val="3480"/>
+                <a:spcPts val="3944"/>
               </a:lnSpc>
               <a:buNone/>
             </a:pPr>
             <a:r>
-              <a:rPr lang="en-US" sz="3000" b="1" dirty="0">
+              <a:rPr lang="en-US" sz="3400" b="1" dirty="0">
                 <a:solidFill>
                   <a:srgbClr val="FFFFFF"/>
                 </a:solidFill>
@@ -8162,29 +7856,9 @@
                 <a:ea typeface="Schibsted Grotesk" pitchFamily="34" charset="-122"/>
                 <a:cs typeface="Schibsted Grotesk" pitchFamily="34" charset="-120"/>
               </a:rPr>
-              <a:t>alınır — en az şeyin</a:t>
-            </a:r>
-            <a:endParaRPr lang="en-US" sz="3000" dirty="0"/>
-          </a:p>
-          <a:p>
-            <a:pPr indent="0" marL="0">
-              <a:lnSpc>
-                <a:spcPts val="3480"/>
-              </a:lnSpc>
-              <a:buNone/>
-            </a:pPr>
-            <a:r>
-              <a:rPr lang="en-US" sz="3000" b="1" dirty="0">
-                <a:solidFill>
-                  <a:srgbClr val="FFFFFF"/>
-                </a:solidFill>
-                <a:latin typeface="Schibsted Grotesk" pitchFamily="34" charset="0"/>
-                <a:ea typeface="Schibsted Grotesk" pitchFamily="34" charset="-122"/>
-                <a:cs typeface="Schibsted Grotesk" pitchFamily="34" charset="-120"/>
-              </a:rPr>
-              <a:t>bilindiği anda.</a:t>
-            </a:r>
-            <a:endParaRPr lang="en-US" sz="3000" dirty="0"/>
+              <a:t>kalıcı sonuçlar.</a:t>
+            </a:r>
+            <a:endParaRPr lang="en-US" sz="3400" dirty="0"/>
           </a:p>
         </p:txBody>
       </p:sp>
@@ -8890,7 +8564,7 @@
                 <a:ea typeface="IBM Plex Mono" pitchFamily="34" charset="-122"/>
                 <a:cs typeface="IBM Plex Mono" pitchFamily="34" charset="-120"/>
               </a:rPr>
-              <a:t>NEREDE DURUYORUZ</a:t>
+              <a:t>UZMANLIK ALANIMIZ</a:t>
             </a:r>
             <a:endParaRPr lang="en-US" sz="950" dirty="0"/>
           </a:p>
@@ -8905,7 +8579,7 @@
         <p:spPr>
           <a:xfrm>
             <a:off x="777240" y="960120"/>
-            <a:ext cx="8046720" cy="1463040"/>
+            <a:ext cx="10058400" cy="1463040"/>
           </a:xfrm>
           <a:prstGeom prst="rect">
             <a:avLst/>
@@ -8919,12 +8593,12 @@
           <a:p>
             <a:pPr indent="0" marL="0">
               <a:lnSpc>
-                <a:spcPts val="3944"/>
+                <a:spcPts val="4640"/>
               </a:lnSpc>
               <a:buNone/>
             </a:pPr>
             <a:r>
-              <a:rPr lang="en-US" sz="3400" b="1" dirty="0">
+              <a:rPr lang="en-US" sz="4000" b="1" dirty="0">
                 <a:solidFill>
                   <a:srgbClr val="0E1620"/>
                 </a:solidFill>
@@ -8932,29 +8606,9 @@
                 <a:ea typeface="Schibsted Grotesk" pitchFamily="34" charset="-122"/>
                 <a:cs typeface="Schibsted Grotesk" pitchFamily="34" charset="-120"/>
               </a:rPr>
-              <a:t>Yalnızca birlikte anlam</a:t>
-            </a:r>
-            <a:endParaRPr lang="en-US" sz="3400" dirty="0"/>
-          </a:p>
-          <a:p>
-            <a:pPr indent="0" marL="0">
-              <a:lnSpc>
-                <a:spcPts val="3944"/>
-              </a:lnSpc>
-              <a:buNone/>
-            </a:pPr>
-            <a:r>
-              <a:rPr lang="en-US" sz="3400" b="1" dirty="0">
-                <a:solidFill>
-                  <a:srgbClr val="0E1620"/>
-                </a:solidFill>
-                <a:latin typeface="Schibsted Grotesk" pitchFamily="34" charset="0"/>
-                <a:ea typeface="Schibsted Grotesk" pitchFamily="34" charset="-122"/>
-                <a:cs typeface="Schibsted Grotesk" pitchFamily="34" charset="-120"/>
-              </a:rPr>
-              <a:t>kazanan üç disiplin.</a:t>
-            </a:r>
-            <a:endParaRPr lang="en-US" sz="3400" dirty="0"/>
+              <a:t>Üç disiplin, tek uzmanlık.</a:t>
+            </a:r>
+            <a:endParaRPr lang="en-US" sz="4000" dirty="0"/>
           </a:p>
         </p:txBody>
       </p:sp>
@@ -9766,7 +9420,7 @@
                 <a:ea typeface="IBM Plex Mono" pitchFamily="34" charset="-122"/>
                 <a:cs typeface="IBM Plex Mono" pitchFamily="34" charset="-120"/>
               </a:rPr>
-              <a:t>ÇALIŞMA ILKESI</a:t>
+              <a:t>YÖNTEM</a:t>
             </a:r>
             <a:endParaRPr lang="en-US" sz="950" dirty="0"/>
           </a:p>
@@ -9795,12 +9449,12 @@
           <a:p>
             <a:pPr indent="0" marL="0">
               <a:lnSpc>
-                <a:spcPts val="4176"/>
+                <a:spcPts val="4640"/>
               </a:lnSpc>
               <a:buNone/>
             </a:pPr>
             <a:r>
-              <a:rPr lang="en-US" sz="3600" b="1" dirty="0">
+              <a:rPr lang="en-US" sz="4000" b="1" dirty="0">
                 <a:solidFill>
                   <a:srgbClr val="0E1620"/>
                 </a:solidFill>
@@ -9808,29 +9462,9 @@
                 <a:ea typeface="Schibsted Grotesk" pitchFamily="34" charset="-122"/>
                 <a:cs typeface="Schibsted Grotesk" pitchFamily="34" charset="-120"/>
               </a:rPr>
-              <a:t>Öneride bulunmadan önce</a:t>
-            </a:r>
-            <a:endParaRPr lang="en-US" sz="3600" dirty="0"/>
-          </a:p>
-          <a:p>
-            <a:pPr indent="0" marL="0">
-              <a:lnSpc>
-                <a:spcPts val="4176"/>
-              </a:lnSpc>
-              <a:buNone/>
-            </a:pPr>
-            <a:r>
-              <a:rPr lang="en-US" sz="3600" b="1" dirty="0">
-                <a:solidFill>
-                  <a:srgbClr val="0E1620"/>
-                </a:solidFill>
-                <a:latin typeface="Schibsted Grotesk" pitchFamily="34" charset="0"/>
-                <a:ea typeface="Schibsted Grotesk" pitchFamily="34" charset="-122"/>
-                <a:cs typeface="Schibsted Grotesk" pitchFamily="34" charset="-120"/>
-              </a:rPr>
-              <a:t>sistemi okuruz.</a:t>
-            </a:r>
-            <a:endParaRPr lang="en-US" sz="3600" dirty="0"/>
+              <a:t>Tavsiyeden önce kanıt.</a:t>
+            </a:r>
+            <a:endParaRPr lang="en-US" sz="4000" dirty="0"/>
           </a:p>
         </p:txBody>
       </p:sp>
@@ -10862,7 +10496,7 @@
                 <a:ea typeface="IBM Plex Mono" pitchFamily="34" charset="-122"/>
                 <a:cs typeface="IBM Plex Mono" pitchFamily="34" charset="-120"/>
               </a:rPr>
-              <a:t>SIZIN YERINIZE VERMEYECEĞIMIZ KARAR</a:t>
+              <a:t>BULUT MODELI</a:t>
             </a:r>
             <a:endParaRPr lang="en-US" sz="950" dirty="0"/>
           </a:p>
@@ -10877,7 +10511,7 @@
         <p:spPr>
           <a:xfrm>
             <a:off x="777240" y="960120"/>
-            <a:ext cx="9875520" cy="1463040"/>
+            <a:ext cx="10058400" cy="1463040"/>
           </a:xfrm>
           <a:prstGeom prst="rect">
             <a:avLst/>
@@ -10891,12 +10525,12 @@
           <a:p>
             <a:pPr indent="0" marL="0">
               <a:lnSpc>
-                <a:spcPts val="3944"/>
+                <a:spcPts val="4640"/>
               </a:lnSpc>
               <a:buNone/>
             </a:pPr>
             <a:r>
-              <a:rPr lang="en-US" sz="3400" b="1" dirty="0">
+              <a:rPr lang="en-US" sz="4000" b="1" dirty="0">
                 <a:solidFill>
                   <a:srgbClr val="FFFFFF"/>
                 </a:solidFill>
@@ -10904,29 +10538,9 @@
                 <a:ea typeface="Schibsted Grotesk" pitchFamily="34" charset="-122"/>
                 <a:cs typeface="Schibsted Grotesk" pitchFamily="34" charset="-120"/>
               </a:rPr>
-              <a:t>Bulut modeli satmıyoruz.</a:t>
-            </a:r>
-            <a:endParaRPr lang="en-US" sz="3400" dirty="0"/>
-          </a:p>
-          <a:p>
-            <a:pPr indent="0" marL="0">
-              <a:lnSpc>
-                <a:spcPts val="3944"/>
-              </a:lnSpc>
-              <a:buNone/>
-            </a:pPr>
-            <a:r>
-              <a:rPr lang="en-US" sz="3400" b="1" dirty="0">
-                <a:solidFill>
-                  <a:srgbClr val="FFFFFF"/>
-                </a:solidFill>
-                <a:latin typeface="Schibsted Grotesk" pitchFamily="34" charset="0"/>
-                <a:ea typeface="Schibsted Grotesk" pitchFamily="34" charset="-122"/>
-                <a:cs typeface="Schibsted Grotesk" pitchFamily="34" charset="-120"/>
-              </a:rPr>
-              <a:t>Hangisi olduğunuzu ölçüyoruz.</a:t>
-            </a:r>
-            <a:endParaRPr lang="en-US" sz="3400" dirty="0"/>
+              <a:t>Ölçülmüş bir bulut kararı.</a:t>
+            </a:r>
+            <a:endParaRPr lang="en-US" sz="4000" dirty="0"/>
           </a:p>
         </p:txBody>
       </p:sp>
@@ -11506,66 +11120,7 @@
       </p:sp>
       <p:sp>
         <p:nvSpPr>
-          <p:cNvPr id="21" name="Shape 18"/>
-          <p:cNvSpPr/>
-          <p:nvPr/>
-        </p:nvSpPr>
-        <p:spPr>
-          <a:xfrm>
-            <a:off x="5474056" y="3657600"/>
-            <a:ext cx="1243584" cy="384048"/>
-          </a:xfrm>
-          <a:prstGeom prst="rect">
-            <a:avLst/>
-          </a:prstGeom>
-          <a:solidFill>
-            <a:srgbClr val="003F82"/>
-          </a:solidFill>
-          <a:ln/>
-        </p:spPr>
-      </p:sp>
-      <p:sp>
-        <p:nvSpPr>
-          <p:cNvPr id="22" name="Text 19"/>
-          <p:cNvSpPr txBox="1"/>
-          <p:nvPr/>
-        </p:nvSpPr>
-        <p:spPr>
-          <a:xfrm>
-            <a:off x="5474056" y="3657600"/>
-            <a:ext cx="1243584" cy="384048"/>
-          </a:xfrm>
-          <a:prstGeom prst="rect">
-            <a:avLst/>
-          </a:prstGeom>
-          <a:noFill/>
-          <a:ln/>
-        </p:spPr>
-        <p:txBody>
-          <a:bodyPr wrap="square" lIns="0" tIns="0" rIns="0" bIns="0" rtlCol="0" anchor="ctr"/>
-          <a:lstStyle/>
-          <a:p>
-            <a:pPr algn="ctr" indent="0" marL="0">
-              <a:buNone/>
-            </a:pPr>
-            <a:r>
-              <a:rPr lang="en-US" sz="900" spc="140" kern="0" dirty="0">
-                <a:solidFill>
-                  <a:srgbClr val="E8B33A"/>
-                </a:solidFill>
-                <a:latin typeface="IBM Plex Mono" pitchFamily="34" charset="0"/>
-                <a:ea typeface="IBM Plex Mono" pitchFamily="34" charset="-122"/>
-                <a:cs typeface="IBM Plex Mono" pitchFamily="34" charset="-120"/>
-              </a:rPr>
-              <a:t>TAKAS</a:t>
-            </a:r>
-            <a:endParaRPr lang="en-US" sz="900" dirty="0"/>
-          </a:p>
-        </p:txBody>
-      </p:sp>
-      <p:sp>
-        <p:nvSpPr>
-          <p:cNvPr id="23" name="Text 20"/>
+          <p:cNvPr id="21" name="Text 18"/>
           <p:cNvSpPr txBox="1"/>
           <p:nvPr/>
         </p:nvSpPr>
@@ -11670,7 +11225,7 @@
                 <a:ea typeface="IBM Plex Mono" pitchFamily="34" charset="-122"/>
                 <a:cs typeface="IBM Plex Mono" pitchFamily="34" charset="-120"/>
               </a:rPr>
-              <a:t>İŞ NASIL ILERLER</a:t>
+              <a:t>ÇALIŞMA ADIMLARI</a:t>
             </a:r>
             <a:endParaRPr lang="en-US" sz="950" dirty="0"/>
           </a:p>
@@ -11699,12 +11254,12 @@
           <a:p>
             <a:pPr indent="0" marL="0">
               <a:lnSpc>
-                <a:spcPts val="3944"/>
+                <a:spcPts val="4176"/>
               </a:lnSpc>
               <a:buNone/>
             </a:pPr>
             <a:r>
-              <a:rPr lang="en-US" sz="3400" b="1" dirty="0">
+              <a:rPr lang="en-US" sz="3600" b="1" dirty="0">
                 <a:solidFill>
                   <a:srgbClr val="0E1620"/>
                 </a:solidFill>
@@ -11712,29 +11267,9 @@
                 <a:ea typeface="Schibsted Grotesk" pitchFamily="34" charset="-122"/>
                 <a:cs typeface="Schibsted Grotesk" pitchFamily="34" charset="-120"/>
               </a:rPr>
-              <a:t>Bir öncekiler kapanmadan</a:t>
-            </a:r>
-            <a:endParaRPr lang="en-US" sz="3400" dirty="0"/>
-          </a:p>
-          <a:p>
-            <a:pPr indent="0" marL="0">
-              <a:lnSpc>
-                <a:spcPts val="3944"/>
-              </a:lnSpc>
-              <a:buNone/>
-            </a:pPr>
-            <a:r>
-              <a:rPr lang="en-US" sz="3400" b="1" dirty="0">
-                <a:solidFill>
-                  <a:srgbClr val="0E1620"/>
-                </a:solidFill>
-                <a:latin typeface="Schibsted Grotesk" pitchFamily="34" charset="0"/>
-                <a:ea typeface="Schibsted Grotesk" pitchFamily="34" charset="-122"/>
-                <a:cs typeface="Schibsted Grotesk" pitchFamily="34" charset="-120"/>
-              </a:rPr>
-              <a:t>hiçbir şey başlamaz.</a:t>
-            </a:r>
-            <a:endParaRPr lang="en-US" sz="3400" dirty="0"/>
+              <a:t>Dört adım, dört çıktı.</a:t>
+            </a:r>
+            <a:endParaRPr lang="en-US" sz="3600" dirty="0"/>
           </a:p>
         </p:txBody>
       </p:sp>
@@ -12995,7 +12530,7 @@
                 <a:ea typeface="IBM Plex Mono" pitchFamily="34" charset="-122"/>
                 <a:cs typeface="IBM Plex Mono" pitchFamily="34" charset="-120"/>
               </a:rPr>
-              <a:t>DEĞER NEREDE GÖRÜNÜR</a:t>
+              <a:t>İŞ DEĞERI</a:t>
             </a:r>
             <a:endParaRPr lang="en-US" sz="950" dirty="0"/>
           </a:p>
@@ -13010,7 +12545,7 @@
         <p:spPr>
           <a:xfrm>
             <a:off x="777240" y="960120"/>
-            <a:ext cx="6949440" cy="1463040"/>
+            <a:ext cx="10058400" cy="1463040"/>
           </a:xfrm>
           <a:prstGeom prst="rect">
             <a:avLst/>
@@ -13024,12 +12559,12 @@
           <a:p>
             <a:pPr indent="0" marL="0">
               <a:lnSpc>
-                <a:spcPts val="3944"/>
+                <a:spcPts val="4640"/>
               </a:lnSpc>
               <a:buNone/>
             </a:pPr>
             <a:r>
-              <a:rPr lang="en-US" sz="3400" b="1" dirty="0">
+              <a:rPr lang="en-US" sz="4000" b="1" dirty="0">
                 <a:solidFill>
                   <a:srgbClr val="0E1620"/>
                 </a:solidFill>
@@ -13037,29 +12572,9 @@
                 <a:ea typeface="Schibsted Grotesk" pitchFamily="34" charset="-122"/>
                 <a:cs typeface="Schibsted Grotesk" pitchFamily="34" charset="-120"/>
               </a:rPr>
-              <a:t>Uzmanlık, ancak</a:t>
-            </a:r>
-            <a:endParaRPr lang="en-US" sz="3400" dirty="0"/>
-          </a:p>
-          <a:p>
-            <a:pPr indent="0" marL="0">
-              <a:lnSpc>
-                <a:spcPts val="3944"/>
-              </a:lnSpc>
-              <a:buNone/>
-            </a:pPr>
-            <a:r>
-              <a:rPr lang="en-US" sz="3400" b="1" dirty="0">
-                <a:solidFill>
-                  <a:srgbClr val="0E1620"/>
-                </a:solidFill>
-                <a:latin typeface="Schibsted Grotesk" pitchFamily="34" charset="0"/>
-                <a:ea typeface="Schibsted Grotesk" pitchFamily="34" charset="-122"/>
-                <a:cs typeface="Schibsted Grotesk" pitchFamily="34" charset="-120"/>
-              </a:rPr>
-              <a:t>değiştirdiği kadar değerlidir.</a:t>
-            </a:r>
-            <a:endParaRPr lang="en-US" sz="3400" dirty="0"/>
+              <a:t>Yetkinlikten sonuca.</a:t>
+            </a:r>
+            <a:endParaRPr lang="en-US" sz="4000" dirty="0"/>
           </a:p>
         </p:txBody>
       </p:sp>
@@ -13928,7 +13443,7 @@
         <p:spPr>
           <a:xfrm>
             <a:off x="777240" y="896112"/>
-            <a:ext cx="8686800" cy="1463040"/>
+            <a:ext cx="10058400" cy="1463040"/>
           </a:xfrm>
           <a:prstGeom prst="rect">
             <a:avLst/>
@@ -13942,12 +13457,12 @@
           <a:p>
             <a:pPr indent="0" marL="0">
               <a:lnSpc>
-                <a:spcPts val="3944"/>
+                <a:spcPts val="4640"/>
               </a:lnSpc>
               <a:buNone/>
             </a:pPr>
             <a:r>
-              <a:rPr lang="en-US" sz="3400" b="1" dirty="0">
+              <a:rPr lang="en-US" sz="4000" b="1" dirty="0">
                 <a:solidFill>
                   <a:srgbClr val="0E1620"/>
                 </a:solidFill>
@@ -13955,29 +13470,9 @@
                 <a:ea typeface="Schibsted Grotesk" pitchFamily="34" charset="-122"/>
                 <a:cs typeface="Schibsted Grotesk" pitchFamily="34" charset="-120"/>
               </a:rPr>
-              <a:t>Sorduğunuz asıl sorunun</a:t>
-            </a:r>
-            <a:endParaRPr lang="en-US" sz="3400" dirty="0"/>
-          </a:p>
-          <a:p>
-            <a:pPr indent="0" marL="0">
-              <a:lnSpc>
-                <a:spcPts val="3944"/>
-              </a:lnSpc>
-              <a:buNone/>
-            </a:pPr>
-            <a:r>
-              <a:rPr lang="en-US" sz="3400" b="1" dirty="0">
-                <a:solidFill>
-                  <a:srgbClr val="0E1620"/>
-                </a:solidFill>
-                <a:latin typeface="Schibsted Grotesk" pitchFamily="34" charset="0"/>
-                <a:ea typeface="Schibsted Grotesk" pitchFamily="34" charset="-122"/>
-                <a:cs typeface="Schibsted Grotesk" pitchFamily="34" charset="-120"/>
-              </a:rPr>
-              <a:t>etrafında düzenlendi.</a:t>
-            </a:r>
-            <a:endParaRPr lang="en-US" sz="3400" dirty="0"/>
+              <a:t>Beş uzmanlık alanı.</a:t>
+            </a:r>
+            <a:endParaRPr lang="en-US" sz="4000" dirty="0"/>
           </a:p>
         </p:txBody>
       </p:sp>
@@ -14090,7 +13585,7 @@
         </p:nvSpPr>
         <p:spPr>
           <a:xfrm>
-            <a:off x="777240" y="2139696"/>
+            <a:off x="777240" y="2048256"/>
             <a:ext cx="10637215" cy="0"/>
           </a:xfrm>
           <a:prstGeom prst="line">
@@ -14113,7 +13608,7 @@
         </p:nvSpPr>
         <p:spPr>
           <a:xfrm>
-            <a:off x="777240" y="2473452"/>
+            <a:off x="777240" y="2400300"/>
             <a:ext cx="100584" cy="100584"/>
           </a:xfrm>
           <a:prstGeom prst="ellipse">
@@ -14133,8 +13628,8 @@
         </p:nvSpPr>
         <p:spPr>
           <a:xfrm>
-            <a:off x="1069848" y="2322576"/>
-            <a:ext cx="4617720" cy="420624"/>
+            <a:off x="1069848" y="2249424"/>
+            <a:ext cx="4023360" cy="402336"/>
           </a:xfrm>
           <a:prstGeom prst="rect">
             <a:avLst/>
@@ -14150,7 +13645,7 @@
               <a:buNone/>
             </a:pPr>
             <a:r>
-              <a:rPr lang="en-US" sz="1450" b="1" dirty="0">
+              <a:rPr lang="en-US" sz="1500" b="1" dirty="0">
                 <a:solidFill>
                   <a:srgbClr val="0E1620"/>
                 </a:solidFill>
@@ -14158,9 +13653,9 @@
                 <a:ea typeface="Schibsted Grotesk" pitchFamily="34" charset="-122"/>
                 <a:cs typeface="Schibsted Grotesk" pitchFamily="34" charset="-120"/>
               </a:rPr>
-              <a:t>Kendi rakamlarımıza güvenebilir miyiz?</a:t>
-            </a:r>
-            <a:endParaRPr lang="en-US" sz="1450" dirty="0"/>
+              <a:t>SAP Finans Modülleri</a:t>
+            </a:r>
+            <a:endParaRPr lang="en-US" sz="1500" dirty="0"/>
           </a:p>
         </p:txBody>
       </p:sp>
@@ -14172,8 +13667,8 @@
         </p:nvSpPr>
         <p:spPr>
           <a:xfrm>
-            <a:off x="5897880" y="2368296"/>
-            <a:ext cx="2834640" cy="219456"/>
+            <a:off x="5440680" y="2249424"/>
+            <a:ext cx="5897880" cy="402336"/>
           </a:xfrm>
           <a:prstGeom prst="rect">
             <a:avLst/>
@@ -14189,46 +13684,7 @@
               <a:buNone/>
             </a:pPr>
             <a:r>
-              <a:rPr lang="en-US" sz="850" spc="150" kern="0" dirty="0">
-                <a:solidFill>
-                  <a:srgbClr val="11676A"/>
-                </a:solidFill>
-                <a:latin typeface="IBM Plex Mono" pitchFamily="34" charset="0"/>
-                <a:ea typeface="IBM Plex Mono" pitchFamily="34" charset="-122"/>
-                <a:cs typeface="IBM Plex Mono" pitchFamily="34" charset="-120"/>
-              </a:rPr>
-              <a:t>SAP FİNANS MODÜLLERİ</a:t>
-            </a:r>
-            <a:endParaRPr lang="en-US" sz="850" dirty="0"/>
-          </a:p>
-        </p:txBody>
-      </p:sp>
-      <p:sp>
-        <p:nvSpPr>
-          <p:cNvPr id="11" name="Text 9"/>
-          <p:cNvSpPr txBox="1"/>
-          <p:nvPr/>
-        </p:nvSpPr>
-        <p:spPr>
-          <a:xfrm>
-            <a:off x="5897880" y="2615184"/>
-            <a:ext cx="5440680" cy="256032"/>
-          </a:xfrm>
-          <a:prstGeom prst="rect">
-            <a:avLst/>
-          </a:prstGeom>
-          <a:noFill/>
-          <a:ln/>
-        </p:spPr>
-        <p:txBody>
-          <a:bodyPr wrap="square" lIns="0" tIns="0" rIns="0" bIns="0" rtlCol="0" anchor="ctr"/>
-          <a:lstStyle/>
-          <a:p>
-            <a:pPr indent="0" marL="0">
-              <a:buNone/>
-            </a:pPr>
-            <a:r>
-              <a:rPr lang="en-US" sz="1050" dirty="0">
+              <a:rPr lang="en-US" sz="1150" dirty="0">
                 <a:solidFill>
                   <a:srgbClr val="4A5A67"/>
                 </a:solidFill>
@@ -14238,19 +13694,19 @@
               </a:rPr>
               <a:t>FI, CO, PA ve PS; beş paralel yapı değil, tek mimari.</a:t>
             </a:r>
-            <a:endParaRPr lang="en-US" sz="1050" dirty="0"/>
-          </a:p>
-        </p:txBody>
-      </p:sp>
-      <p:sp>
-        <p:nvSpPr>
-          <p:cNvPr id="12" name="Shape 10"/>
+            <a:endParaRPr lang="en-US" sz="1150" dirty="0"/>
+          </a:p>
+        </p:txBody>
+      </p:sp>
+      <p:sp>
+        <p:nvSpPr>
+          <p:cNvPr id="11" name="Shape 9"/>
           <p:cNvSpPr/>
           <p:nvPr/>
         </p:nvSpPr>
         <p:spPr>
           <a:xfrm>
-            <a:off x="777240" y="2962656"/>
+            <a:off x="777240" y="2889504"/>
             <a:ext cx="10637215" cy="0"/>
           </a:xfrm>
           <a:prstGeom prst="line">
@@ -14267,13 +13723,13 @@
       </p:sp>
       <p:sp>
         <p:nvSpPr>
-          <p:cNvPr id="13" name="Shape 11"/>
+          <p:cNvPr id="12" name="Shape 10"/>
           <p:cNvSpPr/>
           <p:nvPr/>
         </p:nvSpPr>
         <p:spPr>
           <a:xfrm>
-            <a:off x="777240" y="3241548"/>
+            <a:off x="777240" y="3186684"/>
             <a:ext cx="100584" cy="100584"/>
           </a:xfrm>
           <a:prstGeom prst="ellipse">
@@ -14287,14 +13743,14 @@
       </p:sp>
       <p:sp>
         <p:nvSpPr>
-          <p:cNvPr id="14" name="Text 12"/>
-          <p:cNvSpPr txBox="1"/>
-          <p:nvPr/>
-        </p:nvSpPr>
-        <p:spPr>
-          <a:xfrm>
-            <a:off x="1069848" y="3090672"/>
-            <a:ext cx="4617720" cy="420624"/>
+          <p:cNvPr id="13" name="Text 11"/>
+          <p:cNvSpPr txBox="1"/>
+          <p:nvPr/>
+        </p:nvSpPr>
+        <p:spPr>
+          <a:xfrm>
+            <a:off x="1069848" y="3035808"/>
+            <a:ext cx="4023360" cy="402336"/>
           </a:xfrm>
           <a:prstGeom prst="rect">
             <a:avLst/>
@@ -14310,7 +13766,7 @@
               <a:buNone/>
             </a:pPr>
             <a:r>
-              <a:rPr lang="en-US" sz="1450" b="1" dirty="0">
+              <a:rPr lang="en-US" sz="1500" b="1" dirty="0">
                 <a:solidFill>
                   <a:srgbClr val="0E1620"/>
                 </a:solidFill>
@@ -14318,22 +13774,22 @@
                 <a:ea typeface="Schibsted Grotesk" pitchFamily="34" charset="-122"/>
                 <a:cs typeface="Schibsted Grotesk" pitchFamily="34" charset="-120"/>
               </a:rPr>
-              <a:t>S/4HANA’ya hangi yoldan gideceğiz?</a:t>
-            </a:r>
-            <a:endParaRPr lang="en-US" sz="1450" dirty="0"/>
-          </a:p>
-        </p:txBody>
-      </p:sp>
-      <p:sp>
-        <p:nvSpPr>
-          <p:cNvPr id="15" name="Text 13"/>
-          <p:cNvSpPr txBox="1"/>
-          <p:nvPr/>
-        </p:nvSpPr>
-        <p:spPr>
-          <a:xfrm>
-            <a:off x="5897880" y="3136392"/>
-            <a:ext cx="2834640" cy="219456"/>
+              <a:t>S/4HANA Dönüşümü</a:t>
+            </a:r>
+            <a:endParaRPr lang="en-US" sz="1500" dirty="0"/>
+          </a:p>
+        </p:txBody>
+      </p:sp>
+      <p:sp>
+        <p:nvSpPr>
+          <p:cNvPr id="14" name="Text 12"/>
+          <p:cNvSpPr txBox="1"/>
+          <p:nvPr/>
+        </p:nvSpPr>
+        <p:spPr>
+          <a:xfrm>
+            <a:off x="5440680" y="3035808"/>
+            <a:ext cx="5897880" cy="402336"/>
           </a:xfrm>
           <a:prstGeom prst="rect">
             <a:avLst/>
@@ -14349,46 +13805,7 @@
               <a:buNone/>
             </a:pPr>
             <a:r>
-              <a:rPr lang="en-US" sz="850" spc="150" kern="0" dirty="0">
-                <a:solidFill>
-                  <a:srgbClr val="11676A"/>
-                </a:solidFill>
-                <a:latin typeface="IBM Plex Mono" pitchFamily="34" charset="0"/>
-                <a:ea typeface="IBM Plex Mono" pitchFamily="34" charset="-122"/>
-                <a:cs typeface="IBM Plex Mono" pitchFamily="34" charset="-120"/>
-              </a:rPr>
-              <a:t>S/4HANA DÖNÜŞÜMÜ</a:t>
-            </a:r>
-            <a:endParaRPr lang="en-US" sz="850" dirty="0"/>
-          </a:p>
-        </p:txBody>
-      </p:sp>
-      <p:sp>
-        <p:nvSpPr>
-          <p:cNvPr id="16" name="Text 14"/>
-          <p:cNvSpPr txBox="1"/>
-          <p:nvPr/>
-        </p:nvSpPr>
-        <p:spPr>
-          <a:xfrm>
-            <a:off x="5897880" y="3383280"/>
-            <a:ext cx="5440680" cy="256032"/>
-          </a:xfrm>
-          <a:prstGeom prst="rect">
-            <a:avLst/>
-          </a:prstGeom>
-          <a:noFill/>
-          <a:ln/>
-        </p:spPr>
-        <p:txBody>
-          <a:bodyPr wrap="square" lIns="0" tIns="0" rIns="0" bIns="0" rtlCol="0" anchor="ctr"/>
-          <a:lstStyle/>
-          <a:p>
-            <a:pPr indent="0" marL="0">
-              <a:buNone/>
-            </a:pPr>
-            <a:r>
-              <a:rPr lang="en-US" sz="1050" dirty="0">
+              <a:rPr lang="en-US" sz="1150" dirty="0">
                 <a:solidFill>
                   <a:srgbClr val="4A5A67"/>
                 </a:solidFill>
@@ -14396,21 +13813,21 @@
                 <a:ea typeface="Inter" pitchFamily="34" charset="-122"/>
                 <a:cs typeface="Inter" pitchFamily="34" charset="-120"/>
               </a:rPr>
-              <a:t>Brownfield, greenfield ya da seçici geçiş — kanıta dayanarak.</a:t>
-            </a:r>
-            <a:endParaRPr lang="en-US" sz="1050" dirty="0"/>
-          </a:p>
-        </p:txBody>
-      </p:sp>
-      <p:sp>
-        <p:nvSpPr>
-          <p:cNvPr id="17" name="Shape 15"/>
+              <a:t>Brownfield, greenfield ya da seçici geçiş, kanıta dayanarak.</a:t>
+            </a:r>
+            <a:endParaRPr lang="en-US" sz="1150" dirty="0"/>
+          </a:p>
+        </p:txBody>
+      </p:sp>
+      <p:sp>
+        <p:nvSpPr>
+          <p:cNvPr id="15" name="Shape 13"/>
           <p:cNvSpPr/>
           <p:nvPr/>
         </p:nvSpPr>
         <p:spPr>
           <a:xfrm>
-            <a:off x="777240" y="3730752"/>
+            <a:off x="777240" y="3675888"/>
             <a:ext cx="10637215" cy="0"/>
           </a:xfrm>
           <a:prstGeom prst="line">
@@ -14427,13 +13844,13 @@
       </p:sp>
       <p:sp>
         <p:nvSpPr>
-          <p:cNvPr id="18" name="Shape 16"/>
+          <p:cNvPr id="16" name="Shape 14"/>
           <p:cNvSpPr/>
           <p:nvPr/>
         </p:nvSpPr>
         <p:spPr>
           <a:xfrm>
-            <a:off x="777240" y="4009644"/>
+            <a:off x="777240" y="3973068"/>
             <a:ext cx="100584" cy="100584"/>
           </a:xfrm>
           <a:prstGeom prst="ellipse">
@@ -14447,14 +13864,14 @@
       </p:sp>
       <p:sp>
         <p:nvSpPr>
-          <p:cNvPr id="19" name="Text 17"/>
-          <p:cNvSpPr txBox="1"/>
-          <p:nvPr/>
-        </p:nvSpPr>
-        <p:spPr>
-          <a:xfrm>
-            <a:off x="1069848" y="3858768"/>
-            <a:ext cx="4617720" cy="420624"/>
+          <p:cNvPr id="17" name="Text 15"/>
+          <p:cNvSpPr txBox="1"/>
+          <p:nvPr/>
+        </p:nvSpPr>
+        <p:spPr>
+          <a:xfrm>
+            <a:off x="1069848" y="3822192"/>
+            <a:ext cx="4023360" cy="402336"/>
           </a:xfrm>
           <a:prstGeom prst="rect">
             <a:avLst/>
@@ -14470,7 +13887,7 @@
               <a:buNone/>
             </a:pPr>
             <a:r>
-              <a:rPr lang="en-US" sz="1450" b="1" dirty="0">
+              <a:rPr lang="en-US" sz="1500" b="1" dirty="0">
                 <a:solidFill>
                   <a:srgbClr val="0E1620"/>
                 </a:solidFill>
@@ -14478,22 +13895,22 @@
                 <a:ea typeface="Schibsted Grotesk" pitchFamily="34" charset="-122"/>
                 <a:cs typeface="Schibsted Grotesk" pitchFamily="34" charset="-120"/>
               </a:rPr>
-              <a:t>Standart bize gerçekten yetiyor mu?</a:t>
-            </a:r>
-            <a:endParaRPr lang="en-US" sz="1450" dirty="0"/>
-          </a:p>
-        </p:txBody>
-      </p:sp>
-      <p:sp>
-        <p:nvSpPr>
-          <p:cNvPr id="20" name="Text 18"/>
-          <p:cNvSpPr txBox="1"/>
-          <p:nvPr/>
-        </p:nvSpPr>
-        <p:spPr>
-          <a:xfrm>
-            <a:off x="5897880" y="3904488"/>
-            <a:ext cx="2834640" cy="219456"/>
+              <a:t>SAP Public Cloud</a:t>
+            </a:r>
+            <a:endParaRPr lang="en-US" sz="1500" dirty="0"/>
+          </a:p>
+        </p:txBody>
+      </p:sp>
+      <p:sp>
+        <p:nvSpPr>
+          <p:cNvPr id="18" name="Text 16"/>
+          <p:cNvSpPr txBox="1"/>
+          <p:nvPr/>
+        </p:nvSpPr>
+        <p:spPr>
+          <a:xfrm>
+            <a:off x="5440680" y="3822192"/>
+            <a:ext cx="5897880" cy="402336"/>
           </a:xfrm>
           <a:prstGeom prst="rect">
             <a:avLst/>
@@ -14509,46 +13926,7 @@
               <a:buNone/>
             </a:pPr>
             <a:r>
-              <a:rPr lang="en-US" sz="850" spc="150" kern="0" dirty="0">
-                <a:solidFill>
-                  <a:srgbClr val="11676A"/>
-                </a:solidFill>
-                <a:latin typeface="IBM Plex Mono" pitchFamily="34" charset="0"/>
-                <a:ea typeface="IBM Plex Mono" pitchFamily="34" charset="-122"/>
-                <a:cs typeface="IBM Plex Mono" pitchFamily="34" charset="-120"/>
-              </a:rPr>
-              <a:t>SAP PUBLIC CLOUD</a:t>
-            </a:r>
-            <a:endParaRPr lang="en-US" sz="850" dirty="0"/>
-          </a:p>
-        </p:txBody>
-      </p:sp>
-      <p:sp>
-        <p:nvSpPr>
-          <p:cNvPr id="21" name="Text 19"/>
-          <p:cNvSpPr txBox="1"/>
-          <p:nvPr/>
-        </p:nvSpPr>
-        <p:spPr>
-          <a:xfrm>
-            <a:off x="5897880" y="4151376"/>
-            <a:ext cx="5440680" cy="256032"/>
-          </a:xfrm>
-          <a:prstGeom prst="rect">
-            <a:avLst/>
-          </a:prstGeom>
-          <a:noFill/>
-          <a:ln/>
-        </p:spPr>
-        <p:txBody>
-          <a:bodyPr wrap="square" lIns="0" tIns="0" rIns="0" bIns="0" rtlCol="0" anchor="ctr"/>
-          <a:lstStyle/>
-          <a:p>
-            <a:pPr indent="0" marL="0">
-              <a:buNone/>
-            </a:pPr>
-            <a:r>
-              <a:rPr lang="en-US" sz="1050" dirty="0">
+              <a:rPr lang="en-US" sz="1150" dirty="0">
                 <a:solidFill>
                   <a:srgbClr val="4A5A67"/>
                 </a:solidFill>
@@ -14558,19 +13936,19 @@
               </a:rPr>
               <a:t>Süreçlerinizin ne kadarı standarda oturuyor.</a:t>
             </a:r>
-            <a:endParaRPr lang="en-US" sz="1050" dirty="0"/>
-          </a:p>
-        </p:txBody>
-      </p:sp>
-      <p:sp>
-        <p:nvSpPr>
-          <p:cNvPr id="22" name="Shape 20"/>
+            <a:endParaRPr lang="en-US" sz="1150" dirty="0"/>
+          </a:p>
+        </p:txBody>
+      </p:sp>
+      <p:sp>
+        <p:nvSpPr>
+          <p:cNvPr id="19" name="Shape 17"/>
           <p:cNvSpPr/>
           <p:nvPr/>
         </p:nvSpPr>
         <p:spPr>
           <a:xfrm>
-            <a:off x="777240" y="4498848"/>
+            <a:off x="777240" y="4462272"/>
             <a:ext cx="10637215" cy="0"/>
           </a:xfrm>
           <a:prstGeom prst="line">
@@ -14587,13 +13965,13 @@
       </p:sp>
       <p:sp>
         <p:nvSpPr>
-          <p:cNvPr id="23" name="Shape 21"/>
+          <p:cNvPr id="20" name="Shape 18"/>
           <p:cNvSpPr/>
           <p:nvPr/>
         </p:nvSpPr>
         <p:spPr>
           <a:xfrm>
-            <a:off x="777240" y="4777740"/>
+            <a:off x="777240" y="4759452"/>
             <a:ext cx="100584" cy="100584"/>
           </a:xfrm>
           <a:prstGeom prst="ellipse">
@@ -14607,14 +13985,14 @@
       </p:sp>
       <p:sp>
         <p:nvSpPr>
-          <p:cNvPr id="24" name="Text 22"/>
-          <p:cNvSpPr txBox="1"/>
-          <p:nvPr/>
-        </p:nvSpPr>
-        <p:spPr>
-          <a:xfrm>
-            <a:off x="1069848" y="4626864"/>
-            <a:ext cx="4617720" cy="420624"/>
+          <p:cNvPr id="21" name="Text 19"/>
+          <p:cNvSpPr txBox="1"/>
+          <p:nvPr/>
+        </p:nvSpPr>
+        <p:spPr>
+          <a:xfrm>
+            <a:off x="1069848" y="4608576"/>
+            <a:ext cx="4023360" cy="402336"/>
           </a:xfrm>
           <a:prstGeom prst="rect">
             <a:avLst/>
@@ -14630,7 +14008,7 @@
               <a:buNone/>
             </a:pPr>
             <a:r>
-              <a:rPr lang="en-US" sz="1450" b="1" dirty="0">
+              <a:rPr lang="en-US" sz="1500" b="1" dirty="0">
                 <a:solidFill>
                   <a:srgbClr val="0E1620"/>
                 </a:solidFill>
@@ -14638,22 +14016,22 @@
                 <a:ea typeface="Schibsted Grotesk" pitchFamily="34" charset="-122"/>
                 <a:cs typeface="Schibsted Grotesk" pitchFamily="34" charset="-120"/>
               </a:rPr>
-              <a:t>Süreci bırakmadan buluta geçilir mi?</a:t>
-            </a:r>
-            <a:endParaRPr lang="en-US" sz="1450" dirty="0"/>
-          </a:p>
-        </p:txBody>
-      </p:sp>
-      <p:sp>
-        <p:nvSpPr>
-          <p:cNvPr id="25" name="Text 23"/>
-          <p:cNvSpPr txBox="1"/>
-          <p:nvPr/>
-        </p:nvSpPr>
-        <p:spPr>
-          <a:xfrm>
-            <a:off x="5897880" y="4672584"/>
-            <a:ext cx="2834640" cy="219456"/>
+              <a:t>SAP Private Cloud</a:t>
+            </a:r>
+            <a:endParaRPr lang="en-US" sz="1500" dirty="0"/>
+          </a:p>
+        </p:txBody>
+      </p:sp>
+      <p:sp>
+        <p:nvSpPr>
+          <p:cNvPr id="22" name="Text 20"/>
+          <p:cNvSpPr txBox="1"/>
+          <p:nvPr/>
+        </p:nvSpPr>
+        <p:spPr>
+          <a:xfrm>
+            <a:off x="5440680" y="4608576"/>
+            <a:ext cx="5897880" cy="402336"/>
           </a:xfrm>
           <a:prstGeom prst="rect">
             <a:avLst/>
@@ -14669,46 +14047,7 @@
               <a:buNone/>
             </a:pPr>
             <a:r>
-              <a:rPr lang="en-US" sz="850" spc="150" kern="0" dirty="0">
-                <a:solidFill>
-                  <a:srgbClr val="11676A"/>
-                </a:solidFill>
-                <a:latin typeface="IBM Plex Mono" pitchFamily="34" charset="0"/>
-                <a:ea typeface="IBM Plex Mono" pitchFamily="34" charset="-122"/>
-                <a:cs typeface="IBM Plex Mono" pitchFamily="34" charset="-120"/>
-              </a:rPr>
-              <a:t>SAP PRIVATE CLOUD</a:t>
-            </a:r>
-            <a:endParaRPr lang="en-US" sz="850" dirty="0"/>
-          </a:p>
-        </p:txBody>
-      </p:sp>
-      <p:sp>
-        <p:nvSpPr>
-          <p:cNvPr id="26" name="Text 24"/>
-          <p:cNvSpPr txBox="1"/>
-          <p:nvPr/>
-        </p:nvSpPr>
-        <p:spPr>
-          <a:xfrm>
-            <a:off x="5897880" y="4919472"/>
-            <a:ext cx="5440680" cy="256032"/>
-          </a:xfrm>
-          <a:prstGeom prst="rect">
-            <a:avLst/>
-          </a:prstGeom>
-          <a:noFill/>
-          <a:ln/>
-        </p:spPr>
-        <p:txBody>
-          <a:bodyPr wrap="square" lIns="0" tIns="0" rIns="0" bIns="0" rtlCol="0" anchor="ctr"/>
-          <a:lstStyle/>
-          <a:p>
-            <a:pPr indent="0" marL="0">
-              <a:buNone/>
-            </a:pPr>
-            <a:r>
-              <a:rPr lang="en-US" sz="1050" dirty="0">
+              <a:rPr lang="en-US" sz="1150" dirty="0">
                 <a:solidFill>
                   <a:srgbClr val="4A5A67"/>
                 </a:solidFill>
@@ -14718,19 +14057,19 @@
               </a:rPr>
               <a:t>Mimari, göç ve RISE’ın açık bıraktığı sorumluluk sınırları.</a:t>
             </a:r>
-            <a:endParaRPr lang="en-US" sz="1050" dirty="0"/>
-          </a:p>
-        </p:txBody>
-      </p:sp>
-      <p:sp>
-        <p:nvSpPr>
-          <p:cNvPr id="27" name="Shape 25"/>
+            <a:endParaRPr lang="en-US" sz="1150" dirty="0"/>
+          </a:p>
+        </p:txBody>
+      </p:sp>
+      <p:sp>
+        <p:nvSpPr>
+          <p:cNvPr id="23" name="Shape 21"/>
           <p:cNvSpPr/>
           <p:nvPr/>
         </p:nvSpPr>
         <p:spPr>
           <a:xfrm>
-            <a:off x="777240" y="5266944"/>
+            <a:off x="777240" y="5248656"/>
             <a:ext cx="10637215" cy="0"/>
           </a:xfrm>
           <a:prstGeom prst="line">
@@ -14747,7 +14086,7 @@
       </p:sp>
       <p:sp>
         <p:nvSpPr>
-          <p:cNvPr id="28" name="Shape 26"/>
+          <p:cNvPr id="24" name="Shape 22"/>
           <p:cNvSpPr/>
           <p:nvPr/>
         </p:nvSpPr>
@@ -14767,14 +14106,14 @@
       </p:sp>
       <p:sp>
         <p:nvSpPr>
-          <p:cNvPr id="29" name="Text 27"/>
+          <p:cNvPr id="25" name="Text 23"/>
           <p:cNvSpPr txBox="1"/>
           <p:nvPr/>
         </p:nvSpPr>
         <p:spPr>
           <a:xfrm>
             <a:off x="1069848" y="5394960"/>
-            <a:ext cx="4617720" cy="420624"/>
+            <a:ext cx="4023360" cy="402336"/>
           </a:xfrm>
           <a:prstGeom prst="rect">
             <a:avLst/>
@@ -14790,7 +14129,7 @@
               <a:buNone/>
             </a:pPr>
             <a:r>
-              <a:rPr lang="en-US" sz="1450" b="1" dirty="0">
+              <a:rPr lang="en-US" sz="1500" b="1" dirty="0">
                 <a:solidFill>
                   <a:srgbClr val="0E1620"/>
                 </a:solidFill>
@@ -14798,22 +14137,22 @@
                 <a:ea typeface="Schibsted Grotesk" pitchFamily="34" charset="-122"/>
                 <a:cs typeface="Schibsted Grotesk" pitchFamily="34" charset="-120"/>
               </a:rPr>
-              <a:t>Bu yapay zekanın hangisi bizim için gerçek?</a:t>
-            </a:r>
-            <a:endParaRPr lang="en-US" sz="1450" dirty="0"/>
-          </a:p>
-        </p:txBody>
-      </p:sp>
-      <p:sp>
-        <p:nvSpPr>
-          <p:cNvPr id="30" name="Text 28"/>
-          <p:cNvSpPr txBox="1"/>
-          <p:nvPr/>
-        </p:nvSpPr>
-        <p:spPr>
-          <a:xfrm>
-            <a:off x="5897880" y="5440680"/>
-            <a:ext cx="2834640" cy="219456"/>
+              <a:t>Finansta Yapay Zeka</a:t>
+            </a:r>
+            <a:endParaRPr lang="en-US" sz="1500" dirty="0"/>
+          </a:p>
+        </p:txBody>
+      </p:sp>
+      <p:sp>
+        <p:nvSpPr>
+          <p:cNvPr id="26" name="Text 24"/>
+          <p:cNvSpPr txBox="1"/>
+          <p:nvPr/>
+        </p:nvSpPr>
+        <p:spPr>
+          <a:xfrm>
+            <a:off x="5440680" y="5394960"/>
+            <a:ext cx="5897880" cy="402336"/>
           </a:xfrm>
           <a:prstGeom prst="rect">
             <a:avLst/>
@@ -14829,46 +14168,7 @@
               <a:buNone/>
             </a:pPr>
             <a:r>
-              <a:rPr lang="en-US" sz="850" spc="150" kern="0" dirty="0">
-                <a:solidFill>
-                  <a:srgbClr val="11676A"/>
-                </a:solidFill>
-                <a:latin typeface="IBM Plex Mono" pitchFamily="34" charset="0"/>
-                <a:ea typeface="IBM Plex Mono" pitchFamily="34" charset="-122"/>
-                <a:cs typeface="IBM Plex Mono" pitchFamily="34" charset="-120"/>
-              </a:rPr>
-              <a:t>FİNANSTA YAPAY ZEKA</a:t>
-            </a:r>
-            <a:endParaRPr lang="en-US" sz="850" dirty="0"/>
-          </a:p>
-        </p:txBody>
-      </p:sp>
-      <p:sp>
-        <p:nvSpPr>
-          <p:cNvPr id="31" name="Text 29"/>
-          <p:cNvSpPr txBox="1"/>
-          <p:nvPr/>
-        </p:nvSpPr>
-        <p:spPr>
-          <a:xfrm>
-            <a:off x="5897880" y="5687568"/>
-            <a:ext cx="5440680" cy="256032"/>
-          </a:xfrm>
-          <a:prstGeom prst="rect">
-            <a:avLst/>
-          </a:prstGeom>
-          <a:noFill/>
-          <a:ln/>
-        </p:spPr>
-        <p:txBody>
-          <a:bodyPr wrap="square" lIns="0" tIns="0" rIns="0" bIns="0" rtlCol="0" anchor="ctr"/>
-          <a:lstStyle/>
-          <a:p>
-            <a:pPr indent="0" marL="0">
-              <a:buNone/>
-            </a:pPr>
-            <a:r>
-              <a:rPr lang="en-US" sz="1050" dirty="0">
+              <a:rPr lang="en-US" sz="1150" dirty="0">
                 <a:solidFill>
                   <a:srgbClr val="4A5A67"/>
                 </a:solidFill>
@@ -14878,13 +14178,13 @@
               </a:rPr>
               <a:t>Verinizin ve disiplininizin gerçekten taşıdığı yetenekler.</a:t>
             </a:r>
-            <a:endParaRPr lang="en-US" sz="1050" dirty="0"/>
-          </a:p>
-        </p:txBody>
-      </p:sp>
-      <p:sp>
-        <p:nvSpPr>
-          <p:cNvPr id="32" name="Shape 30"/>
+            <a:endParaRPr lang="en-US" sz="1150" dirty="0"/>
+          </a:p>
+        </p:txBody>
+      </p:sp>
+      <p:sp>
+        <p:nvSpPr>
+          <p:cNvPr id="27" name="Shape 25"/>
           <p:cNvSpPr/>
           <p:nvPr/>
         </p:nvSpPr>

--- a/presentation/CPeak-Consultancy-Kurumsal-Sunum-TR.pptx
+++ b/presentation/CPeak-Consultancy-Kurumsal-Sunum-TR.pptx
@@ -2217,7 +2217,7 @@
                 <a:ea typeface="Inter" pitchFamily="34" charset="-122"/>
                 <a:cs typeface="Inter" pitchFamily="34" charset="-120"/>
               </a:rPr>
-              <a:t>Bağımsız ve bilinçli olarak dar: en zor kararların üzerinde bizzat biz çalışırız.</a:t>
+              <a:t>En zor kararlar bizde kalır.</a:t>
             </a:r>
             <a:endParaRPr lang="en-US" sz="1400" dirty="0"/>
           </a:p>
@@ -2764,7 +2764,7 @@
                 <a:ea typeface="Inter" pitchFamily="34" charset="-122"/>
                 <a:cs typeface="Inter" pitchFamily="34" charset="-120"/>
               </a:rPr>
-              <a:t>Akıllı eşleştirme — kalemler otomatik kapatılır</a:t>
+              <a:t>Akıllı eşleştirme</a:t>
             </a:r>
             <a:endParaRPr lang="en-US" sz="1100" dirty="0"/>
           </a:p>
@@ -2826,7 +2826,7 @@
                 <a:ea typeface="Inter" pitchFamily="34" charset="-122"/>
                 <a:cs typeface="Inter" pitchFamily="34" charset="-120"/>
               </a:rPr>
-              <a:t>Anomali tespiti — kapanıştan sonra değil, önce</a:t>
+              <a:t>Anomali tespiti</a:t>
             </a:r>
             <a:endParaRPr lang="en-US" sz="1100" dirty="0"/>
           </a:p>
@@ -2888,7 +2888,7 @@
                 <a:ea typeface="Inter" pitchFamily="34" charset="-122"/>
                 <a:cs typeface="Inter" pitchFamily="34" charset="-120"/>
               </a:rPr>
-              <a:t>Tahmine dayalı muhasebe — dönem içinde görünür</a:t>
+              <a:t>Tahmine dayalı muhasebe</a:t>
             </a:r>
             <a:endParaRPr lang="en-US" sz="1100" dirty="0"/>
           </a:p>
@@ -3053,7 +3053,7 @@
                 <a:ea typeface="Inter" pitchFamily="34" charset="-122"/>
                 <a:cs typeface="Inter" pitchFamily="34" charset="-120"/>
               </a:rPr>
-              <a:t>Custom kod envanteri ve etki analizi</a:t>
+              <a:t>Custom kod analizi</a:t>
             </a:r>
             <a:endParaRPr lang="en-US" sz="1100" dirty="0"/>
           </a:p>
@@ -3115,7 +3115,7 @@
                 <a:ea typeface="Inter" pitchFamily="34" charset="-122"/>
                 <a:cs typeface="Inter" pitchFamily="34" charset="-120"/>
               </a:rPr>
-              <a:t>Test senaryolarının ilk taslakları</a:t>
+              <a:t>Test senaryosu taslakları</a:t>
             </a:r>
             <a:endParaRPr lang="en-US" sz="1100" dirty="0"/>
           </a:p>
@@ -3177,7 +3177,7 @@
                 <a:ea typeface="Inter" pitchFamily="34" charset="-122"/>
                 <a:cs typeface="Inter" pitchFamily="34" charset="-120"/>
               </a:rPr>
-              <a:t>Migrasyon mutabakat kontrolleri</a:t>
+              <a:t>Migrasyon mutabakatı</a:t>
             </a:r>
             <a:endParaRPr lang="en-US" sz="1100" dirty="0"/>
           </a:p>
@@ -3463,55 +3463,13 @@
       </p:sp>
       <p:sp>
         <p:nvSpPr>
-          <p:cNvPr id="7" name="Text 5"/>
-          <p:cNvSpPr txBox="1"/>
-          <p:nvPr/>
-        </p:nvSpPr>
-        <p:spPr>
-          <a:xfrm>
-            <a:off x="777240" y="2706624"/>
-            <a:ext cx="4572000" cy="731520"/>
-          </a:xfrm>
-          <a:prstGeom prst="rect">
-            <a:avLst/>
-          </a:prstGeom>
-          <a:noFill/>
-          <a:ln/>
-        </p:spPr>
-        <p:txBody>
-          <a:bodyPr wrap="square" lIns="0" tIns="0" rIns="0" bIns="0" rtlCol="0" anchor="t"/>
-          <a:lstStyle/>
-          <a:p>
-            <a:pPr indent="0" marL="0">
-              <a:lnSpc>
-                <a:spcPts val="2000"/>
-              </a:lnSpc>
-              <a:buNone/>
-            </a:pPr>
-            <a:r>
-              <a:rPr lang="en-US" sz="1250" dirty="0">
-                <a:solidFill>
-                  <a:srgbClr val="4A5A67"/>
-                </a:solidFill>
-                <a:latin typeface="Inter" pitchFamily="34" charset="0"/>
-                <a:ea typeface="Inter" pitchFamily="34" charset="-122"/>
-                <a:cs typeface="Inter" pitchFamily="34" charset="-120"/>
-              </a:rPr>
-              <a:t>Neyi yapmadığımız, ne yaptığımız kadar önemlidir.</a:t>
-            </a:r>
-            <a:endParaRPr lang="en-US" sz="1250" dirty="0"/>
-          </a:p>
-        </p:txBody>
-      </p:sp>
-      <p:sp>
-        <p:nvSpPr>
-          <p:cNvPr id="8" name="Shape 6"/>
+          <p:cNvPr id="7" name="Shape 5"/>
           <p:cNvSpPr/>
           <p:nvPr/>
         </p:nvSpPr>
         <p:spPr>
           <a:xfrm>
-            <a:off x="777240" y="3602736"/>
+            <a:off x="777240" y="2834640"/>
             <a:ext cx="0" cy="1051560"/>
           </a:xfrm>
           <a:prstGeom prst="line">
@@ -3528,13 +3486,13 @@
       </p:sp>
       <p:sp>
         <p:nvSpPr>
-          <p:cNvPr id="9" name="Text 7"/>
-          <p:cNvSpPr txBox="1"/>
-          <p:nvPr/>
-        </p:nvSpPr>
-        <p:spPr>
-          <a:xfrm>
-            <a:off x="1033272" y="3602736"/>
+          <p:cNvPr id="8" name="Text 6"/>
+          <p:cNvSpPr txBox="1"/>
+          <p:nvPr/>
+        </p:nvSpPr>
+        <p:spPr>
+          <a:xfrm>
+            <a:off x="1033272" y="2834640"/>
             <a:ext cx="4480560" cy="1051560"/>
           </a:xfrm>
           <a:prstGeom prst="rect">
@@ -3570,13 +3528,13 @@
       </p:sp>
       <p:sp>
         <p:nvSpPr>
-          <p:cNvPr id="10" name="Shape 8"/>
+          <p:cNvPr id="9" name="Shape 7"/>
           <p:cNvSpPr/>
           <p:nvPr/>
         </p:nvSpPr>
         <p:spPr>
           <a:xfrm>
-            <a:off x="6035040" y="1874520"/>
+            <a:off x="6035040" y="2377440"/>
             <a:ext cx="5379415" cy="0"/>
           </a:xfrm>
           <a:prstGeom prst="line">
@@ -3593,13 +3551,13 @@
       </p:sp>
       <p:sp>
         <p:nvSpPr>
-          <p:cNvPr id="11" name="Text 9"/>
-          <p:cNvSpPr txBox="1"/>
-          <p:nvPr/>
-        </p:nvSpPr>
-        <p:spPr>
-          <a:xfrm>
-            <a:off x="6035040" y="2020824"/>
+          <p:cNvPr id="10" name="Text 8"/>
+          <p:cNvSpPr txBox="1"/>
+          <p:nvPr/>
+        </p:nvSpPr>
+        <p:spPr>
+          <a:xfrm>
+            <a:off x="6035040" y="2523744"/>
             <a:ext cx="457200" cy="237744"/>
           </a:xfrm>
           <a:prstGeom prst="rect">
@@ -3632,14 +3590,14 @@
       </p:sp>
       <p:sp>
         <p:nvSpPr>
-          <p:cNvPr id="12" name="Text 10"/>
-          <p:cNvSpPr txBox="1"/>
-          <p:nvPr/>
-        </p:nvSpPr>
-        <p:spPr>
-          <a:xfrm>
-            <a:off x="6601968" y="2002536"/>
-            <a:ext cx="4812487" cy="676656"/>
+          <p:cNvPr id="11" name="Text 9"/>
+          <p:cNvSpPr txBox="1"/>
+          <p:nvPr/>
+        </p:nvSpPr>
+        <p:spPr>
+          <a:xfrm>
+            <a:off x="6601968" y="2505456"/>
+            <a:ext cx="4812487" cy="475488"/>
           </a:xfrm>
           <a:prstGeom prst="rect">
             <a:avLst/>
@@ -3674,13 +3632,13 @@
       </p:sp>
       <p:sp>
         <p:nvSpPr>
-          <p:cNvPr id="13" name="Shape 11"/>
+          <p:cNvPr id="12" name="Shape 10"/>
           <p:cNvSpPr/>
           <p:nvPr/>
         </p:nvSpPr>
         <p:spPr>
           <a:xfrm>
-            <a:off x="6035040" y="2898648"/>
+            <a:off x="6035040" y="3163824"/>
             <a:ext cx="5379415" cy="0"/>
           </a:xfrm>
           <a:prstGeom prst="line">
@@ -3697,13 +3655,13 @@
       </p:sp>
       <p:sp>
         <p:nvSpPr>
-          <p:cNvPr id="14" name="Text 12"/>
-          <p:cNvSpPr txBox="1"/>
-          <p:nvPr/>
-        </p:nvSpPr>
-        <p:spPr>
-          <a:xfrm>
-            <a:off x="6035040" y="3044952"/>
+          <p:cNvPr id="13" name="Text 11"/>
+          <p:cNvSpPr txBox="1"/>
+          <p:nvPr/>
+        </p:nvSpPr>
+        <p:spPr>
+          <a:xfrm>
+            <a:off x="6035040" y="3310128"/>
             <a:ext cx="457200" cy="237744"/>
           </a:xfrm>
           <a:prstGeom prst="rect">
@@ -3736,14 +3694,14 @@
       </p:sp>
       <p:sp>
         <p:nvSpPr>
-          <p:cNvPr id="15" name="Text 13"/>
-          <p:cNvSpPr txBox="1"/>
-          <p:nvPr/>
-        </p:nvSpPr>
-        <p:spPr>
-          <a:xfrm>
-            <a:off x="6601968" y="3026664"/>
-            <a:ext cx="4812487" cy="676656"/>
+          <p:cNvPr id="14" name="Text 12"/>
+          <p:cNvSpPr txBox="1"/>
+          <p:nvPr/>
+        </p:nvSpPr>
+        <p:spPr>
+          <a:xfrm>
+            <a:off x="6601968" y="3291840"/>
+            <a:ext cx="4812487" cy="475488"/>
           </a:xfrm>
           <a:prstGeom prst="rect">
             <a:avLst/>
@@ -3770,7 +3728,7 @@
                 <a:ea typeface="Inter" pitchFamily="34" charset="-122"/>
                 <a:cs typeface="Inter" pitchFamily="34" charset="-120"/>
               </a:rPr>
-              <a:t>Mimari ya da teslim sorumluluğu olmadan kaynak sağlama</a:t>
+              <a:t>Teslim sorumluluğu olmadan kaynak sağlama</a:t>
             </a:r>
             <a:endParaRPr lang="en-US" sz="1200" dirty="0"/>
           </a:p>
@@ -3778,13 +3736,13 @@
       </p:sp>
       <p:sp>
         <p:nvSpPr>
-          <p:cNvPr id="16" name="Shape 14"/>
+          <p:cNvPr id="15" name="Shape 13"/>
           <p:cNvSpPr/>
           <p:nvPr/>
         </p:nvSpPr>
         <p:spPr>
           <a:xfrm>
-            <a:off x="6035040" y="3922776"/>
+            <a:off x="6035040" y="3950208"/>
             <a:ext cx="5379415" cy="0"/>
           </a:xfrm>
           <a:prstGeom prst="line">
@@ -3801,13 +3759,13 @@
       </p:sp>
       <p:sp>
         <p:nvSpPr>
-          <p:cNvPr id="17" name="Text 15"/>
-          <p:cNvSpPr txBox="1"/>
-          <p:nvPr/>
-        </p:nvSpPr>
-        <p:spPr>
-          <a:xfrm>
-            <a:off x="6035040" y="4069080"/>
+          <p:cNvPr id="16" name="Text 14"/>
+          <p:cNvSpPr txBox="1"/>
+          <p:nvPr/>
+        </p:nvSpPr>
+        <p:spPr>
+          <a:xfrm>
+            <a:off x="6035040" y="4096512"/>
             <a:ext cx="457200" cy="237744"/>
           </a:xfrm>
           <a:prstGeom prst="rect">
@@ -3840,14 +3798,14 @@
       </p:sp>
       <p:sp>
         <p:nvSpPr>
-          <p:cNvPr id="18" name="Text 16"/>
-          <p:cNvSpPr txBox="1"/>
-          <p:nvPr/>
-        </p:nvSpPr>
-        <p:spPr>
-          <a:xfrm>
-            <a:off x="6601968" y="4050792"/>
-            <a:ext cx="4812487" cy="676656"/>
+          <p:cNvPr id="17" name="Text 15"/>
+          <p:cNvSpPr txBox="1"/>
+          <p:nvPr/>
+        </p:nvSpPr>
+        <p:spPr>
+          <a:xfrm>
+            <a:off x="6601968" y="4078224"/>
+            <a:ext cx="4812487" cy="475488"/>
           </a:xfrm>
           <a:prstGeom prst="rect">
             <a:avLst/>
@@ -3874,7 +3832,7 @@
                 <a:ea typeface="Inter" pitchFamily="34" charset="-122"/>
                 <a:cs typeface="Inter" pitchFamily="34" charset="-120"/>
               </a:rPr>
-              <a:t>Değerlendirme yapılmadan verilen kesin taahhütler</a:t>
+              <a:t>Değerlendirmesiz kesin taahhüt</a:t>
             </a:r>
             <a:endParaRPr lang="en-US" sz="1200" dirty="0"/>
           </a:p>
@@ -3882,13 +3840,13 @@
       </p:sp>
       <p:sp>
         <p:nvSpPr>
-          <p:cNvPr id="19" name="Shape 17"/>
+          <p:cNvPr id="18" name="Shape 16"/>
           <p:cNvSpPr/>
           <p:nvPr/>
         </p:nvSpPr>
         <p:spPr>
           <a:xfrm>
-            <a:off x="6035040" y="4946904"/>
+            <a:off x="6035040" y="4736592"/>
             <a:ext cx="5379415" cy="0"/>
           </a:xfrm>
           <a:prstGeom prst="line">
@@ -3905,13 +3863,13 @@
       </p:sp>
       <p:sp>
         <p:nvSpPr>
-          <p:cNvPr id="20" name="Text 18"/>
-          <p:cNvSpPr txBox="1"/>
-          <p:nvPr/>
-        </p:nvSpPr>
-        <p:spPr>
-          <a:xfrm>
-            <a:off x="6035040" y="5093208"/>
+          <p:cNvPr id="19" name="Text 17"/>
+          <p:cNvSpPr txBox="1"/>
+          <p:nvPr/>
+        </p:nvSpPr>
+        <p:spPr>
+          <a:xfrm>
+            <a:off x="6035040" y="4882896"/>
             <a:ext cx="457200" cy="237744"/>
           </a:xfrm>
           <a:prstGeom prst="rect">
@@ -3944,14 +3902,14 @@
       </p:sp>
       <p:sp>
         <p:nvSpPr>
-          <p:cNvPr id="21" name="Text 19"/>
-          <p:cNvSpPr txBox="1"/>
-          <p:nvPr/>
-        </p:nvSpPr>
-        <p:spPr>
-          <a:xfrm>
-            <a:off x="6601968" y="5074920"/>
-            <a:ext cx="4812487" cy="676656"/>
+          <p:cNvPr id="20" name="Text 18"/>
+          <p:cNvSpPr txBox="1"/>
+          <p:nvPr/>
+        </p:nvSpPr>
+        <p:spPr>
+          <a:xfrm>
+            <a:off x="6601968" y="4864608"/>
+            <a:ext cx="4812487" cy="475488"/>
           </a:xfrm>
           <a:prstGeom prst="rect">
             <a:avLst/>
@@ -3978,7 +3936,7 @@
                 <a:ea typeface="Inter" pitchFamily="34" charset="-122"/>
                 <a:cs typeface="Inter" pitchFamily="34" charset="-120"/>
               </a:rPr>
-              <a:t>Yazılım geliştirme ya da altyapı işletim hizmeti</a:t>
+              <a:t>Yazılım geliştirme ve altyapı işletimi</a:t>
             </a:r>
             <a:endParaRPr lang="en-US" sz="1200" dirty="0"/>
           </a:p>
@@ -3986,13 +3944,13 @@
       </p:sp>
       <p:sp>
         <p:nvSpPr>
-          <p:cNvPr id="22" name="Shape 20"/>
+          <p:cNvPr id="21" name="Shape 19"/>
           <p:cNvSpPr/>
           <p:nvPr/>
         </p:nvSpPr>
         <p:spPr>
           <a:xfrm>
-            <a:off x="6035040" y="5971032"/>
+            <a:off x="6035040" y="5522976"/>
             <a:ext cx="5379415" cy="0"/>
           </a:xfrm>
           <a:prstGeom prst="line">
@@ -4229,8 +4187,8 @@
         </p:nvSpPr>
         <p:spPr>
           <a:xfrm>
-            <a:off x="777240" y="2487168"/>
-            <a:ext cx="3310128" cy="2798064"/>
+            <a:off x="777240" y="2606040"/>
+            <a:ext cx="3310128" cy="2743200"/>
           </a:xfrm>
           <a:prstGeom prst="rect">
             <a:avLst/>
@@ -4261,7 +4219,7 @@
         </p:nvSpPr>
         <p:spPr>
           <a:xfrm>
-            <a:off x="1129284" y="2894076"/>
+            <a:off x="1129284" y="3086100"/>
             <a:ext cx="137160" cy="137160"/>
           </a:xfrm>
           <a:prstGeom prst="ellipse">
@@ -4281,7 +4239,7 @@
         </p:nvSpPr>
         <p:spPr>
           <a:xfrm>
-            <a:off x="1197864" y="3163824"/>
+            <a:off x="1197864" y="3392424"/>
             <a:ext cx="2468880" cy="384048"/>
           </a:xfrm>
           <a:prstGeom prst="rect">
@@ -4320,8 +4278,8 @@
         </p:nvSpPr>
         <p:spPr>
           <a:xfrm>
-            <a:off x="1197864" y="3639312"/>
-            <a:ext cx="2468880" cy="731520"/>
+            <a:off x="1197864" y="3922776"/>
+            <a:ext cx="2468880" cy="402336"/>
           </a:xfrm>
           <a:prstGeom prst="rect">
             <a:avLst/>
@@ -4348,7 +4306,7 @@
                 <a:ea typeface="Inter" pitchFamily="34" charset="-122"/>
                 <a:cs typeface="Inter" pitchFamily="34" charset="-120"/>
               </a:rPr>
-              <a:t>Karar vermeniz gerekiyor, elinizde veri yok.</a:t>
+              <a:t>Karar için kanıt.</a:t>
             </a:r>
             <a:endParaRPr lang="en-US" sz="1100" dirty="0"/>
           </a:p>
@@ -4362,7 +4320,7 @@
         </p:nvSpPr>
         <p:spPr>
           <a:xfrm>
-            <a:off x="1197864" y="4407408"/>
+            <a:off x="1197864" y="4617720"/>
             <a:ext cx="2468880" cy="0"/>
           </a:xfrm>
           <a:prstGeom prst="line">
@@ -4385,49 +4343,7 @@
         </p:nvSpPr>
         <p:spPr>
           <a:xfrm>
-            <a:off x="1197864" y="4517136"/>
-            <a:ext cx="2468880" cy="457200"/>
-          </a:xfrm>
-          <a:prstGeom prst="rect">
-            <a:avLst/>
-          </a:prstGeom>
-          <a:noFill/>
-          <a:ln/>
-        </p:spPr>
-        <p:txBody>
-          <a:bodyPr wrap="square" lIns="0" tIns="0" rIns="0" bIns="0" rtlCol="0" anchor="t"/>
-          <a:lstStyle/>
-          <a:p>
-            <a:pPr indent="0" marL="0">
-              <a:lnSpc>
-                <a:spcPts val="1600"/>
-              </a:lnSpc>
-              <a:buNone/>
-            </a:pPr>
-            <a:r>
-              <a:rPr lang="en-US" sz="1050" i="1" dirty="0">
-                <a:solidFill>
-                  <a:srgbClr val="0E1620"/>
-                </a:solidFill>
-                <a:latin typeface="Inter" pitchFamily="34" charset="0"/>
-                <a:ea typeface="Inter" pitchFamily="34" charset="-122"/>
-                <a:cs typeface="Inter" pitchFamily="34" charset="-120"/>
-              </a:rPr>
-              <a:t>Sonunda karar verebilecek durumda olursunuz.</a:t>
-            </a:r>
-            <a:endParaRPr lang="en-US" sz="1050" dirty="0"/>
-          </a:p>
-        </p:txBody>
-      </p:sp>
-      <p:sp>
-        <p:nvSpPr>
-          <p:cNvPr id="13" name="Text 11"/>
-          <p:cNvSpPr txBox="1"/>
-          <p:nvPr/>
-        </p:nvSpPr>
-        <p:spPr>
-          <a:xfrm>
-            <a:off x="1197864" y="5010912"/>
+            <a:off x="1197864" y="4764024"/>
             <a:ext cx="2468880" cy="237744"/>
           </a:xfrm>
           <a:prstGeom prst="rect">
@@ -4460,14 +4376,14 @@
       </p:sp>
       <p:sp>
         <p:nvSpPr>
-          <p:cNvPr id="14" name="Shape 12"/>
+          <p:cNvPr id="13" name="Shape 11"/>
           <p:cNvSpPr/>
           <p:nvPr/>
         </p:nvSpPr>
         <p:spPr>
           <a:xfrm>
-            <a:off x="4471416" y="2487168"/>
-            <a:ext cx="3310128" cy="2798064"/>
+            <a:off x="4471416" y="2606040"/>
+            <a:ext cx="3310128" cy="2743200"/>
           </a:xfrm>
           <a:prstGeom prst="rect">
             <a:avLst/>
@@ -4492,13 +4408,13 @@
       </p:sp>
       <p:sp>
         <p:nvSpPr>
-          <p:cNvPr id="15" name="Shape 13"/>
+          <p:cNvPr id="14" name="Shape 12"/>
           <p:cNvSpPr/>
           <p:nvPr/>
         </p:nvSpPr>
         <p:spPr>
           <a:xfrm>
-            <a:off x="4823460" y="2894076"/>
+            <a:off x="4823460" y="3086100"/>
             <a:ext cx="137160" cy="137160"/>
           </a:xfrm>
           <a:prstGeom prst="ellipse">
@@ -4512,13 +4428,13 @@
       </p:sp>
       <p:sp>
         <p:nvSpPr>
-          <p:cNvPr id="16" name="Text 14"/>
-          <p:cNvSpPr txBox="1"/>
-          <p:nvPr/>
-        </p:nvSpPr>
-        <p:spPr>
-          <a:xfrm>
-            <a:off x="4892040" y="3163824"/>
+          <p:cNvPr id="15" name="Text 13"/>
+          <p:cNvSpPr txBox="1"/>
+          <p:nvPr/>
+        </p:nvSpPr>
+        <p:spPr>
+          <a:xfrm>
+            <a:off x="4892040" y="3392424"/>
             <a:ext cx="2468880" cy="384048"/>
           </a:xfrm>
           <a:prstGeom prst="rect">
@@ -4551,14 +4467,14 @@
       </p:sp>
       <p:sp>
         <p:nvSpPr>
-          <p:cNvPr id="17" name="Text 15"/>
-          <p:cNvSpPr txBox="1"/>
-          <p:nvPr/>
-        </p:nvSpPr>
-        <p:spPr>
-          <a:xfrm>
-            <a:off x="4892040" y="3639312"/>
-            <a:ext cx="2468880" cy="731520"/>
+          <p:cNvPr id="16" name="Text 14"/>
+          <p:cNvSpPr txBox="1"/>
+          <p:nvPr/>
+        </p:nvSpPr>
+        <p:spPr>
+          <a:xfrm>
+            <a:off x="4892040" y="3922776"/>
+            <a:ext cx="2468880" cy="402336"/>
           </a:xfrm>
           <a:prstGeom prst="rect">
             <a:avLst/>
@@ -4585,7 +4501,7 @@
                 <a:ea typeface="Inter" pitchFamily="34" charset="-122"/>
                 <a:cs typeface="Inter" pitchFamily="34" charset="-120"/>
               </a:rPr>
-              <a:t>Karar verilmiş; uygulanması gerekiyor.</a:t>
+              <a:t>Uçtan uca uygulama.</a:t>
             </a:r>
             <a:endParaRPr lang="en-US" sz="1100" dirty="0"/>
           </a:p>
@@ -4593,13 +4509,13 @@
       </p:sp>
       <p:sp>
         <p:nvSpPr>
-          <p:cNvPr id="18" name="Shape 16"/>
+          <p:cNvPr id="17" name="Shape 15"/>
           <p:cNvSpPr/>
           <p:nvPr/>
         </p:nvSpPr>
         <p:spPr>
           <a:xfrm>
-            <a:off x="4892040" y="4407408"/>
+            <a:off x="4892040" y="4617720"/>
             <a:ext cx="2468880" cy="0"/>
           </a:xfrm>
           <a:prstGeom prst="line">
@@ -4616,55 +4532,13 @@
       </p:sp>
       <p:sp>
         <p:nvSpPr>
-          <p:cNvPr id="19" name="Text 17"/>
-          <p:cNvSpPr txBox="1"/>
-          <p:nvPr/>
-        </p:nvSpPr>
-        <p:spPr>
-          <a:xfrm>
-            <a:off x="4892040" y="4517136"/>
-            <a:ext cx="2468880" cy="457200"/>
-          </a:xfrm>
-          <a:prstGeom prst="rect">
-            <a:avLst/>
-          </a:prstGeom>
-          <a:noFill/>
-          <a:ln/>
-        </p:spPr>
-        <p:txBody>
-          <a:bodyPr wrap="square" lIns="0" tIns="0" rIns="0" bIns="0" rtlCol="0" anchor="t"/>
-          <a:lstStyle/>
-          <a:p>
-            <a:pPr indent="0" marL="0">
-              <a:lnSpc>
-                <a:spcPts val="1600"/>
-              </a:lnSpc>
-              <a:buNone/>
-            </a:pPr>
-            <a:r>
-              <a:rPr lang="en-US" sz="1050" i="1" dirty="0">
-                <a:solidFill>
-                  <a:srgbClr val="0E1620"/>
-                </a:solidFill>
-                <a:latin typeface="Inter" pitchFamily="34" charset="0"/>
-                <a:ea typeface="Inter" pitchFamily="34" charset="-122"/>
-                <a:cs typeface="Inter" pitchFamily="34" charset="-120"/>
-              </a:rPr>
-              <a:t>Fazlı plan, haftalık rapor, hypercare dahil.</a:t>
-            </a:r>
-            <a:endParaRPr lang="en-US" sz="1050" dirty="0"/>
-          </a:p>
-        </p:txBody>
-      </p:sp>
-      <p:sp>
-        <p:nvSpPr>
-          <p:cNvPr id="20" name="Text 18"/>
-          <p:cNvSpPr txBox="1"/>
-          <p:nvPr/>
-        </p:nvSpPr>
-        <p:spPr>
-          <a:xfrm>
-            <a:off x="4892040" y="5010912"/>
+          <p:cNvPr id="18" name="Text 16"/>
+          <p:cNvSpPr txBox="1"/>
+          <p:nvPr/>
+        </p:nvSpPr>
+        <p:spPr>
+          <a:xfrm>
+            <a:off x="4892040" y="4764024"/>
             <a:ext cx="2468880" cy="237744"/>
           </a:xfrm>
           <a:prstGeom prst="rect">
@@ -4697,14 +4571,14 @@
       </p:sp>
       <p:sp>
         <p:nvSpPr>
-          <p:cNvPr id="21" name="Shape 19"/>
+          <p:cNvPr id="19" name="Shape 17"/>
           <p:cNvSpPr/>
           <p:nvPr/>
         </p:nvSpPr>
         <p:spPr>
           <a:xfrm>
-            <a:off x="8165592" y="2487168"/>
-            <a:ext cx="3310128" cy="2798064"/>
+            <a:off x="8165592" y="2606040"/>
+            <a:ext cx="3310128" cy="2743200"/>
           </a:xfrm>
           <a:prstGeom prst="rect">
             <a:avLst/>
@@ -4729,13 +4603,13 @@
       </p:sp>
       <p:sp>
         <p:nvSpPr>
-          <p:cNvPr id="22" name="Shape 20"/>
+          <p:cNvPr id="20" name="Shape 18"/>
           <p:cNvSpPr/>
           <p:nvPr/>
         </p:nvSpPr>
         <p:spPr>
           <a:xfrm>
-            <a:off x="8517636" y="2894076"/>
+            <a:off x="8517636" y="3086100"/>
             <a:ext cx="137160" cy="137160"/>
           </a:xfrm>
           <a:prstGeom prst="ellipse">
@@ -4749,13 +4623,13 @@
       </p:sp>
       <p:sp>
         <p:nvSpPr>
-          <p:cNvPr id="23" name="Text 21"/>
-          <p:cNvSpPr txBox="1"/>
-          <p:nvPr/>
-        </p:nvSpPr>
-        <p:spPr>
-          <a:xfrm>
-            <a:off x="8586216" y="3163824"/>
+          <p:cNvPr id="21" name="Text 19"/>
+          <p:cNvSpPr txBox="1"/>
+          <p:nvPr/>
+        </p:nvSpPr>
+        <p:spPr>
+          <a:xfrm>
+            <a:off x="8586216" y="3392424"/>
             <a:ext cx="2468880" cy="384048"/>
           </a:xfrm>
           <a:prstGeom prst="rect">
@@ -4788,14 +4662,14 @@
       </p:sp>
       <p:sp>
         <p:nvSpPr>
-          <p:cNvPr id="24" name="Text 22"/>
-          <p:cNvSpPr txBox="1"/>
-          <p:nvPr/>
-        </p:nvSpPr>
-        <p:spPr>
-          <a:xfrm>
-            <a:off x="8586216" y="3639312"/>
-            <a:ext cx="2468880" cy="731520"/>
+          <p:cNvPr id="22" name="Text 20"/>
+          <p:cNvSpPr txBox="1"/>
+          <p:nvPr/>
+        </p:nvSpPr>
+        <p:spPr>
+          <a:xfrm>
+            <a:off x="8586216" y="3922776"/>
+            <a:ext cx="2468880" cy="402336"/>
           </a:xfrm>
           <a:prstGeom prst="rect">
             <a:avLst/>
@@ -4822,7 +4696,7 @@
                 <a:ea typeface="Inter" pitchFamily="34" charset="-122"/>
                 <a:cs typeface="Inter" pitchFamily="34" charset="-120"/>
               </a:rPr>
-              <a:t>Projeyi başkası yürütüyor, tek noktada derinlik gerekiyor.</a:t>
+              <a:t>Tek konuda derinlik.</a:t>
             </a:r>
             <a:endParaRPr lang="en-US" sz="1100" dirty="0"/>
           </a:p>
@@ -4830,13 +4704,13 @@
       </p:sp>
       <p:sp>
         <p:nvSpPr>
-          <p:cNvPr id="25" name="Shape 23"/>
+          <p:cNvPr id="23" name="Shape 21"/>
           <p:cNvSpPr/>
           <p:nvPr/>
         </p:nvSpPr>
         <p:spPr>
           <a:xfrm>
-            <a:off x="8586216" y="4407408"/>
+            <a:off x="8586216" y="4617720"/>
             <a:ext cx="2468880" cy="0"/>
           </a:xfrm>
           <a:prstGeom prst="line">
@@ -4853,55 +4727,13 @@
       </p:sp>
       <p:sp>
         <p:nvSpPr>
-          <p:cNvPr id="26" name="Text 24"/>
-          <p:cNvSpPr txBox="1"/>
-          <p:nvPr/>
-        </p:nvSpPr>
-        <p:spPr>
-          <a:xfrm>
-            <a:off x="8586216" y="4517136"/>
-            <a:ext cx="2468880" cy="457200"/>
-          </a:xfrm>
-          <a:prstGeom prst="rect">
-            <a:avLst/>
-          </a:prstGeom>
-          <a:noFill/>
-          <a:ln/>
-        </p:spPr>
-        <p:txBody>
-          <a:bodyPr wrap="square" lIns="0" tIns="0" rIns="0" bIns="0" rtlCol="0" anchor="t"/>
-          <a:lstStyle/>
-          <a:p>
-            <a:pPr indent="0" marL="0">
-              <a:lnSpc>
-                <a:spcPts val="1600"/>
-              </a:lnSpc>
-              <a:buNone/>
-            </a:pPr>
-            <a:r>
-              <a:rPr lang="en-US" sz="1050" i="1" dirty="0">
-                <a:solidFill>
-                  <a:srgbClr val="0E1620"/>
-                </a:solidFill>
-                <a:latin typeface="Inter" pitchFamily="34" charset="0"/>
-                <a:ea typeface="Inter" pitchFamily="34" charset="-122"/>
-                <a:cs typeface="Inter" pitchFamily="34" charset="-120"/>
-              </a:rPr>
-              <a:t>Sınırlı kapsam, baştan anlaşılmış çıktı.</a:t>
-            </a:r>
-            <a:endParaRPr lang="en-US" sz="1050" dirty="0"/>
-          </a:p>
-        </p:txBody>
-      </p:sp>
-      <p:sp>
-        <p:nvSpPr>
-          <p:cNvPr id="27" name="Text 25"/>
-          <p:cNvSpPr txBox="1"/>
-          <p:nvPr/>
-        </p:nvSpPr>
-        <p:spPr>
-          <a:xfrm>
-            <a:off x="8586216" y="5010912"/>
+          <p:cNvPr id="24" name="Text 22"/>
+          <p:cNvSpPr txBox="1"/>
+          <p:nvPr/>
+        </p:nvSpPr>
+        <p:spPr>
+          <a:xfrm>
+            <a:off x="8586216" y="4764024"/>
             <a:ext cx="2468880" cy="237744"/>
           </a:xfrm>
           <a:prstGeom prst="rect">
@@ -4929,45 +4761,6 @@
               <a:t>Gün – hafta</a:t>
             </a:r>
             <a:endParaRPr lang="en-US" sz="1050" dirty="0"/>
-          </a:p>
-        </p:txBody>
-      </p:sp>
-      <p:sp>
-        <p:nvSpPr>
-          <p:cNvPr id="28" name="Text 26"/>
-          <p:cNvSpPr txBox="1"/>
-          <p:nvPr/>
-        </p:nvSpPr>
-        <p:spPr>
-          <a:xfrm>
-            <a:off x="777240" y="5669280"/>
-            <a:ext cx="10424160" cy="274320"/>
-          </a:xfrm>
-          <a:prstGeom prst="rect">
-            <a:avLst/>
-          </a:prstGeom>
-          <a:noFill/>
-          <a:ln/>
-        </p:spPr>
-        <p:txBody>
-          <a:bodyPr wrap="square" lIns="0" tIns="0" rIns="0" bIns="0" rtlCol="0" anchor="ctr"/>
-          <a:lstStyle/>
-          <a:p>
-            <a:pPr indent="0" marL="0">
-              <a:buNone/>
-            </a:pPr>
-            <a:r>
-              <a:rPr lang="en-US" sz="1200" i="1" dirty="0">
-                <a:solidFill>
-                  <a:srgbClr val="4A5A67"/>
-                </a:solidFill>
-                <a:latin typeface="Inter" pitchFamily="34" charset="0"/>
-                <a:ea typeface="Inter" pitchFamily="34" charset="-122"/>
-                <a:cs typeface="Inter" pitchFamily="34" charset="-120"/>
-              </a:rPr>
-              <a:t>Her ihtiyaç tam kapsamlı bir proje gerektirmez.</a:t>
-            </a:r>
-            <a:endParaRPr lang="en-US" sz="1200" dirty="0"/>
           </a:p>
         </p:txBody>
       </p:sp>
@@ -5241,7 +5034,7 @@
                 <a:ea typeface="Inter" pitchFamily="34" charset="-122"/>
                 <a:cs typeface="Inter" pitchFamily="34" charset="-120"/>
               </a:rPr>
-              <a:t>SAP finans modülleri ve bulut mimarisinde on yılı aşkın deneyim.</a:t>
+              <a:t>SAP finans ve bulut mimarisinde 10+ yıl.</a:t>
             </a:r>
             <a:endParaRPr lang="en-US" sz="1200" dirty="0"/>
           </a:p>
@@ -5981,7 +5774,7 @@
                 <a:ea typeface="Inter" pitchFamily="34" charset="-122"/>
                 <a:cs typeface="Inter" pitchFamily="34" charset="-120"/>
               </a:rPr>
-              <a:t>Tanıştığınız danışman, projede çalışan kişidir.</a:t>
+              <a:t>Tanıştığınız danışman projede çalışır.</a:t>
             </a:r>
             <a:endParaRPr lang="en-US" sz="1100" dirty="0"/>
           </a:p>
@@ -6107,7 +5900,7 @@
                 <a:ea typeface="Inter" pitchFamily="34" charset="-122"/>
                 <a:cs typeface="Inter" pitchFamily="34" charset="-120"/>
               </a:rPr>
-              <a:t>Finans ve bulut mimarisi. Zor kısım bizde kalır.</a:t>
+              <a:t>Yalnızca finans ve bulut mimarisi.</a:t>
             </a:r>
             <a:endParaRPr lang="en-US" sz="1100" dirty="0"/>
           </a:p>
@@ -6233,7 +6026,7 @@
                 <a:ea typeface="Inter" pitchFamily="34" charset="-122"/>
                 <a:cs typeface="Inter" pitchFamily="34" charset="-120"/>
               </a:rPr>
-              <a:t>Biz karşılaştırırız, siz karar verirsiniz, gerekçe yazılı kalır.</a:t>
+              <a:t>Biz karşılaştırırız, siz karar verirsiniz.</a:t>
             </a:r>
             <a:endParaRPr lang="en-US" sz="1100" dirty="0"/>
           </a:p>
@@ -6930,55 +6723,13 @@
       </p:sp>
       <p:sp>
         <p:nvSpPr>
-          <p:cNvPr id="7" name="Text 5"/>
-          <p:cNvSpPr txBox="1"/>
-          <p:nvPr/>
-        </p:nvSpPr>
-        <p:spPr>
-          <a:xfrm>
-            <a:off x="777240" y="2788920"/>
-            <a:ext cx="4892040" cy="1371600"/>
-          </a:xfrm>
-          <a:prstGeom prst="rect">
-            <a:avLst/>
-          </a:prstGeom>
-          <a:noFill/>
-          <a:ln/>
-        </p:spPr>
-        <p:txBody>
-          <a:bodyPr wrap="square" lIns="0" tIns="0" rIns="0" bIns="0" rtlCol="0" anchor="t"/>
-          <a:lstStyle/>
-          <a:p>
-            <a:pPr indent="0" marL="0">
-              <a:lnSpc>
-                <a:spcPts val="2100"/>
-              </a:lnSpc>
-              <a:buNone/>
-            </a:pPr>
-            <a:r>
-              <a:rPr lang="en-US" sz="1300" dirty="0">
-                <a:solidFill>
-                  <a:srgbClr val="4A5A67"/>
-                </a:solidFill>
-                <a:latin typeface="Inter" pitchFamily="34" charset="0"/>
-                <a:ea typeface="Inter" pitchFamily="34" charset="-122"/>
-                <a:cs typeface="Inter" pitchFamily="34" charset="-120"/>
-              </a:rPr>
-              <a:t>Geniş kapsam satılır, her alana ayrı uzman aranır — ve en zor karar, o konuyu en az görmüş kişiye kalır.</a:t>
-            </a:r>
-            <a:endParaRPr lang="en-US" sz="1300" dirty="0"/>
-          </a:p>
-        </p:txBody>
-      </p:sp>
-      <p:sp>
-        <p:nvSpPr>
-          <p:cNvPr id="8" name="Shape 6"/>
+          <p:cNvPr id="7" name="Shape 5"/>
           <p:cNvSpPr/>
           <p:nvPr/>
         </p:nvSpPr>
         <p:spPr>
           <a:xfrm>
-            <a:off x="777240" y="4206240"/>
+            <a:off x="777240" y="3703320"/>
             <a:ext cx="0" cy="1051560"/>
           </a:xfrm>
           <a:prstGeom prst="line">
@@ -6995,13 +6746,13 @@
       </p:sp>
       <p:sp>
         <p:nvSpPr>
-          <p:cNvPr id="9" name="Text 7"/>
-          <p:cNvSpPr txBox="1"/>
-          <p:nvPr/>
-        </p:nvSpPr>
-        <p:spPr>
-          <a:xfrm>
-            <a:off x="1033272" y="4206240"/>
+          <p:cNvPr id="8" name="Text 6"/>
+          <p:cNvSpPr txBox="1"/>
+          <p:nvPr/>
+        </p:nvSpPr>
+        <p:spPr>
+          <a:xfrm>
+            <a:off x="1033272" y="3703320"/>
             <a:ext cx="4617720" cy="1051560"/>
           </a:xfrm>
           <a:prstGeom prst="rect">
@@ -7037,7 +6788,7 @@
       </p:sp>
       <p:sp>
         <p:nvSpPr>
-          <p:cNvPr id="10" name="Text 8"/>
+          <p:cNvPr id="9" name="Text 7"/>
           <p:cNvSpPr txBox="1"/>
           <p:nvPr/>
         </p:nvSpPr>
@@ -7076,7 +6827,7 @@
       </p:sp>
       <p:sp>
         <p:nvSpPr>
-          <p:cNvPr id="11" name="Shape 9"/>
+          <p:cNvPr id="10" name="Shape 8"/>
           <p:cNvSpPr/>
           <p:nvPr/>
         </p:nvSpPr>
@@ -7099,7 +6850,7 @@
       </p:sp>
       <p:sp>
         <p:nvSpPr>
-          <p:cNvPr id="12" name="Shape 10"/>
+          <p:cNvPr id="11" name="Shape 9"/>
           <p:cNvSpPr/>
           <p:nvPr/>
         </p:nvSpPr>
@@ -7119,7 +6870,7 @@
       </p:sp>
       <p:sp>
         <p:nvSpPr>
-          <p:cNvPr id="13" name="Shape 11"/>
+          <p:cNvPr id="12" name="Shape 10"/>
           <p:cNvSpPr/>
           <p:nvPr/>
         </p:nvSpPr>
@@ -7139,7 +6890,7 @@
       </p:sp>
       <p:sp>
         <p:nvSpPr>
-          <p:cNvPr id="14" name="Shape 12"/>
+          <p:cNvPr id="13" name="Shape 11"/>
           <p:cNvSpPr/>
           <p:nvPr/>
         </p:nvSpPr>
@@ -7159,7 +6910,7 @@
       </p:sp>
       <p:sp>
         <p:nvSpPr>
-          <p:cNvPr id="15" name="Shape 13"/>
+          <p:cNvPr id="14" name="Shape 12"/>
           <p:cNvSpPr/>
           <p:nvPr/>
         </p:nvSpPr>
@@ -7179,7 +6930,7 @@
       </p:sp>
       <p:sp>
         <p:nvSpPr>
-          <p:cNvPr id="16" name="Shape 14"/>
+          <p:cNvPr id="15" name="Shape 13"/>
           <p:cNvSpPr/>
           <p:nvPr/>
         </p:nvSpPr>
@@ -7199,7 +6950,7 @@
       </p:sp>
       <p:sp>
         <p:nvSpPr>
-          <p:cNvPr id="17" name="Shape 15"/>
+          <p:cNvPr id="16" name="Shape 14"/>
           <p:cNvSpPr/>
           <p:nvPr/>
         </p:nvSpPr>
@@ -7219,7 +6970,7 @@
       </p:sp>
       <p:sp>
         <p:nvSpPr>
-          <p:cNvPr id="18" name="Text 16"/>
+          <p:cNvPr id="17" name="Text 15"/>
           <p:cNvSpPr txBox="1"/>
           <p:nvPr/>
         </p:nvSpPr>
@@ -7258,7 +7009,7 @@
       </p:sp>
       <p:sp>
         <p:nvSpPr>
-          <p:cNvPr id="19" name="Text 17"/>
+          <p:cNvPr id="18" name="Text 16"/>
           <p:cNvSpPr txBox="1"/>
           <p:nvPr/>
         </p:nvSpPr>
@@ -7297,7 +7048,7 @@
       </p:sp>
       <p:sp>
         <p:nvSpPr>
-          <p:cNvPr id="20" name="Text 18"/>
+          <p:cNvPr id="19" name="Text 17"/>
           <p:cNvSpPr txBox="1"/>
           <p:nvPr/>
         </p:nvSpPr>
@@ -7336,7 +7087,7 @@
       </p:sp>
       <p:sp>
         <p:nvSpPr>
-          <p:cNvPr id="21" name="Shape 19"/>
+          <p:cNvPr id="20" name="Shape 18"/>
           <p:cNvSpPr/>
           <p:nvPr/>
         </p:nvSpPr>
@@ -7359,7 +7110,7 @@
       </p:sp>
       <p:sp>
         <p:nvSpPr>
-          <p:cNvPr id="22" name="Shape 20"/>
+          <p:cNvPr id="21" name="Shape 19"/>
           <p:cNvSpPr/>
           <p:nvPr/>
         </p:nvSpPr>
@@ -7379,13 +7130,13 @@
       </p:sp>
       <p:sp>
         <p:nvSpPr>
-          <p:cNvPr id="23" name="Shape 21"/>
+          <p:cNvPr id="22" name="Shape 20"/>
           <p:cNvSpPr/>
           <p:nvPr/>
         </p:nvSpPr>
         <p:spPr>
           <a:xfrm>
-            <a:off x="7607808" y="3310128"/>
+            <a:off x="7607808" y="3520440"/>
             <a:ext cx="201168" cy="0"/>
           </a:xfrm>
           <a:prstGeom prst="line">
@@ -7402,13 +7153,13 @@
       </p:sp>
       <p:sp>
         <p:nvSpPr>
-          <p:cNvPr id="24" name="Shape 22"/>
+          <p:cNvPr id="23" name="Shape 21"/>
           <p:cNvSpPr/>
           <p:nvPr/>
         </p:nvSpPr>
         <p:spPr>
           <a:xfrm>
-            <a:off x="7566660" y="3268980"/>
+            <a:off x="7566660" y="3479292"/>
             <a:ext cx="82296" cy="82296"/>
           </a:xfrm>
           <a:prstGeom prst="ellipse">
@@ -7422,13 +7173,13 @@
       </p:sp>
       <p:sp>
         <p:nvSpPr>
-          <p:cNvPr id="25" name="Text 23"/>
-          <p:cNvSpPr txBox="1"/>
-          <p:nvPr/>
-        </p:nvSpPr>
-        <p:spPr>
-          <a:xfrm>
-            <a:off x="7936992" y="3186684"/>
+          <p:cNvPr id="24" name="Text 22"/>
+          <p:cNvSpPr txBox="1"/>
+          <p:nvPr/>
+        </p:nvSpPr>
+        <p:spPr>
+          <a:xfrm>
+            <a:off x="7936992" y="3396996"/>
             <a:ext cx="3017520" cy="274320"/>
           </a:xfrm>
           <a:prstGeom prst="rect">
@@ -7453,7 +7204,7 @@
                 <a:ea typeface="Inter" pitchFamily="34" charset="-122"/>
                 <a:cs typeface="Inter" pitchFamily="34" charset="-120"/>
               </a:rPr>
-              <a:t>Şirket yapısı ve hesap planı</a:t>
+              <a:t>Finans modülleri — FI, CO, PA, PS</a:t>
             </a:r>
             <a:endParaRPr lang="en-US" sz="1000" dirty="0"/>
           </a:p>
@@ -7461,13 +7212,13 @@
       </p:sp>
       <p:sp>
         <p:nvSpPr>
-          <p:cNvPr id="26" name="Shape 24"/>
+          <p:cNvPr id="25" name="Shape 23"/>
           <p:cNvSpPr/>
           <p:nvPr/>
         </p:nvSpPr>
         <p:spPr>
           <a:xfrm>
-            <a:off x="7607808" y="3813048"/>
+            <a:off x="7607808" y="4389120"/>
             <a:ext cx="201168" cy="0"/>
           </a:xfrm>
           <a:prstGeom prst="line">
@@ -7484,13 +7235,13 @@
       </p:sp>
       <p:sp>
         <p:nvSpPr>
-          <p:cNvPr id="27" name="Shape 25"/>
+          <p:cNvPr id="26" name="Shape 24"/>
           <p:cNvSpPr/>
           <p:nvPr/>
         </p:nvSpPr>
         <p:spPr>
           <a:xfrm>
-            <a:off x="7566660" y="3771900"/>
+            <a:off x="7566660" y="4347972"/>
             <a:ext cx="82296" cy="82296"/>
           </a:xfrm>
           <a:prstGeom prst="ellipse">
@@ -7504,13 +7255,13 @@
       </p:sp>
       <p:sp>
         <p:nvSpPr>
-          <p:cNvPr id="28" name="Text 26"/>
-          <p:cNvSpPr txBox="1"/>
-          <p:nvPr/>
-        </p:nvSpPr>
-        <p:spPr>
-          <a:xfrm>
-            <a:off x="7936992" y="3689604"/>
+          <p:cNvPr id="27" name="Text 25"/>
+          <p:cNvSpPr txBox="1"/>
+          <p:nvPr/>
+        </p:nvSpPr>
+        <p:spPr>
+          <a:xfrm>
+            <a:off x="7936992" y="4265676"/>
             <a:ext cx="3017520" cy="274320"/>
           </a:xfrm>
           <a:prstGeom prst="rect">
@@ -7535,7 +7286,7 @@
                 <a:ea typeface="Inter" pitchFamily="34" charset="-122"/>
                 <a:cs typeface="Inter" pitchFamily="34" charset="-120"/>
               </a:rPr>
-              <a:t>Maliyet, kârlılık ve proje muhasebesi</a:t>
+              <a:t>Bulut mimarisi — Private, Public</a:t>
             </a:r>
             <a:endParaRPr lang="en-US" sz="1000" dirty="0"/>
           </a:p>
@@ -7543,13 +7294,13 @@
       </p:sp>
       <p:sp>
         <p:nvSpPr>
-          <p:cNvPr id="29" name="Shape 27"/>
+          <p:cNvPr id="28" name="Shape 26"/>
           <p:cNvSpPr/>
           <p:nvPr/>
         </p:nvSpPr>
         <p:spPr>
           <a:xfrm>
-            <a:off x="7607808" y="4315968"/>
+            <a:off x="7607808" y="5257800"/>
             <a:ext cx="201168" cy="0"/>
           </a:xfrm>
           <a:prstGeom prst="line">
@@ -7566,13 +7317,13 @@
       </p:sp>
       <p:sp>
         <p:nvSpPr>
-          <p:cNvPr id="30" name="Shape 28"/>
+          <p:cNvPr id="29" name="Shape 27"/>
           <p:cNvSpPr/>
           <p:nvPr/>
         </p:nvSpPr>
         <p:spPr>
           <a:xfrm>
-            <a:off x="7566660" y="4274820"/>
+            <a:off x="7566660" y="5216652"/>
             <a:ext cx="82296" cy="82296"/>
           </a:xfrm>
           <a:prstGeom prst="ellipse">
@@ -7586,13 +7337,13 @@
       </p:sp>
       <p:sp>
         <p:nvSpPr>
-          <p:cNvPr id="31" name="Text 29"/>
-          <p:cNvSpPr txBox="1"/>
-          <p:nvPr/>
-        </p:nvSpPr>
-        <p:spPr>
-          <a:xfrm>
-            <a:off x="7936992" y="4192524"/>
+          <p:cNvPr id="30" name="Text 28"/>
+          <p:cNvSpPr txBox="1"/>
+          <p:nvPr/>
+        </p:nvSpPr>
+        <p:spPr>
+          <a:xfrm>
+            <a:off x="7936992" y="5134356"/>
             <a:ext cx="3017520" cy="274320"/>
           </a:xfrm>
           <a:prstGeom prst="rect">
@@ -7617,89 +7368,7 @@
                 <a:ea typeface="Inter" pitchFamily="34" charset="-122"/>
                 <a:cs typeface="Inter" pitchFamily="34" charset="-120"/>
               </a:rPr>
-              <a:t>Kapanış, paralel adımlara ayrılmış</a:t>
-            </a:r>
-            <a:endParaRPr lang="en-US" sz="1000" dirty="0"/>
-          </a:p>
-        </p:txBody>
-      </p:sp>
-      <p:sp>
-        <p:nvSpPr>
-          <p:cNvPr id="32" name="Shape 30"/>
-          <p:cNvSpPr/>
-          <p:nvPr/>
-        </p:nvSpPr>
-        <p:spPr>
-          <a:xfrm>
-            <a:off x="7607808" y="4818888"/>
-            <a:ext cx="201168" cy="0"/>
-          </a:xfrm>
-          <a:prstGeom prst="line">
-            <a:avLst/>
-          </a:prstGeom>
-          <a:noFill/>
-          <a:ln w="12700">
-            <a:solidFill>
-              <a:srgbClr val="11676A"/>
-            </a:solidFill>
-            <a:prstDash val="solid"/>
-          </a:ln>
-        </p:spPr>
-      </p:sp>
-      <p:sp>
-        <p:nvSpPr>
-          <p:cNvPr id="33" name="Shape 31"/>
-          <p:cNvSpPr/>
-          <p:nvPr/>
-        </p:nvSpPr>
-        <p:spPr>
-          <a:xfrm>
-            <a:off x="7566660" y="4777740"/>
-            <a:ext cx="82296" cy="82296"/>
-          </a:xfrm>
-          <a:prstGeom prst="ellipse">
-            <a:avLst/>
-          </a:prstGeom>
-          <a:solidFill>
-            <a:srgbClr val="11676A"/>
-          </a:solidFill>
-          <a:ln/>
-        </p:spPr>
-      </p:sp>
-      <p:sp>
-        <p:nvSpPr>
-          <p:cNvPr id="34" name="Text 32"/>
-          <p:cNvSpPr txBox="1"/>
-          <p:nvPr/>
-        </p:nvSpPr>
-        <p:spPr>
-          <a:xfrm>
-            <a:off x="7936992" y="4695444"/>
-            <a:ext cx="3017520" cy="274320"/>
-          </a:xfrm>
-          <a:prstGeom prst="rect">
-            <a:avLst/>
-          </a:prstGeom>
-          <a:noFill/>
-          <a:ln/>
-        </p:spPr>
-        <p:txBody>
-          <a:bodyPr wrap="square" lIns="0" tIns="0" rIns="0" bIns="0" rtlCol="0" anchor="ctr"/>
-          <a:lstStyle/>
-          <a:p>
-            <a:pPr indent="0" marL="0">
-              <a:buNone/>
-            </a:pPr>
-            <a:r>
-              <a:rPr lang="en-US" sz="1000" dirty="0">
-                <a:solidFill>
-                  <a:srgbClr val="0E1620"/>
-                </a:solidFill>
-                <a:latin typeface="Inter" pitchFamily="34" charset="0"/>
-                <a:ea typeface="Inter" pitchFamily="34" charset="-122"/>
-                <a:cs typeface="Inter" pitchFamily="34" charset="-120"/>
-              </a:rPr>
-              <a:t>Bulut modeli, savunulan değil ölçülen</a:t>
+              <a:t>Yapay zeka ve süreç otomasyonu</a:t>
             </a:r>
             <a:endParaRPr lang="en-US" sz="1000" dirty="0"/>
           </a:p>
@@ -7973,8 +7642,8 @@
         </p:nvSpPr>
         <p:spPr>
           <a:xfrm>
-            <a:off x="777240" y="2999232"/>
-            <a:ext cx="5029200" cy="914400"/>
+            <a:off x="777240" y="2788920"/>
+            <a:ext cx="5029200" cy="1051560"/>
           </a:xfrm>
           <a:prstGeom prst="rect">
             <a:avLst/>
@@ -7988,22 +7657,62 @@
           <a:p>
             <a:pPr indent="0" marL="0">
               <a:lnSpc>
-                <a:spcPts val="2100"/>
+                <a:spcPts val="2500"/>
               </a:lnSpc>
               <a:buNone/>
             </a:pPr>
             <a:r>
-              <a:rPr lang="en-US" sz="1300" dirty="0">
-                <a:solidFill>
-                  <a:srgbClr val="D2DDE6"/>
-                </a:solidFill>
-                <a:latin typeface="Inter" pitchFamily="34" charset="0"/>
-                <a:ea typeface="Inter" pitchFamily="34" charset="-122"/>
-                <a:cs typeface="Inter" pitchFamily="34" charset="-120"/>
-              </a:rPr>
-              <a:t>Şirket yapısı. Geçiş yöntemi. Bulut modeli. İlk haftalarda karara bağlanır, on yıl boyunca yaşanır.</a:t>
-            </a:r>
-            <a:endParaRPr lang="en-US" sz="1300" dirty="0"/>
+              <a:rPr lang="en-US" sz="1600" b="1" dirty="0">
+                <a:solidFill>
+                  <a:srgbClr val="FFFFFF"/>
+                </a:solidFill>
+                <a:latin typeface="Schibsted Grotesk" pitchFamily="34" charset="0"/>
+                <a:ea typeface="Schibsted Grotesk" pitchFamily="34" charset="-122"/>
+                <a:cs typeface="Schibsted Grotesk" pitchFamily="34" charset="-120"/>
+              </a:rPr>
+              <a:t>Şirket yapısı.</a:t>
+            </a:r>
+            <a:endParaRPr lang="en-US" sz="1600" dirty="0"/>
+          </a:p>
+          <a:p>
+            <a:pPr indent="0" marL="0">
+              <a:lnSpc>
+                <a:spcPts val="2500"/>
+              </a:lnSpc>
+              <a:buNone/>
+            </a:pPr>
+            <a:r>
+              <a:rPr lang="en-US" sz="1600" b="1" dirty="0">
+                <a:solidFill>
+                  <a:srgbClr val="FFFFFF"/>
+                </a:solidFill>
+                <a:latin typeface="Schibsted Grotesk" pitchFamily="34" charset="0"/>
+                <a:ea typeface="Schibsted Grotesk" pitchFamily="34" charset="-122"/>
+                <a:cs typeface="Schibsted Grotesk" pitchFamily="34" charset="-120"/>
+              </a:rPr>
+              <a:t>Geçiş yöntemi.</a:t>
+            </a:r>
+            <a:endParaRPr lang="en-US" sz="1600" dirty="0"/>
+          </a:p>
+          <a:p>
+            <a:pPr indent="0" marL="0">
+              <a:lnSpc>
+                <a:spcPts val="2500"/>
+              </a:lnSpc>
+              <a:buNone/>
+            </a:pPr>
+            <a:r>
+              <a:rPr lang="en-US" sz="1600" b="1" dirty="0">
+                <a:solidFill>
+                  <a:srgbClr val="FFFFFF"/>
+                </a:solidFill>
+                <a:latin typeface="Schibsted Grotesk" pitchFamily="34" charset="0"/>
+                <a:ea typeface="Schibsted Grotesk" pitchFamily="34" charset="-122"/>
+                <a:cs typeface="Schibsted Grotesk" pitchFamily="34" charset="-120"/>
+              </a:rPr>
+              <a:t>Bulut modeli.</a:t>
+            </a:r>
+            <a:endParaRPr lang="en-US" sz="1600" dirty="0"/>
           </a:p>
         </p:txBody>
       </p:sp>
@@ -8015,7 +7724,7 @@
         </p:nvSpPr>
         <p:spPr>
           <a:xfrm>
-            <a:off x="777240" y="3950208"/>
+            <a:off x="777240" y="4133088"/>
             <a:ext cx="0" cy="1051560"/>
           </a:xfrm>
           <a:prstGeom prst="line">
@@ -8038,7 +7747,7 @@
         </p:nvSpPr>
         <p:spPr>
           <a:xfrm>
-            <a:off x="1033272" y="3950208"/>
+            <a:off x="1033272" y="4133088"/>
             <a:ext cx="4754880" cy="1051560"/>
           </a:xfrm>
           <a:prstGeom prst="rect">
@@ -8715,52 +8424,13 @@
       </p:sp>
       <p:sp>
         <p:nvSpPr>
-          <p:cNvPr id="7" name="Text 5"/>
-          <p:cNvSpPr txBox="1"/>
-          <p:nvPr/>
-        </p:nvSpPr>
-        <p:spPr>
-          <a:xfrm>
-            <a:off x="777240" y="2157984"/>
-            <a:ext cx="9692640" cy="292608"/>
-          </a:xfrm>
-          <a:prstGeom prst="rect">
-            <a:avLst/>
-          </a:prstGeom>
-          <a:noFill/>
-          <a:ln/>
-        </p:spPr>
-        <p:txBody>
-          <a:bodyPr wrap="square" lIns="0" tIns="0" rIns="0" bIns="0" rtlCol="0" anchor="ctr"/>
-          <a:lstStyle/>
-          <a:p>
-            <a:pPr indent="0" marL="0">
-              <a:buNone/>
-            </a:pPr>
-            <a:r>
-              <a:rPr lang="en-US" sz="1250" i="1" dirty="0">
-                <a:solidFill>
-                  <a:srgbClr val="4A5A67"/>
-                </a:solidFill>
-                <a:latin typeface="Inter" pitchFamily="34" charset="0"/>
-                <a:ea typeface="Inter" pitchFamily="34" charset="-122"/>
-                <a:cs typeface="Inter" pitchFamily="34" charset="-120"/>
-              </a:rPr>
-              <a:t>SAP sorunlarının çoğu bu üçünün arasındaki dikişlerde durur.</a:t>
-            </a:r>
-            <a:endParaRPr lang="en-US" sz="1250" dirty="0"/>
-          </a:p>
-        </p:txBody>
-      </p:sp>
-      <p:sp>
-        <p:nvSpPr>
-          <p:cNvPr id="8" name="Shape 6"/>
+          <p:cNvPr id="7" name="Shape 5"/>
           <p:cNvSpPr/>
           <p:nvPr/>
         </p:nvSpPr>
         <p:spPr>
           <a:xfrm>
-            <a:off x="777240" y="2670048"/>
+            <a:off x="777240" y="2331720"/>
             <a:ext cx="137160" cy="137160"/>
           </a:xfrm>
           <a:prstGeom prst="ellipse">
@@ -8774,13 +8444,13 @@
       </p:sp>
       <p:sp>
         <p:nvSpPr>
-          <p:cNvPr id="9" name="Text 7"/>
-          <p:cNvSpPr txBox="1"/>
-          <p:nvPr/>
-        </p:nvSpPr>
-        <p:spPr>
-          <a:xfrm>
-            <a:off x="1069848" y="2624328"/>
+          <p:cNvPr id="8" name="Text 6"/>
+          <p:cNvSpPr txBox="1"/>
+          <p:nvPr/>
+        </p:nvSpPr>
+        <p:spPr>
+          <a:xfrm>
+            <a:off x="1069848" y="2286000"/>
             <a:ext cx="2834640" cy="237744"/>
           </a:xfrm>
           <a:prstGeom prst="rect">
@@ -8813,13 +8483,13 @@
       </p:sp>
       <p:sp>
         <p:nvSpPr>
-          <p:cNvPr id="10" name="Text 8"/>
-          <p:cNvSpPr txBox="1"/>
-          <p:nvPr/>
-        </p:nvSpPr>
-        <p:spPr>
-          <a:xfrm>
-            <a:off x="777240" y="3054096"/>
+          <p:cNvPr id="9" name="Text 7"/>
+          <p:cNvSpPr txBox="1"/>
+          <p:nvPr/>
+        </p:nvSpPr>
+        <p:spPr>
+          <a:xfrm>
+            <a:off x="777240" y="2715768"/>
             <a:ext cx="3127248" cy="603504"/>
           </a:xfrm>
           <a:prstGeom prst="rect">
@@ -8855,14 +8525,14 @@
       </p:sp>
       <p:sp>
         <p:nvSpPr>
-          <p:cNvPr id="11" name="Text 9"/>
-          <p:cNvSpPr txBox="1"/>
-          <p:nvPr/>
-        </p:nvSpPr>
-        <p:spPr>
-          <a:xfrm>
-            <a:off x="777240" y="3767328"/>
-            <a:ext cx="2990088" cy="868680"/>
+          <p:cNvPr id="10" name="Text 8"/>
+          <p:cNvSpPr txBox="1"/>
+          <p:nvPr/>
+        </p:nvSpPr>
+        <p:spPr>
+          <a:xfrm>
+            <a:off x="777240" y="3429000"/>
+            <a:ext cx="2990088" cy="566928"/>
           </a:xfrm>
           <a:prstGeom prst="rect">
             <a:avLst/>
@@ -8881,29 +8551,29 @@
               <a:buNone/>
             </a:pPr>
             <a:r>
-              <a:rPr lang="en-US" sz="1100" dirty="0">
-                <a:solidFill>
-                  <a:srgbClr val="4A5A67"/>
-                </a:solidFill>
-                <a:latin typeface="Inter" pitchFamily="34" charset="0"/>
-                <a:ea typeface="Inter" pitchFamily="34" charset="-122"/>
-                <a:cs typeface="Inter" pitchFamily="34" charset="-120"/>
-              </a:rPr>
-              <a:t>FI, CO, PA ve PS — yapı, maliyet, marj, kapanış.</a:t>
-            </a:r>
-            <a:endParaRPr lang="en-US" sz="1100" dirty="0"/>
-          </a:p>
-        </p:txBody>
-      </p:sp>
-      <p:sp>
-        <p:nvSpPr>
-          <p:cNvPr id="12" name="Shape 10"/>
+              <a:rPr lang="en-US" sz="1050" dirty="0">
+                <a:solidFill>
+                  <a:srgbClr val="11676A"/>
+                </a:solidFill>
+                <a:latin typeface="IBM Plex Mono" pitchFamily="34" charset="0"/>
+                <a:ea typeface="IBM Plex Mono" pitchFamily="34" charset="-122"/>
+                <a:cs typeface="IBM Plex Mono" pitchFamily="34" charset="-120"/>
+              </a:rPr>
+              <a:t>FI · CO · PA · PS</a:t>
+            </a:r>
+            <a:endParaRPr lang="en-US" sz="1050" dirty="0"/>
+          </a:p>
+        </p:txBody>
+      </p:sp>
+      <p:sp>
+        <p:nvSpPr>
+          <p:cNvPr id="11" name="Shape 9"/>
           <p:cNvSpPr/>
           <p:nvPr/>
         </p:nvSpPr>
         <p:spPr>
           <a:xfrm>
-            <a:off x="845820" y="4809744"/>
+            <a:off x="845820" y="4471416"/>
             <a:ext cx="0" cy="274320"/>
           </a:xfrm>
           <a:prstGeom prst="line">
@@ -8920,13 +8590,13 @@
       </p:sp>
       <p:sp>
         <p:nvSpPr>
-          <p:cNvPr id="13" name="Shape 11"/>
+          <p:cNvPr id="12" name="Shape 10"/>
           <p:cNvSpPr/>
           <p:nvPr/>
         </p:nvSpPr>
         <p:spPr>
           <a:xfrm>
-            <a:off x="4526280" y="2670048"/>
+            <a:off x="4526280" y="2331720"/>
             <a:ext cx="137160" cy="137160"/>
           </a:xfrm>
           <a:prstGeom prst="ellipse">
@@ -8940,13 +8610,13 @@
       </p:sp>
       <p:sp>
         <p:nvSpPr>
-          <p:cNvPr id="14" name="Text 12"/>
-          <p:cNvSpPr txBox="1"/>
-          <p:nvPr/>
-        </p:nvSpPr>
-        <p:spPr>
-          <a:xfrm>
-            <a:off x="4818888" y="2624328"/>
+          <p:cNvPr id="13" name="Text 11"/>
+          <p:cNvSpPr txBox="1"/>
+          <p:nvPr/>
+        </p:nvSpPr>
+        <p:spPr>
+          <a:xfrm>
+            <a:off x="4818888" y="2286000"/>
             <a:ext cx="2834640" cy="237744"/>
           </a:xfrm>
           <a:prstGeom prst="rect">
@@ -8979,13 +8649,13 @@
       </p:sp>
       <p:sp>
         <p:nvSpPr>
-          <p:cNvPr id="15" name="Text 13"/>
-          <p:cNvSpPr txBox="1"/>
-          <p:nvPr/>
-        </p:nvSpPr>
-        <p:spPr>
-          <a:xfrm>
-            <a:off x="4526280" y="3054096"/>
+          <p:cNvPr id="14" name="Text 12"/>
+          <p:cNvSpPr txBox="1"/>
+          <p:nvPr/>
+        </p:nvSpPr>
+        <p:spPr>
+          <a:xfrm>
+            <a:off x="4526280" y="2715768"/>
             <a:ext cx="3127248" cy="603504"/>
           </a:xfrm>
           <a:prstGeom prst="rect">
@@ -9013,7 +8683,7 @@
                 <a:ea typeface="Schibsted Grotesk" pitchFamily="34" charset="-122"/>
                 <a:cs typeface="Schibsted Grotesk" pitchFamily="34" charset="-120"/>
               </a:rPr>
-              <a:t>Üzerinde koşmak zorunda olduğu zemin</a:t>
+              <a:t>Üzerinde koştuğu zemin</a:t>
             </a:r>
             <a:endParaRPr lang="en-US" sz="1500" dirty="0"/>
           </a:p>
@@ -9021,14 +8691,14 @@
       </p:sp>
       <p:sp>
         <p:nvSpPr>
-          <p:cNvPr id="16" name="Text 14"/>
-          <p:cNvSpPr txBox="1"/>
-          <p:nvPr/>
-        </p:nvSpPr>
-        <p:spPr>
-          <a:xfrm>
-            <a:off x="4526280" y="3767328"/>
-            <a:ext cx="2990088" cy="868680"/>
+          <p:cNvPr id="15" name="Text 13"/>
+          <p:cNvSpPr txBox="1"/>
+          <p:nvPr/>
+        </p:nvSpPr>
+        <p:spPr>
+          <a:xfrm>
+            <a:off x="4526280" y="3429000"/>
+            <a:ext cx="2990088" cy="566928"/>
           </a:xfrm>
           <a:prstGeom prst="rect">
             <a:avLst/>
@@ -9047,29 +8717,29 @@
               <a:buNone/>
             </a:pPr>
             <a:r>
-              <a:rPr lang="en-US" sz="1100" dirty="0">
-                <a:solidFill>
-                  <a:srgbClr val="4A5A67"/>
-                </a:solidFill>
-                <a:latin typeface="Inter" pitchFamily="34" charset="0"/>
-                <a:ea typeface="Inter" pitchFamily="34" charset="-122"/>
-                <a:cs typeface="Inter" pitchFamily="34" charset="-120"/>
-              </a:rPr>
-              <a:t>ECC, S/4HANA, Private ve Public Cloud — savunulan değil, karşılaştırılan.</a:t>
-            </a:r>
-            <a:endParaRPr lang="en-US" sz="1100" dirty="0"/>
-          </a:p>
-        </p:txBody>
-      </p:sp>
-      <p:sp>
-        <p:nvSpPr>
-          <p:cNvPr id="17" name="Shape 15"/>
+              <a:rPr lang="en-US" sz="1050" dirty="0">
+                <a:solidFill>
+                  <a:srgbClr val="11676A"/>
+                </a:solidFill>
+                <a:latin typeface="IBM Plex Mono" pitchFamily="34" charset="0"/>
+                <a:ea typeface="IBM Plex Mono" pitchFamily="34" charset="-122"/>
+                <a:cs typeface="IBM Plex Mono" pitchFamily="34" charset="-120"/>
+              </a:rPr>
+              <a:t>ECC · S/4HANA · Private ve Public Cloud</a:t>
+            </a:r>
+            <a:endParaRPr lang="en-US" sz="1050" dirty="0"/>
+          </a:p>
+        </p:txBody>
+      </p:sp>
+      <p:sp>
+        <p:nvSpPr>
+          <p:cNvPr id="16" name="Shape 14"/>
           <p:cNvSpPr/>
           <p:nvPr/>
         </p:nvSpPr>
         <p:spPr>
           <a:xfrm>
-            <a:off x="4594860" y="4809744"/>
+            <a:off x="4594860" y="4471416"/>
             <a:ext cx="0" cy="274320"/>
           </a:xfrm>
           <a:prstGeom prst="line">
@@ -9086,13 +8756,13 @@
       </p:sp>
       <p:sp>
         <p:nvSpPr>
-          <p:cNvPr id="18" name="Shape 16"/>
+          <p:cNvPr id="17" name="Shape 15"/>
           <p:cNvSpPr/>
           <p:nvPr/>
         </p:nvSpPr>
         <p:spPr>
           <a:xfrm>
-            <a:off x="8275320" y="2670048"/>
+            <a:off x="8275320" y="2331720"/>
             <a:ext cx="137160" cy="137160"/>
           </a:xfrm>
           <a:prstGeom prst="ellipse">
@@ -9106,13 +8776,13 @@
       </p:sp>
       <p:sp>
         <p:nvSpPr>
-          <p:cNvPr id="19" name="Text 17"/>
-          <p:cNvSpPr txBox="1"/>
-          <p:nvPr/>
-        </p:nvSpPr>
-        <p:spPr>
-          <a:xfrm>
-            <a:off x="8567928" y="2624328"/>
+          <p:cNvPr id="18" name="Text 16"/>
+          <p:cNvSpPr txBox="1"/>
+          <p:nvPr/>
+        </p:nvSpPr>
+        <p:spPr>
+          <a:xfrm>
+            <a:off x="8567928" y="2286000"/>
             <a:ext cx="2834640" cy="237744"/>
           </a:xfrm>
           <a:prstGeom prst="rect">
@@ -9145,13 +8815,13 @@
       </p:sp>
       <p:sp>
         <p:nvSpPr>
-          <p:cNvPr id="20" name="Text 18"/>
-          <p:cNvSpPr txBox="1"/>
-          <p:nvPr/>
-        </p:nvSpPr>
-        <p:spPr>
-          <a:xfrm>
-            <a:off x="8275320" y="3054096"/>
+          <p:cNvPr id="19" name="Text 17"/>
+          <p:cNvSpPr txBox="1"/>
+          <p:nvPr/>
+        </p:nvSpPr>
+        <p:spPr>
+          <a:xfrm>
+            <a:off x="8275320" y="2715768"/>
             <a:ext cx="3127248" cy="603504"/>
           </a:xfrm>
           <a:prstGeom prst="rect">
@@ -9179,7 +8849,7 @@
                 <a:ea typeface="Schibsted Grotesk" pitchFamily="34" charset="-122"/>
                 <a:cs typeface="Schibsted Grotesk" pitchFamily="34" charset="-120"/>
               </a:rPr>
-              <a:t>Elle yapılmaktan çıkabilecek işler</a:t>
+              <a:t>Elden çıkabilecek işler</a:t>
             </a:r>
             <a:endParaRPr lang="en-US" sz="1500" dirty="0"/>
           </a:p>
@@ -9187,14 +8857,14 @@
       </p:sp>
       <p:sp>
         <p:nvSpPr>
-          <p:cNvPr id="21" name="Text 19"/>
-          <p:cNvSpPr txBox="1"/>
-          <p:nvPr/>
-        </p:nvSpPr>
-        <p:spPr>
-          <a:xfrm>
-            <a:off x="8275320" y="3767328"/>
-            <a:ext cx="2990088" cy="868680"/>
+          <p:cNvPr id="20" name="Text 18"/>
+          <p:cNvSpPr txBox="1"/>
+          <p:nvPr/>
+        </p:nvSpPr>
+        <p:spPr>
+          <a:xfrm>
+            <a:off x="8275320" y="3429000"/>
+            <a:ext cx="2990088" cy="566928"/>
           </a:xfrm>
           <a:prstGeom prst="rect">
             <a:avLst/>
@@ -9213,29 +8883,29 @@
               <a:buNone/>
             </a:pPr>
             <a:r>
-              <a:rPr lang="en-US" sz="1100" dirty="0">
-                <a:solidFill>
-                  <a:srgbClr val="4A5A67"/>
-                </a:solidFill>
-                <a:latin typeface="Inter" pitchFamily="34" charset="0"/>
-                <a:ea typeface="Inter" pitchFamily="34" charset="-122"/>
-                <a:cs typeface="Inter" pitchFamily="34" charset="-120"/>
-              </a:rPr>
-              <a:t>Mutabakat, anomali tespiti, tahmine dayalı muhasebe — açmadan önce ölçülen.</a:t>
-            </a:r>
-            <a:endParaRPr lang="en-US" sz="1100" dirty="0"/>
-          </a:p>
-        </p:txBody>
-      </p:sp>
-      <p:sp>
-        <p:nvSpPr>
-          <p:cNvPr id="22" name="Shape 20"/>
+              <a:rPr lang="en-US" sz="1050" dirty="0">
+                <a:solidFill>
+                  <a:srgbClr val="11676A"/>
+                </a:solidFill>
+                <a:latin typeface="IBM Plex Mono" pitchFamily="34" charset="0"/>
+                <a:ea typeface="IBM Plex Mono" pitchFamily="34" charset="-122"/>
+                <a:cs typeface="IBM Plex Mono" pitchFamily="34" charset="-120"/>
+              </a:rPr>
+              <a:t>Mutabakat · Anomali tespiti · Tahmin</a:t>
+            </a:r>
+            <a:endParaRPr lang="en-US" sz="1050" dirty="0"/>
+          </a:p>
+        </p:txBody>
+      </p:sp>
+      <p:sp>
+        <p:nvSpPr>
+          <p:cNvPr id="21" name="Shape 19"/>
           <p:cNvSpPr/>
           <p:nvPr/>
         </p:nvSpPr>
         <p:spPr>
           <a:xfrm>
-            <a:off x="8343900" y="4809744"/>
+            <a:off x="8343900" y="4471416"/>
             <a:ext cx="0" cy="274320"/>
           </a:xfrm>
           <a:prstGeom prst="line">
@@ -9252,13 +8922,13 @@
       </p:sp>
       <p:sp>
         <p:nvSpPr>
-          <p:cNvPr id="23" name="Shape 21"/>
+          <p:cNvPr id="22" name="Shape 20"/>
           <p:cNvSpPr/>
           <p:nvPr/>
         </p:nvSpPr>
         <p:spPr>
           <a:xfrm>
-            <a:off x="845820" y="5084064"/>
+            <a:off x="845820" y="4745736"/>
             <a:ext cx="7498080" cy="0"/>
           </a:xfrm>
           <a:prstGeom prst="line">
@@ -9275,13 +8945,13 @@
       </p:sp>
       <p:sp>
         <p:nvSpPr>
-          <p:cNvPr id="24" name="Shape 22"/>
+          <p:cNvPr id="23" name="Shape 21"/>
           <p:cNvSpPr/>
           <p:nvPr/>
         </p:nvSpPr>
         <p:spPr>
           <a:xfrm>
-            <a:off x="6095848" y="5084064"/>
+            <a:off x="6095848" y="4745736"/>
             <a:ext cx="0" cy="274320"/>
           </a:xfrm>
           <a:prstGeom prst="line">
@@ -9298,13 +8968,13 @@
       </p:sp>
       <p:sp>
         <p:nvSpPr>
-          <p:cNvPr id="25" name="Shape 23"/>
+          <p:cNvPr id="24" name="Shape 22"/>
           <p:cNvSpPr/>
           <p:nvPr/>
         </p:nvSpPr>
         <p:spPr>
           <a:xfrm>
-            <a:off x="3215488" y="5358384"/>
+            <a:off x="3215488" y="5020056"/>
             <a:ext cx="5760720" cy="566928"/>
           </a:xfrm>
           <a:prstGeom prst="rect">
@@ -9318,13 +8988,13 @@
       </p:sp>
       <p:sp>
         <p:nvSpPr>
-          <p:cNvPr id="26" name="Text 24"/>
-          <p:cNvSpPr txBox="1"/>
-          <p:nvPr/>
-        </p:nvSpPr>
-        <p:spPr>
-          <a:xfrm>
-            <a:off x="3215488" y="5358384"/>
+          <p:cNvPr id="25" name="Text 23"/>
+          <p:cNvSpPr txBox="1"/>
+          <p:nvPr/>
+        </p:nvSpPr>
+        <p:spPr>
+          <a:xfrm>
+            <a:off x="3215488" y="5020056"/>
             <a:ext cx="5760720" cy="566928"/>
           </a:xfrm>
           <a:prstGeom prst="rect">
@@ -9577,7 +9247,7 @@
         </p:nvSpPr>
         <p:spPr>
           <a:xfrm>
-            <a:off x="777240" y="2359152"/>
+            <a:off x="777240" y="2862072"/>
             <a:ext cx="5852160" cy="219456"/>
           </a:xfrm>
           <a:prstGeom prst="rect">
@@ -9616,7 +9286,7 @@
         </p:nvSpPr>
         <p:spPr>
           <a:xfrm>
-            <a:off x="777240" y="2743200"/>
+            <a:off x="777240" y="3246120"/>
             <a:ext cx="5852160" cy="0"/>
           </a:xfrm>
           <a:prstGeom prst="line">
@@ -9639,7 +9309,7 @@
         </p:nvSpPr>
         <p:spPr>
           <a:xfrm>
-            <a:off x="731520" y="2697480"/>
+            <a:off x="731520" y="3200400"/>
             <a:ext cx="91440" cy="91440"/>
           </a:xfrm>
           <a:prstGeom prst="ellipse">
@@ -9659,7 +9329,7 @@
         </p:nvSpPr>
         <p:spPr>
           <a:xfrm>
-            <a:off x="2194560" y="2697480"/>
+            <a:off x="2194560" y="3200400"/>
             <a:ext cx="91440" cy="91440"/>
           </a:xfrm>
           <a:prstGeom prst="ellipse">
@@ -9679,7 +9349,7 @@
         </p:nvSpPr>
         <p:spPr>
           <a:xfrm>
-            <a:off x="3657600" y="2697480"/>
+            <a:off x="3657600" y="3200400"/>
             <a:ext cx="91440" cy="91440"/>
           </a:xfrm>
           <a:prstGeom prst="ellipse">
@@ -9699,7 +9369,7 @@
         </p:nvSpPr>
         <p:spPr>
           <a:xfrm>
-            <a:off x="5120640" y="2697480"/>
+            <a:off x="5120640" y="3200400"/>
             <a:ext cx="91440" cy="91440"/>
           </a:xfrm>
           <a:prstGeom prst="ellipse">
@@ -9719,7 +9389,7 @@
         </p:nvSpPr>
         <p:spPr>
           <a:xfrm>
-            <a:off x="6583680" y="2697480"/>
+            <a:off x="6583680" y="3200400"/>
             <a:ext cx="91440" cy="91440"/>
           </a:xfrm>
           <a:prstGeom prst="ellipse">
@@ -9739,7 +9409,7 @@
         </p:nvSpPr>
         <p:spPr>
           <a:xfrm>
-            <a:off x="777240" y="2743200"/>
+            <a:off x="777240" y="3246120"/>
             <a:ext cx="936346" cy="384048"/>
           </a:xfrm>
           <a:prstGeom prst="line">
@@ -9762,7 +9432,7 @@
         </p:nvSpPr>
         <p:spPr>
           <a:xfrm flipV="1">
-            <a:off x="1713586" y="2962656"/>
+            <a:off x="1713586" y="3465576"/>
             <a:ext cx="819302" cy="164592"/>
           </a:xfrm>
           <a:prstGeom prst="line">
@@ -9785,7 +9455,7 @@
         </p:nvSpPr>
         <p:spPr>
           <a:xfrm>
-            <a:off x="2532888" y="2962656"/>
+            <a:off x="2532888" y="3465576"/>
             <a:ext cx="877824" cy="566928"/>
           </a:xfrm>
           <a:prstGeom prst="line">
@@ -9808,7 +9478,7 @@
         </p:nvSpPr>
         <p:spPr>
           <a:xfrm flipV="1">
-            <a:off x="3410712" y="3310128"/>
+            <a:off x="3410712" y="3813048"/>
             <a:ext cx="877824" cy="219456"/>
           </a:xfrm>
           <a:prstGeom prst="line">
@@ -9831,7 +9501,7 @@
         </p:nvSpPr>
         <p:spPr>
           <a:xfrm>
-            <a:off x="4288536" y="3310128"/>
+            <a:off x="4288536" y="3813048"/>
             <a:ext cx="936346" cy="512064"/>
           </a:xfrm>
           <a:prstGeom prst="line">
@@ -9854,7 +9524,7 @@
         </p:nvSpPr>
         <p:spPr>
           <a:xfrm flipV="1">
-            <a:off x="5224882" y="3621024"/>
+            <a:off x="5224882" y="4123944"/>
             <a:ext cx="702259" cy="201168"/>
           </a:xfrm>
           <a:prstGeom prst="line">
@@ -9877,7 +9547,7 @@
         </p:nvSpPr>
         <p:spPr>
           <a:xfrm>
-            <a:off x="5927141" y="3621024"/>
+            <a:off x="5927141" y="4123944"/>
             <a:ext cx="702259" cy="347472"/>
           </a:xfrm>
           <a:prstGeom prst="line">
@@ -9900,7 +9570,7 @@
         </p:nvSpPr>
         <p:spPr>
           <a:xfrm>
-            <a:off x="731520" y="2697480"/>
+            <a:off x="731520" y="3200400"/>
             <a:ext cx="91440" cy="91440"/>
           </a:xfrm>
           <a:prstGeom prst="ellipse">
@@ -9920,7 +9590,7 @@
         </p:nvSpPr>
         <p:spPr>
           <a:xfrm>
-            <a:off x="1667866" y="3081528"/>
+            <a:off x="1667866" y="3584448"/>
             <a:ext cx="91440" cy="91440"/>
           </a:xfrm>
           <a:prstGeom prst="ellipse">
@@ -9940,7 +9610,7 @@
         </p:nvSpPr>
         <p:spPr>
           <a:xfrm>
-            <a:off x="2487168" y="2916936"/>
+            <a:off x="2487168" y="3419856"/>
             <a:ext cx="91440" cy="91440"/>
           </a:xfrm>
           <a:prstGeom prst="ellipse">
@@ -9960,7 +9630,7 @@
         </p:nvSpPr>
         <p:spPr>
           <a:xfrm>
-            <a:off x="3364992" y="3483864"/>
+            <a:off x="3364992" y="3986784"/>
             <a:ext cx="91440" cy="91440"/>
           </a:xfrm>
           <a:prstGeom prst="ellipse">
@@ -9980,7 +9650,7 @@
         </p:nvSpPr>
         <p:spPr>
           <a:xfrm>
-            <a:off x="4242816" y="3264408"/>
+            <a:off x="4242816" y="3767328"/>
             <a:ext cx="91440" cy="91440"/>
           </a:xfrm>
           <a:prstGeom prst="ellipse">
@@ -10000,7 +9670,7 @@
         </p:nvSpPr>
         <p:spPr>
           <a:xfrm>
-            <a:off x="5179162" y="3776472"/>
+            <a:off x="5179162" y="4279392"/>
             <a:ext cx="91440" cy="91440"/>
           </a:xfrm>
           <a:prstGeom prst="ellipse">
@@ -10020,7 +9690,7 @@
         </p:nvSpPr>
         <p:spPr>
           <a:xfrm>
-            <a:off x="5881421" y="3575304"/>
+            <a:off x="5881421" y="4078224"/>
             <a:ext cx="91440" cy="91440"/>
           </a:xfrm>
           <a:prstGeom prst="ellipse">
@@ -10040,7 +9710,7 @@
         </p:nvSpPr>
         <p:spPr>
           <a:xfrm>
-            <a:off x="6583680" y="3922776"/>
+            <a:off x="6583680" y="4425696"/>
             <a:ext cx="91440" cy="91440"/>
           </a:xfrm>
           <a:prstGeom prst="ellipse">
@@ -10060,7 +9730,7 @@
         </p:nvSpPr>
         <p:spPr>
           <a:xfrm>
-            <a:off x="3886200" y="4114800"/>
+            <a:off x="3886200" y="4617720"/>
             <a:ext cx="2743200" cy="219456"/>
           </a:xfrm>
           <a:prstGeom prst="rect">
@@ -10099,7 +9769,7 @@
         </p:nvSpPr>
         <p:spPr>
           <a:xfrm>
-            <a:off x="3410712" y="2743200"/>
+            <a:off x="3410712" y="3246120"/>
             <a:ext cx="0" cy="786384"/>
           </a:xfrm>
           <a:prstGeom prst="line">
@@ -10122,7 +9792,7 @@
         </p:nvSpPr>
         <p:spPr>
           <a:xfrm>
-            <a:off x="3369564" y="3488436"/>
+            <a:off x="3369564" y="3991356"/>
             <a:ext cx="82296" cy="82296"/>
           </a:xfrm>
           <a:prstGeom prst="ellipse">
@@ -10142,7 +9812,7 @@
         </p:nvSpPr>
         <p:spPr>
           <a:xfrm>
-            <a:off x="3557016" y="2871216"/>
+            <a:off x="3557016" y="3374136"/>
             <a:ext cx="2103120" cy="420624"/>
           </a:xfrm>
           <a:prstGeom prst="rect">
@@ -10204,7 +9874,7 @@
         </p:nvSpPr>
         <p:spPr>
           <a:xfrm>
-            <a:off x="7360920" y="2395728"/>
+            <a:off x="7360920" y="2880360"/>
             <a:ext cx="4023360" cy="868680"/>
           </a:xfrm>
           <a:prstGeom prst="rect">
@@ -10240,55 +9910,13 @@
       </p:sp>
       <p:sp>
         <p:nvSpPr>
-          <p:cNvPr id="34" name="Text 32"/>
-          <p:cNvSpPr txBox="1"/>
-          <p:nvPr/>
-        </p:nvSpPr>
-        <p:spPr>
-          <a:xfrm>
-            <a:off x="7360920" y="3401568"/>
-            <a:ext cx="4023360" cy="1097280"/>
-          </a:xfrm>
-          <a:prstGeom prst="rect">
-            <a:avLst/>
-          </a:prstGeom>
-          <a:noFill/>
-          <a:ln/>
-        </p:spPr>
-        <p:txBody>
-          <a:bodyPr wrap="square" lIns="0" tIns="0" rIns="0" bIns="0" rtlCol="0" anchor="t"/>
-          <a:lstStyle/>
-          <a:p>
-            <a:pPr indent="0" marL="0">
-              <a:lnSpc>
-                <a:spcPts val="1850"/>
-              </a:lnSpc>
-              <a:buNone/>
-            </a:pPr>
-            <a:r>
-              <a:rPr lang="en-US" sz="1150" dirty="0">
-                <a:solidFill>
-                  <a:srgbClr val="4A5A67"/>
-                </a:solidFill>
-                <a:latin typeface="Inter" pitchFamily="34" charset="0"/>
-                <a:ea typeface="Inter" pitchFamily="34" charset="-122"/>
-                <a:cs typeface="Inter" pitchFamily="34" charset="-120"/>
-              </a:rPr>
-              <a:t>Sistemin ne yaptığı — dokümanın ne dediği değil. Aradaki fark, çoğu zaman sorunun kendisidir.</a:t>
-            </a:r>
-            <a:endParaRPr lang="en-US" sz="1150" dirty="0"/>
-          </a:p>
-        </p:txBody>
-      </p:sp>
-      <p:sp>
-        <p:nvSpPr>
-          <p:cNvPr id="35" name="Shape 33"/>
+          <p:cNvPr id="34" name="Shape 32"/>
           <p:cNvSpPr/>
           <p:nvPr/>
         </p:nvSpPr>
         <p:spPr>
           <a:xfrm>
-            <a:off x="7360920" y="4828032"/>
+            <a:off x="7360920" y="4251960"/>
             <a:ext cx="4023360" cy="0"/>
           </a:xfrm>
           <a:prstGeom prst="line">
@@ -10305,13 +9933,13 @@
       </p:sp>
       <p:sp>
         <p:nvSpPr>
-          <p:cNvPr id="36" name="Text 34"/>
-          <p:cNvSpPr txBox="1"/>
-          <p:nvPr/>
-        </p:nvSpPr>
-        <p:spPr>
-          <a:xfrm>
-            <a:off x="7360920" y="4974336"/>
+          <p:cNvPr id="35" name="Text 33"/>
+          <p:cNvSpPr txBox="1"/>
+          <p:nvPr/>
+        </p:nvSpPr>
+        <p:spPr>
+          <a:xfrm>
+            <a:off x="7360920" y="4398264"/>
             <a:ext cx="2926080" cy="457200"/>
           </a:xfrm>
           <a:prstGeom prst="rect">
@@ -10339,7 +9967,7 @@
                 <a:ea typeface="Inter" pitchFamily="34" charset="-122"/>
                 <a:cs typeface="Inter" pitchFamily="34" charset="-120"/>
               </a:rPr>
-              <a:t>Her çalışma bir değerlendirmeyle başlar</a:t>
+              <a:t>Değerlendirme fazı</a:t>
             </a:r>
             <a:endParaRPr lang="en-US" sz="1050" dirty="0"/>
           </a:p>
@@ -10347,13 +9975,13 @@
       </p:sp>
       <p:sp>
         <p:nvSpPr>
-          <p:cNvPr id="37" name="Text 35"/>
-          <p:cNvSpPr txBox="1"/>
-          <p:nvPr/>
-        </p:nvSpPr>
-        <p:spPr>
-          <a:xfrm>
-            <a:off x="10378440" y="4937760"/>
+          <p:cNvPr id="36" name="Text 34"/>
+          <p:cNvSpPr txBox="1"/>
+          <p:nvPr/>
+        </p:nvSpPr>
+        <p:spPr>
+          <a:xfrm>
+            <a:off x="10378440" y="4361688"/>
             <a:ext cx="1005840" cy="566928"/>
           </a:xfrm>
           <a:prstGeom prst="rect">
@@ -10786,7 +10414,27 @@
                 <a:ea typeface="Inter" pitchFamily="34" charset="-122"/>
                 <a:cs typeface="Inter" pitchFamily="34" charset="-120"/>
               </a:rPr>
-              <a:t>Hız ve düşük işletme yükü — değiştiremeyeceğiniz bir çekirdek karşılığında.</a:t>
+              <a:t>Hız ve düşük işletme yükü.</a:t>
+            </a:r>
+            <a:endParaRPr lang="en-US" sz="1150" dirty="0"/>
+          </a:p>
+          <a:p>
+            <a:pPr indent="0" marL="0">
+              <a:lnSpc>
+                <a:spcPts val="1850"/>
+              </a:lnSpc>
+              <a:buNone/>
+            </a:pPr>
+            <a:r>
+              <a:rPr lang="en-US" sz="1150" dirty="0">
+                <a:solidFill>
+                  <a:srgbClr val="D2DDE6"/>
+                </a:solidFill>
+                <a:latin typeface="Inter" pitchFamily="34" charset="0"/>
+                <a:ea typeface="Inter" pitchFamily="34" charset="-122"/>
+                <a:cs typeface="Inter" pitchFamily="34" charset="-120"/>
+              </a:rPr>
+              <a:t>Çekirdek değiştirilemez.</a:t>
             </a:r>
             <a:endParaRPr lang="en-US" sz="1150" dirty="0"/>
           </a:p>
@@ -10839,45 +10487,6 @@
         </p:nvSpPr>
         <p:spPr>
           <a:xfrm>
-            <a:off x="777240" y="4901184"/>
-            <a:ext cx="4297680" cy="219456"/>
-          </a:xfrm>
-          <a:prstGeom prst="rect">
-            <a:avLst/>
-          </a:prstGeom>
-          <a:noFill/>
-          <a:ln/>
-        </p:spPr>
-        <p:txBody>
-          <a:bodyPr wrap="square" lIns="0" tIns="0" rIns="0" bIns="0" rtlCol="0" anchor="ctr"/>
-          <a:lstStyle/>
-          <a:p>
-            <a:pPr indent="0" marL="0">
-              <a:buNone/>
-            </a:pPr>
-            <a:r>
-              <a:rPr lang="en-US" sz="950" i="1" dirty="0">
-                <a:solidFill>
-                  <a:srgbClr val="9DB0C0"/>
-                </a:solidFill>
-                <a:latin typeface="Inter" pitchFamily="34" charset="0"/>
-                <a:ea typeface="Inter" pitchFamily="34" charset="-122"/>
-                <a:cs typeface="Inter" pitchFamily="34" charset="-120"/>
-              </a:rPr>
-              <a:t>tek ülkeli finans kurulumu</a:t>
-            </a:r>
-            <a:endParaRPr lang="en-US" sz="950" dirty="0"/>
-          </a:p>
-        </p:txBody>
-      </p:sp>
-      <p:sp>
-        <p:nvSpPr>
-          <p:cNvPr id="14" name="Text 11"/>
-          <p:cNvSpPr txBox="1"/>
-          <p:nvPr/>
-        </p:nvSpPr>
-        <p:spPr>
-          <a:xfrm>
             <a:off x="7116775" y="2615184"/>
             <a:ext cx="4297680" cy="237744"/>
           </a:xfrm>
@@ -10911,7 +10520,7 @@
       </p:sp>
       <p:sp>
         <p:nvSpPr>
-          <p:cNvPr id="15" name="Shape 12"/>
+          <p:cNvPr id="14" name="Shape 11"/>
           <p:cNvSpPr/>
           <p:nvPr/>
         </p:nvSpPr>
@@ -10936,7 +10545,7 @@
       </p:sp>
       <p:sp>
         <p:nvSpPr>
-          <p:cNvPr id="16" name="Text 13"/>
+          <p:cNvPr id="15" name="Text 12"/>
           <p:cNvSpPr txBox="1"/>
           <p:nvPr/>
         </p:nvSpPr>
@@ -10975,7 +10584,7 @@
       </p:sp>
       <p:sp>
         <p:nvSpPr>
-          <p:cNvPr id="17" name="Text 14"/>
+          <p:cNvPr id="16" name="Text 13"/>
           <p:cNvSpPr txBox="1"/>
           <p:nvPr/>
         </p:nvSpPr>
@@ -11009,15 +10618,35 @@
                 <a:ea typeface="Inter" pitchFamily="34" charset="-122"/>
                 <a:cs typeface="Inter" pitchFamily="34" charset="-120"/>
               </a:rPr>
-              <a:t>Kendi geliştirmeleriniz kalır — daha fazla sorumluluk ve daha uzun kurulum karşılığında.</a:t>
+              <a:t>Kendi geliştirmeleriniz kalır.</a:t>
             </a:r>
             <a:endParaRPr lang="en-US" sz="1150" dirty="0"/>
           </a:p>
-        </p:txBody>
-      </p:sp>
-      <p:sp>
-        <p:nvSpPr>
-          <p:cNvPr id="18" name="Text 15"/>
+          <a:p>
+            <a:pPr indent="0" marL="0">
+              <a:lnSpc>
+                <a:spcPts val="1850"/>
+              </a:lnSpc>
+              <a:buNone/>
+            </a:pPr>
+            <a:r>
+              <a:rPr lang="en-US" sz="1150" dirty="0">
+                <a:solidFill>
+                  <a:srgbClr val="D2DDE6"/>
+                </a:solidFill>
+                <a:latin typeface="Inter" pitchFamily="34" charset="0"/>
+                <a:ea typeface="Inter" pitchFamily="34" charset="-122"/>
+                <a:cs typeface="Inter" pitchFamily="34" charset="-120"/>
+              </a:rPr>
+              <a:t>Daha fazla sorumluluk, daha uzun kurulum.</a:t>
+            </a:r>
+            <a:endParaRPr lang="en-US" sz="1150" dirty="0"/>
+          </a:p>
+        </p:txBody>
+      </p:sp>
+      <p:sp>
+        <p:nvSpPr>
+          <p:cNvPr id="17" name="Text 14"/>
           <p:cNvSpPr txBox="1"/>
           <p:nvPr/>
         </p:nvSpPr>
@@ -11056,46 +10685,7 @@
       </p:sp>
       <p:sp>
         <p:nvSpPr>
-          <p:cNvPr id="19" name="Text 16"/>
-          <p:cNvSpPr txBox="1"/>
-          <p:nvPr/>
-        </p:nvSpPr>
-        <p:spPr>
-          <a:xfrm>
-            <a:off x="7116775" y="4901184"/>
-            <a:ext cx="4297680" cy="219456"/>
-          </a:xfrm>
-          <a:prstGeom prst="rect">
-            <a:avLst/>
-          </a:prstGeom>
-          <a:noFill/>
-          <a:ln/>
-        </p:spPr>
-        <p:txBody>
-          <a:bodyPr wrap="square" lIns="0" tIns="0" rIns="0" bIns="0" rtlCol="0" anchor="ctr"/>
-          <a:lstStyle/>
-          <a:p>
-            <a:pPr indent="0" marL="0">
-              <a:buNone/>
-            </a:pPr>
-            <a:r>
-              <a:rPr lang="en-US" sz="950" i="1" dirty="0">
-                <a:solidFill>
-                  <a:srgbClr val="9DB0C0"/>
-                </a:solidFill>
-                <a:latin typeface="Inter" pitchFamily="34" charset="0"/>
-                <a:ea typeface="Inter" pitchFamily="34" charset="-122"/>
-                <a:cs typeface="Inter" pitchFamily="34" charset="-120"/>
-              </a:rPr>
-              <a:t>kapsama ve devralınan yapıya göre</a:t>
-            </a:r>
-            <a:endParaRPr lang="en-US" sz="950" dirty="0"/>
-          </a:p>
-        </p:txBody>
-      </p:sp>
-      <p:sp>
-        <p:nvSpPr>
-          <p:cNvPr id="20" name="Shape 17"/>
+          <p:cNvPr id="18" name="Shape 15"/>
           <p:cNvSpPr/>
           <p:nvPr/>
         </p:nvSpPr>
@@ -11120,7 +10710,7 @@
       </p:sp>
       <p:sp>
         <p:nvSpPr>
-          <p:cNvPr id="21" name="Text 18"/>
+          <p:cNvPr id="19" name="Text 16"/>
           <p:cNvSpPr txBox="1"/>
           <p:nvPr/>
         </p:nvSpPr>
@@ -11154,7 +10744,7 @@
                 <a:ea typeface="Inter" pitchFamily="34" charset="-122"/>
                 <a:cs typeface="Inter" pitchFamily="34" charset="-120"/>
               </a:rPr>
-              <a:t>Biri diğerinin gelişmiş sürümü değildir. İki modelin kısıtlarını yan yana koyarız; karar sizde kalır.</a:t>
+              <a:t>Biri diğerinin gelişmiş sürümü değildir. Karar sizde kalır.</a:t>
             </a:r>
             <a:endParaRPr lang="en-US" sz="1150" dirty="0"/>
           </a:p>
@@ -11376,55 +10966,13 @@
       </p:sp>
       <p:sp>
         <p:nvSpPr>
-          <p:cNvPr id="7" name="Text 5"/>
-          <p:cNvSpPr txBox="1"/>
-          <p:nvPr/>
-        </p:nvSpPr>
-        <p:spPr>
-          <a:xfrm>
-            <a:off x="7498080" y="1078992"/>
-            <a:ext cx="3886200" cy="1097280"/>
-          </a:xfrm>
-          <a:prstGeom prst="rect">
-            <a:avLst/>
-          </a:prstGeom>
-          <a:noFill/>
-          <a:ln/>
-        </p:spPr>
-        <p:txBody>
-          <a:bodyPr wrap="square" lIns="0" tIns="0" rIns="0" bIns="0" rtlCol="0" anchor="t"/>
-          <a:lstStyle/>
-          <a:p>
-            <a:pPr indent="0" marL="0">
-              <a:lnSpc>
-                <a:spcPts val="1800"/>
-              </a:lnSpc>
-              <a:buNone/>
-            </a:pPr>
-            <a:r>
-              <a:rPr lang="en-US" sz="1150" dirty="0">
-                <a:solidFill>
-                  <a:srgbClr val="4A5A67"/>
-                </a:solidFill>
-                <a:latin typeface="Inter" pitchFamily="34" charset="0"/>
-                <a:ea typeface="Inter" pitchFamily="34" charset="-122"/>
-                <a:cs typeface="Inter" pitchFamily="34" charset="-120"/>
-              </a:rPr>
-              <a:t>Her adımın çıktısı baştan bellidir. Her kapıda devam kararı yeniden verilir.</a:t>
-            </a:r>
-            <a:endParaRPr lang="en-US" sz="1150" dirty="0"/>
-          </a:p>
-        </p:txBody>
-      </p:sp>
-      <p:sp>
-        <p:nvSpPr>
-          <p:cNvPr id="8" name="Shape 6"/>
+          <p:cNvPr id="7" name="Shape 5"/>
           <p:cNvSpPr/>
           <p:nvPr/>
         </p:nvSpPr>
         <p:spPr>
           <a:xfrm>
-            <a:off x="777240" y="2788920"/>
+            <a:off x="777240" y="2971800"/>
             <a:ext cx="10637215" cy="0"/>
           </a:xfrm>
           <a:prstGeom prst="line">
@@ -11441,13 +10989,13 @@
       </p:sp>
       <p:sp>
         <p:nvSpPr>
-          <p:cNvPr id="9" name="Shape 7"/>
+          <p:cNvPr id="8" name="Shape 6"/>
           <p:cNvSpPr/>
           <p:nvPr/>
         </p:nvSpPr>
         <p:spPr>
           <a:xfrm>
-            <a:off x="777240" y="2734056"/>
+            <a:off x="777240" y="2916936"/>
             <a:ext cx="109728" cy="109728"/>
           </a:xfrm>
           <a:prstGeom prst="ellipse">
@@ -11461,13 +11009,13 @@
       </p:sp>
       <p:sp>
         <p:nvSpPr>
-          <p:cNvPr id="10" name="Text 8"/>
-          <p:cNvSpPr txBox="1"/>
-          <p:nvPr/>
-        </p:nvSpPr>
-        <p:spPr>
-          <a:xfrm>
-            <a:off x="777240" y="3008376"/>
+          <p:cNvPr id="9" name="Text 7"/>
+          <p:cNvSpPr txBox="1"/>
+          <p:nvPr/>
+        </p:nvSpPr>
+        <p:spPr>
+          <a:xfrm>
+            <a:off x="777240" y="3191256"/>
             <a:ext cx="2395728" cy="274320"/>
           </a:xfrm>
           <a:prstGeom prst="rect">
@@ -11500,13 +11048,13 @@
       </p:sp>
       <p:sp>
         <p:nvSpPr>
-          <p:cNvPr id="11" name="Text 9"/>
-          <p:cNvSpPr txBox="1"/>
-          <p:nvPr/>
-        </p:nvSpPr>
-        <p:spPr>
-          <a:xfrm>
-            <a:off x="777240" y="3337560"/>
+          <p:cNvPr id="10" name="Text 8"/>
+          <p:cNvSpPr txBox="1"/>
+          <p:nvPr/>
+        </p:nvSpPr>
+        <p:spPr>
+          <a:xfrm>
+            <a:off x="777240" y="3520440"/>
             <a:ext cx="2395728" cy="566928"/>
           </a:xfrm>
           <a:prstGeom prst="rect">
@@ -11542,13 +11090,13 @@
       </p:sp>
       <p:sp>
         <p:nvSpPr>
-          <p:cNvPr id="12" name="Text 10"/>
-          <p:cNvSpPr txBox="1"/>
-          <p:nvPr/>
-        </p:nvSpPr>
-        <p:spPr>
-          <a:xfrm>
-            <a:off x="777240" y="4032504"/>
+          <p:cNvPr id="11" name="Text 9"/>
+          <p:cNvSpPr txBox="1"/>
+          <p:nvPr/>
+        </p:nvSpPr>
+        <p:spPr>
+          <a:xfrm>
+            <a:off x="777240" y="4215384"/>
             <a:ext cx="2286000" cy="868680"/>
           </a:xfrm>
           <a:prstGeom prst="rect">
@@ -11576,7 +11124,7 @@
                 <a:ea typeface="Inter" pitchFamily="34" charset="-122"/>
                 <a:cs typeface="Inter" pitchFamily="34" charset="-120"/>
               </a:rPr>
-              <a:t>Teşhis raporu, sistem verisinden okunmuş</a:t>
+              <a:t>Teşhis raporu</a:t>
             </a:r>
             <a:endParaRPr lang="en-US" sz="1050" dirty="0"/>
           </a:p>
@@ -11584,13 +11132,13 @@
       </p:sp>
       <p:sp>
         <p:nvSpPr>
-          <p:cNvPr id="13" name="Shape 11"/>
+          <p:cNvPr id="12" name="Shape 10"/>
           <p:cNvSpPr/>
           <p:nvPr/>
         </p:nvSpPr>
         <p:spPr>
           <a:xfrm>
-            <a:off x="777240" y="5020056"/>
+            <a:off x="777240" y="4727448"/>
             <a:ext cx="2121408" cy="0"/>
           </a:xfrm>
           <a:prstGeom prst="line">
@@ -11607,13 +11155,13 @@
       </p:sp>
       <p:sp>
         <p:nvSpPr>
-          <p:cNvPr id="14" name="Text 12"/>
-          <p:cNvSpPr txBox="1"/>
-          <p:nvPr/>
-        </p:nvSpPr>
-        <p:spPr>
-          <a:xfrm>
-            <a:off x="777240" y="5129784"/>
+          <p:cNvPr id="13" name="Text 11"/>
+          <p:cNvSpPr txBox="1"/>
+          <p:nvPr/>
+        </p:nvSpPr>
+        <p:spPr>
+          <a:xfrm>
+            <a:off x="777240" y="4837176"/>
             <a:ext cx="2395728" cy="237744"/>
           </a:xfrm>
           <a:prstGeom prst="rect">
@@ -11646,13 +11194,13 @@
       </p:sp>
       <p:sp>
         <p:nvSpPr>
-          <p:cNvPr id="15" name="Shape 13"/>
+          <p:cNvPr id="14" name="Shape 12"/>
           <p:cNvSpPr/>
           <p:nvPr/>
         </p:nvSpPr>
         <p:spPr>
           <a:xfrm>
-            <a:off x="3346704" y="2642616"/>
+            <a:off x="3346704" y="2825496"/>
             <a:ext cx="0" cy="292608"/>
           </a:xfrm>
           <a:prstGeom prst="line">
@@ -11669,13 +11217,13 @@
       </p:sp>
       <p:sp>
         <p:nvSpPr>
-          <p:cNvPr id="16" name="Text 14"/>
-          <p:cNvSpPr txBox="1"/>
-          <p:nvPr/>
-        </p:nvSpPr>
-        <p:spPr>
-          <a:xfrm>
-            <a:off x="2798064" y="2331720"/>
+          <p:cNvPr id="15" name="Text 13"/>
+          <p:cNvSpPr txBox="1"/>
+          <p:nvPr/>
+        </p:nvSpPr>
+        <p:spPr>
+          <a:xfrm>
+            <a:off x="2798064" y="2514600"/>
             <a:ext cx="1097280" cy="201168"/>
           </a:xfrm>
           <a:prstGeom prst="rect">
@@ -11708,13 +11256,13 @@
       </p:sp>
       <p:sp>
         <p:nvSpPr>
-          <p:cNvPr id="17" name="Shape 15"/>
+          <p:cNvPr id="16" name="Shape 14"/>
           <p:cNvSpPr/>
           <p:nvPr/>
         </p:nvSpPr>
         <p:spPr>
           <a:xfrm>
-            <a:off x="3520440" y="2734056"/>
+            <a:off x="3520440" y="2916936"/>
             <a:ext cx="109728" cy="109728"/>
           </a:xfrm>
           <a:prstGeom prst="ellipse">
@@ -11728,13 +11276,13 @@
       </p:sp>
       <p:sp>
         <p:nvSpPr>
-          <p:cNvPr id="18" name="Text 16"/>
-          <p:cNvSpPr txBox="1"/>
-          <p:nvPr/>
-        </p:nvSpPr>
-        <p:spPr>
-          <a:xfrm>
-            <a:off x="3520440" y="3008376"/>
+          <p:cNvPr id="17" name="Text 15"/>
+          <p:cNvSpPr txBox="1"/>
+          <p:nvPr/>
+        </p:nvSpPr>
+        <p:spPr>
+          <a:xfrm>
+            <a:off x="3520440" y="3191256"/>
             <a:ext cx="2395728" cy="274320"/>
           </a:xfrm>
           <a:prstGeom prst="rect">
@@ -11767,13 +11315,13 @@
       </p:sp>
       <p:sp>
         <p:nvSpPr>
-          <p:cNvPr id="19" name="Text 17"/>
-          <p:cNvSpPr txBox="1"/>
-          <p:nvPr/>
-        </p:nvSpPr>
-        <p:spPr>
-          <a:xfrm>
-            <a:off x="3520440" y="3337560"/>
+          <p:cNvPr id="18" name="Text 16"/>
+          <p:cNvSpPr txBox="1"/>
+          <p:nvPr/>
+        </p:nvSpPr>
+        <p:spPr>
+          <a:xfrm>
+            <a:off x="3520440" y="3520440"/>
             <a:ext cx="2395728" cy="566928"/>
           </a:xfrm>
           <a:prstGeom prst="rect">
@@ -11829,13 +11377,13 @@
       </p:sp>
       <p:sp>
         <p:nvSpPr>
-          <p:cNvPr id="20" name="Text 18"/>
-          <p:cNvSpPr txBox="1"/>
-          <p:nvPr/>
-        </p:nvSpPr>
-        <p:spPr>
-          <a:xfrm>
-            <a:off x="3520440" y="4032504"/>
+          <p:cNvPr id="19" name="Text 17"/>
+          <p:cNvSpPr txBox="1"/>
+          <p:nvPr/>
+        </p:nvSpPr>
+        <p:spPr>
+          <a:xfrm>
+            <a:off x="3520440" y="4215384"/>
             <a:ext cx="2286000" cy="868680"/>
           </a:xfrm>
           <a:prstGeom prst="rect">
@@ -11863,7 +11411,7 @@
                 <a:ea typeface="Inter" pitchFamily="34" charset="-122"/>
                 <a:cs typeface="Inter" pitchFamily="34" charset="-120"/>
               </a:rPr>
-              <a:t>Hedef mimari ve fazlı yol haritası</a:t>
+              <a:t>Hedef mimari ve yol haritası</a:t>
             </a:r>
             <a:endParaRPr lang="en-US" sz="1050" dirty="0"/>
           </a:p>
@@ -11871,13 +11419,13 @@
       </p:sp>
       <p:sp>
         <p:nvSpPr>
-          <p:cNvPr id="21" name="Shape 19"/>
+          <p:cNvPr id="20" name="Shape 18"/>
           <p:cNvSpPr/>
           <p:nvPr/>
         </p:nvSpPr>
         <p:spPr>
           <a:xfrm>
-            <a:off x="3520440" y="5020056"/>
+            <a:off x="3520440" y="4727448"/>
             <a:ext cx="2121408" cy="0"/>
           </a:xfrm>
           <a:prstGeom prst="line">
@@ -11894,13 +11442,13 @@
       </p:sp>
       <p:sp>
         <p:nvSpPr>
-          <p:cNvPr id="22" name="Text 20"/>
-          <p:cNvSpPr txBox="1"/>
-          <p:nvPr/>
-        </p:nvSpPr>
-        <p:spPr>
-          <a:xfrm>
-            <a:off x="3520440" y="5129784"/>
+          <p:cNvPr id="21" name="Text 19"/>
+          <p:cNvSpPr txBox="1"/>
+          <p:nvPr/>
+        </p:nvSpPr>
+        <p:spPr>
+          <a:xfrm>
+            <a:off x="3520440" y="4837176"/>
             <a:ext cx="2395728" cy="237744"/>
           </a:xfrm>
           <a:prstGeom prst="rect">
@@ -11933,13 +11481,13 @@
       </p:sp>
       <p:sp>
         <p:nvSpPr>
-          <p:cNvPr id="23" name="Shape 21"/>
+          <p:cNvPr id="22" name="Shape 20"/>
           <p:cNvSpPr/>
           <p:nvPr/>
         </p:nvSpPr>
         <p:spPr>
           <a:xfrm>
-            <a:off x="6089904" y="2642616"/>
+            <a:off x="6089904" y="2825496"/>
             <a:ext cx="0" cy="292608"/>
           </a:xfrm>
           <a:prstGeom prst="line">
@@ -11956,13 +11504,13 @@
       </p:sp>
       <p:sp>
         <p:nvSpPr>
-          <p:cNvPr id="24" name="Text 22"/>
-          <p:cNvSpPr txBox="1"/>
-          <p:nvPr/>
-        </p:nvSpPr>
-        <p:spPr>
-          <a:xfrm>
-            <a:off x="5541264" y="2331720"/>
+          <p:cNvPr id="23" name="Text 21"/>
+          <p:cNvSpPr txBox="1"/>
+          <p:nvPr/>
+        </p:nvSpPr>
+        <p:spPr>
+          <a:xfrm>
+            <a:off x="5541264" y="2514600"/>
             <a:ext cx="1097280" cy="201168"/>
           </a:xfrm>
           <a:prstGeom prst="rect">
@@ -11995,13 +11543,13 @@
       </p:sp>
       <p:sp>
         <p:nvSpPr>
-          <p:cNvPr id="25" name="Shape 23"/>
+          <p:cNvPr id="24" name="Shape 22"/>
           <p:cNvSpPr/>
           <p:nvPr/>
         </p:nvSpPr>
         <p:spPr>
           <a:xfrm>
-            <a:off x="6263640" y="2734056"/>
+            <a:off x="6263640" y="2916936"/>
             <a:ext cx="109728" cy="109728"/>
           </a:xfrm>
           <a:prstGeom prst="ellipse">
@@ -12015,13 +11563,13 @@
       </p:sp>
       <p:sp>
         <p:nvSpPr>
-          <p:cNvPr id="26" name="Text 24"/>
-          <p:cNvSpPr txBox="1"/>
-          <p:nvPr/>
-        </p:nvSpPr>
-        <p:spPr>
-          <a:xfrm>
-            <a:off x="6263640" y="3008376"/>
+          <p:cNvPr id="25" name="Text 23"/>
+          <p:cNvSpPr txBox="1"/>
+          <p:nvPr/>
+        </p:nvSpPr>
+        <p:spPr>
+          <a:xfrm>
+            <a:off x="6263640" y="3191256"/>
             <a:ext cx="2395728" cy="274320"/>
           </a:xfrm>
           <a:prstGeom prst="rect">
@@ -12054,13 +11602,13 @@
       </p:sp>
       <p:sp>
         <p:nvSpPr>
-          <p:cNvPr id="27" name="Text 25"/>
-          <p:cNvSpPr txBox="1"/>
-          <p:nvPr/>
-        </p:nvSpPr>
-        <p:spPr>
-          <a:xfrm>
-            <a:off x="6263640" y="3337560"/>
+          <p:cNvPr id="26" name="Text 24"/>
+          <p:cNvSpPr txBox="1"/>
+          <p:nvPr/>
+        </p:nvSpPr>
+        <p:spPr>
+          <a:xfrm>
+            <a:off x="6263640" y="3520440"/>
             <a:ext cx="2395728" cy="566928"/>
           </a:xfrm>
           <a:prstGeom prst="rect">
@@ -12096,13 +11644,13 @@
       </p:sp>
       <p:sp>
         <p:nvSpPr>
-          <p:cNvPr id="28" name="Text 26"/>
-          <p:cNvSpPr txBox="1"/>
-          <p:nvPr/>
-        </p:nvSpPr>
-        <p:spPr>
-          <a:xfrm>
-            <a:off x="6263640" y="4032504"/>
+          <p:cNvPr id="27" name="Text 25"/>
+          <p:cNvSpPr txBox="1"/>
+          <p:nvPr/>
+        </p:nvSpPr>
+        <p:spPr>
+          <a:xfrm>
+            <a:off x="6263640" y="4215384"/>
             <a:ext cx="2286000" cy="868680"/>
           </a:xfrm>
           <a:prstGeom prst="rect">
@@ -12130,7 +11678,7 @@
                 <a:ea typeface="Inter" pitchFamily="34" charset="-122"/>
                 <a:cs typeface="Inter" pitchFamily="34" charset="-120"/>
               </a:rPr>
-              <a:t>Çalışan sistem, test kayıtları, devreye alma planı</a:t>
+              <a:t>Çalışan sistem ve devreye alma</a:t>
             </a:r>
             <a:endParaRPr lang="en-US" sz="1050" dirty="0"/>
           </a:p>
@@ -12138,13 +11686,13 @@
       </p:sp>
       <p:sp>
         <p:nvSpPr>
-          <p:cNvPr id="29" name="Shape 27"/>
+          <p:cNvPr id="28" name="Shape 26"/>
           <p:cNvSpPr/>
           <p:nvPr/>
         </p:nvSpPr>
         <p:spPr>
           <a:xfrm>
-            <a:off x="6263640" y="5020056"/>
+            <a:off x="6263640" y="4727448"/>
             <a:ext cx="2121408" cy="0"/>
           </a:xfrm>
           <a:prstGeom prst="line">
@@ -12161,13 +11709,13 @@
       </p:sp>
       <p:sp>
         <p:nvSpPr>
-          <p:cNvPr id="30" name="Text 28"/>
-          <p:cNvSpPr txBox="1"/>
-          <p:nvPr/>
-        </p:nvSpPr>
-        <p:spPr>
-          <a:xfrm>
-            <a:off x="6263640" y="5129784"/>
+          <p:cNvPr id="29" name="Text 27"/>
+          <p:cNvSpPr txBox="1"/>
+          <p:nvPr/>
+        </p:nvSpPr>
+        <p:spPr>
+          <a:xfrm>
+            <a:off x="6263640" y="4837176"/>
             <a:ext cx="2395728" cy="237744"/>
           </a:xfrm>
           <a:prstGeom prst="rect">
@@ -12200,13 +11748,13 @@
       </p:sp>
       <p:sp>
         <p:nvSpPr>
-          <p:cNvPr id="31" name="Shape 29"/>
+          <p:cNvPr id="30" name="Shape 28"/>
           <p:cNvSpPr/>
           <p:nvPr/>
         </p:nvSpPr>
         <p:spPr>
           <a:xfrm>
-            <a:off x="8833104" y="2642616"/>
+            <a:off x="8833104" y="2825496"/>
             <a:ext cx="0" cy="292608"/>
           </a:xfrm>
           <a:prstGeom prst="line">
@@ -12223,13 +11771,13 @@
       </p:sp>
       <p:sp>
         <p:nvSpPr>
-          <p:cNvPr id="32" name="Text 30"/>
-          <p:cNvSpPr txBox="1"/>
-          <p:nvPr/>
-        </p:nvSpPr>
-        <p:spPr>
-          <a:xfrm>
-            <a:off x="8284464" y="2331720"/>
+          <p:cNvPr id="31" name="Text 29"/>
+          <p:cNvSpPr txBox="1"/>
+          <p:nvPr/>
+        </p:nvSpPr>
+        <p:spPr>
+          <a:xfrm>
+            <a:off x="8284464" y="2514600"/>
             <a:ext cx="1097280" cy="201168"/>
           </a:xfrm>
           <a:prstGeom prst="rect">
@@ -12262,13 +11810,13 @@
       </p:sp>
       <p:sp>
         <p:nvSpPr>
-          <p:cNvPr id="33" name="Shape 31"/>
+          <p:cNvPr id="32" name="Shape 30"/>
           <p:cNvSpPr/>
           <p:nvPr/>
         </p:nvSpPr>
         <p:spPr>
           <a:xfrm>
-            <a:off x="9006840" y="2734056"/>
+            <a:off x="9006840" y="2916936"/>
             <a:ext cx="109728" cy="109728"/>
           </a:xfrm>
           <a:prstGeom prst="ellipse">
@@ -12282,13 +11830,13 @@
       </p:sp>
       <p:sp>
         <p:nvSpPr>
-          <p:cNvPr id="34" name="Text 32"/>
-          <p:cNvSpPr txBox="1"/>
-          <p:nvPr/>
-        </p:nvSpPr>
-        <p:spPr>
-          <a:xfrm>
-            <a:off x="9006840" y="3008376"/>
+          <p:cNvPr id="33" name="Text 31"/>
+          <p:cNvSpPr txBox="1"/>
+          <p:nvPr/>
+        </p:nvSpPr>
+        <p:spPr>
+          <a:xfrm>
+            <a:off x="9006840" y="3191256"/>
             <a:ext cx="2395728" cy="274320"/>
           </a:xfrm>
           <a:prstGeom prst="rect">
@@ -12321,13 +11869,13 @@
       </p:sp>
       <p:sp>
         <p:nvSpPr>
-          <p:cNvPr id="35" name="Text 33"/>
-          <p:cNvSpPr txBox="1"/>
-          <p:nvPr/>
-        </p:nvSpPr>
-        <p:spPr>
-          <a:xfrm>
-            <a:off x="9006840" y="3337560"/>
+          <p:cNvPr id="34" name="Text 32"/>
+          <p:cNvSpPr txBox="1"/>
+          <p:nvPr/>
+        </p:nvSpPr>
+        <p:spPr>
+          <a:xfrm>
+            <a:off x="9006840" y="3520440"/>
             <a:ext cx="2395728" cy="566928"/>
           </a:xfrm>
           <a:prstGeom prst="rect">
@@ -12363,13 +11911,13 @@
       </p:sp>
       <p:sp>
         <p:nvSpPr>
-          <p:cNvPr id="36" name="Text 34"/>
-          <p:cNvSpPr txBox="1"/>
-          <p:nvPr/>
-        </p:nvSpPr>
-        <p:spPr>
-          <a:xfrm>
-            <a:off x="9006840" y="4032504"/>
+          <p:cNvPr id="35" name="Text 33"/>
+          <p:cNvSpPr txBox="1"/>
+          <p:nvPr/>
+        </p:nvSpPr>
+        <p:spPr>
+          <a:xfrm>
+            <a:off x="9006840" y="4215384"/>
             <a:ext cx="2286000" cy="868680"/>
           </a:xfrm>
           <a:prstGeom prst="rect">
@@ -12397,7 +11945,7 @@
                 <a:ea typeface="Inter" pitchFamily="34" charset="-122"/>
                 <a:cs typeface="Inter" pitchFamily="34" charset="-120"/>
               </a:rPr>
-              <a:t>İlk kapanış birlikte, iyileştirme listesi</a:t>
+              <a:t>İlk kapanış ve iyileştirme listesi</a:t>
             </a:r>
             <a:endParaRPr lang="en-US" sz="1050" dirty="0"/>
           </a:p>
@@ -12405,13 +11953,13 @@
       </p:sp>
       <p:sp>
         <p:nvSpPr>
-          <p:cNvPr id="37" name="Shape 35"/>
+          <p:cNvPr id="36" name="Shape 34"/>
           <p:cNvSpPr/>
           <p:nvPr/>
         </p:nvSpPr>
         <p:spPr>
           <a:xfrm>
-            <a:off x="9006840" y="5020056"/>
+            <a:off x="9006840" y="4727448"/>
             <a:ext cx="2121408" cy="0"/>
           </a:xfrm>
           <a:prstGeom prst="line">
@@ -12428,13 +11976,13 @@
       </p:sp>
       <p:sp>
         <p:nvSpPr>
-          <p:cNvPr id="38" name="Text 36"/>
-          <p:cNvSpPr txBox="1"/>
-          <p:nvPr/>
-        </p:nvSpPr>
-        <p:spPr>
-          <a:xfrm>
-            <a:off x="9006840" y="5129784"/>
+          <p:cNvPr id="37" name="Text 35"/>
+          <p:cNvSpPr txBox="1"/>
+          <p:nvPr/>
+        </p:nvSpPr>
+        <p:spPr>
+          <a:xfrm>
+            <a:off x="9006840" y="4837176"/>
             <a:ext cx="2395728" cy="237744"/>
           </a:xfrm>
           <a:prstGeom prst="rect">
@@ -12687,7 +12235,7 @@
         </p:nvSpPr>
         <p:spPr>
           <a:xfrm>
-            <a:off x="777240" y="2633472"/>
+            <a:off x="777240" y="2788920"/>
             <a:ext cx="3246120" cy="219456"/>
           </a:xfrm>
           <a:prstGeom prst="rect">
@@ -12726,7 +12274,7 @@
         </p:nvSpPr>
         <p:spPr>
           <a:xfrm>
-            <a:off x="4480560" y="2633472"/>
+            <a:off x="4480560" y="2788920"/>
             <a:ext cx="3246120" cy="219456"/>
           </a:xfrm>
           <a:prstGeom prst="rect">
@@ -12765,7 +12313,7 @@
         </p:nvSpPr>
         <p:spPr>
           <a:xfrm>
-            <a:off x="8183880" y="2633472"/>
+            <a:off x="8183880" y="2788920"/>
             <a:ext cx="3200400" cy="219456"/>
           </a:xfrm>
           <a:prstGeom prst="rect">
@@ -12804,7 +12352,7 @@
         </p:nvSpPr>
         <p:spPr>
           <a:xfrm>
-            <a:off x="777240" y="2944368"/>
+            <a:off x="777240" y="3099816"/>
             <a:ext cx="10637215" cy="0"/>
           </a:xfrm>
           <a:prstGeom prst="line">
@@ -12827,8 +12375,8 @@
         </p:nvSpPr>
         <p:spPr>
           <a:xfrm>
-            <a:off x="777240" y="3200400"/>
-            <a:ext cx="3108960" cy="786384"/>
+            <a:off x="777240" y="3337560"/>
+            <a:ext cx="3108960" cy="512064"/>
           </a:xfrm>
           <a:prstGeom prst="rect">
             <a:avLst/>
@@ -12855,7 +12403,7 @@
                 <a:ea typeface="Inter" pitchFamily="34" charset="-122"/>
                 <a:cs typeface="Inter" pitchFamily="34" charset="-120"/>
               </a:rPr>
-              <a:t>FI ve CO’da derinlik</a:t>
+              <a:t>FI ve CO derinliği</a:t>
             </a:r>
             <a:endParaRPr lang="en-US" sz="1150" dirty="0"/>
           </a:p>
@@ -12869,8 +12417,8 @@
         </p:nvSpPr>
         <p:spPr>
           <a:xfrm>
-            <a:off x="4480560" y="3200400"/>
-            <a:ext cx="3108960" cy="786384"/>
+            <a:off x="4480560" y="3337560"/>
+            <a:ext cx="3108960" cy="512064"/>
           </a:xfrm>
           <a:prstGeom prst="rect">
             <a:avLst/>
@@ -12897,7 +12445,7 @@
                 <a:ea typeface="Inter" pitchFamily="34" charset="-122"/>
                 <a:cs typeface="Inter" pitchFamily="34" charset="-120"/>
               </a:rPr>
-              <a:t>Kapanışı paralel işleyecek biçimde yeniden kurmak</a:t>
+              <a:t>Kapanışı paralel kurmak</a:t>
             </a:r>
             <a:endParaRPr lang="en-US" sz="1150" dirty="0"/>
           </a:p>
@@ -12911,8 +12459,8 @@
         </p:nvSpPr>
         <p:spPr>
           <a:xfrm>
-            <a:off x="8183880" y="3200400"/>
-            <a:ext cx="3063240" cy="786384"/>
+            <a:off x="8183880" y="3337560"/>
+            <a:ext cx="3063240" cy="512064"/>
           </a:xfrm>
           <a:prstGeom prst="rect">
             <a:avLst/>
@@ -12939,7 +12487,7 @@
                 <a:ea typeface="Schibsted Grotesk" pitchFamily="34" charset="-122"/>
                 <a:cs typeface="Schibsted Grotesk" pitchFamily="34" charset="-120"/>
               </a:rPr>
-              <a:t>Yalnızca kısa değil, öngörülebilir bir kapanış</a:t>
+              <a:t>Öngörülebilir kapanış</a:t>
             </a:r>
             <a:endParaRPr lang="en-US" sz="1300" dirty="0"/>
           </a:p>
@@ -12953,7 +12501,7 @@
         </p:nvSpPr>
         <p:spPr>
           <a:xfrm>
-            <a:off x="4201668" y="3305556"/>
+            <a:off x="4201668" y="3442716"/>
             <a:ext cx="82296" cy="82296"/>
           </a:xfrm>
           <a:prstGeom prst="ellipse">
@@ -12973,7 +12521,7 @@
         </p:nvSpPr>
         <p:spPr>
           <a:xfrm>
-            <a:off x="7904988" y="3305556"/>
+            <a:off x="7904988" y="3442716"/>
             <a:ext cx="82296" cy="82296"/>
           </a:xfrm>
           <a:prstGeom prst="ellipse">
@@ -12993,7 +12541,7 @@
         </p:nvSpPr>
         <p:spPr>
           <a:xfrm>
-            <a:off x="777240" y="4133088"/>
+            <a:off x="777240" y="3995928"/>
             <a:ext cx="10637215" cy="0"/>
           </a:xfrm>
           <a:prstGeom prst="line">
@@ -13016,8 +12564,8 @@
         </p:nvSpPr>
         <p:spPr>
           <a:xfrm>
-            <a:off x="777240" y="4261104"/>
-            <a:ext cx="3108960" cy="786384"/>
+            <a:off x="777240" y="4123944"/>
+            <a:ext cx="3108960" cy="512064"/>
           </a:xfrm>
           <a:prstGeom prst="rect">
             <a:avLst/>
@@ -13044,7 +12592,7 @@
                 <a:ea typeface="Inter" pitchFamily="34" charset="-122"/>
                 <a:cs typeface="Inter" pitchFamily="34" charset="-120"/>
               </a:rPr>
-              <a:t>Bulut modellerinde tarafsız okuma</a:t>
+              <a:t>Tarafsız bulut okuması</a:t>
             </a:r>
             <a:endParaRPr lang="en-US" sz="1150" dirty="0"/>
           </a:p>
@@ -13058,8 +12606,8 @@
         </p:nvSpPr>
         <p:spPr>
           <a:xfrm>
-            <a:off x="4480560" y="4261104"/>
-            <a:ext cx="3108960" cy="786384"/>
+            <a:off x="4480560" y="4123944"/>
+            <a:ext cx="3108960" cy="512064"/>
           </a:xfrm>
           <a:prstGeom prst="rect">
             <a:avLst/>
@@ -13086,7 +12634,7 @@
                 <a:ea typeface="Inter" pitchFamily="34" charset="-122"/>
                 <a:cs typeface="Inter" pitchFamily="34" charset="-120"/>
               </a:rPr>
-              <a:t>Süreçleri standart kapsamla ölçmek</a:t>
+              <a:t>Standart kapsamla ölçmek</a:t>
             </a:r>
             <a:endParaRPr lang="en-US" sz="1150" dirty="0"/>
           </a:p>
@@ -13100,8 +12648,8 @@
         </p:nvSpPr>
         <p:spPr>
           <a:xfrm>
-            <a:off x="8183880" y="4261104"/>
-            <a:ext cx="3063240" cy="786384"/>
+            <a:off x="8183880" y="4123944"/>
+            <a:ext cx="3063240" cy="512064"/>
           </a:xfrm>
           <a:prstGeom prst="rect">
             <a:avLst/>
@@ -13128,7 +12676,7 @@
                 <a:ea typeface="Schibsted Grotesk" pitchFamily="34" charset="-122"/>
                 <a:cs typeface="Schibsted Grotesk" pitchFamily="34" charset="-120"/>
               </a:rPr>
-              <a:t>Projenin ortasında ayakta kalan model kararı</a:t>
+              <a:t>Ayakta kalan model kararı</a:t>
             </a:r>
             <a:endParaRPr lang="en-US" sz="1300" dirty="0"/>
           </a:p>
@@ -13142,7 +12690,7 @@
         </p:nvSpPr>
         <p:spPr>
           <a:xfrm>
-            <a:off x="4201668" y="4366260"/>
+            <a:off x="4201668" y="4229100"/>
             <a:ext cx="82296" cy="82296"/>
           </a:xfrm>
           <a:prstGeom prst="ellipse">
@@ -13162,7 +12710,7 @@
         </p:nvSpPr>
         <p:spPr>
           <a:xfrm>
-            <a:off x="7904988" y="4366260"/>
+            <a:off x="7904988" y="4229100"/>
             <a:ext cx="82296" cy="82296"/>
           </a:xfrm>
           <a:prstGeom prst="ellipse">
@@ -13182,7 +12730,7 @@
         </p:nvSpPr>
         <p:spPr>
           <a:xfrm>
-            <a:off x="777240" y="5193792"/>
+            <a:off x="777240" y="4782312"/>
             <a:ext cx="10637215" cy="0"/>
           </a:xfrm>
           <a:prstGeom prst="line">
@@ -13205,8 +12753,8 @@
         </p:nvSpPr>
         <p:spPr>
           <a:xfrm>
-            <a:off x="777240" y="5321808"/>
-            <a:ext cx="3108960" cy="786384"/>
+            <a:off x="777240" y="4910328"/>
+            <a:ext cx="3108960" cy="512064"/>
           </a:xfrm>
           <a:prstGeom prst="rect">
             <a:avLst/>
@@ -13233,7 +12781,7 @@
                 <a:ea typeface="Inter" pitchFamily="34" charset="-122"/>
                 <a:cs typeface="Inter" pitchFamily="34" charset="-120"/>
               </a:rPr>
-              <a:t>Saatlerin gerçekten olduğu yere konmuş yapay zeka</a:t>
+              <a:t>Uygulamalı yapay zeka</a:t>
             </a:r>
             <a:endParaRPr lang="en-US" sz="1150" dirty="0"/>
           </a:p>
@@ -13247,8 +12795,8 @@
         </p:nvSpPr>
         <p:spPr>
           <a:xfrm>
-            <a:off x="4480560" y="5321808"/>
-            <a:ext cx="3108960" cy="786384"/>
+            <a:off x="4480560" y="4910328"/>
+            <a:ext cx="3108960" cy="512064"/>
           </a:xfrm>
           <a:prstGeom prst="rect">
             <a:avLst/>
@@ -13275,7 +12823,7 @@
                 <a:ea typeface="Inter" pitchFamily="34" charset="-122"/>
                 <a:cs typeface="Inter" pitchFamily="34" charset="-120"/>
               </a:rPr>
-              <a:t>Eşikleri kendi verinizle kalibre etmek</a:t>
+              <a:t>Eşikleri kendi verinizle kalibre</a:t>
             </a:r>
             <a:endParaRPr lang="en-US" sz="1150" dirty="0"/>
           </a:p>
@@ -13289,8 +12837,8 @@
         </p:nvSpPr>
         <p:spPr>
           <a:xfrm>
-            <a:off x="8183880" y="5321808"/>
-            <a:ext cx="3063240" cy="786384"/>
+            <a:off x="8183880" y="4910328"/>
+            <a:ext cx="3063240" cy="512064"/>
           </a:xfrm>
           <a:prstGeom prst="rect">
             <a:avLst/>
@@ -13317,7 +12865,7 @@
                 <a:ea typeface="Schibsted Grotesk" pitchFamily="34" charset="-122"/>
                 <a:cs typeface="Schibsted Grotesk" pitchFamily="34" charset="-120"/>
               </a:rPr>
-              <a:t>Ekip, eşleştirme yerine istisna inceler</a:t>
+              <a:t>Eşleştirme değil, istisna incelemesi</a:t>
             </a:r>
             <a:endParaRPr lang="en-US" sz="1300" dirty="0"/>
           </a:p>
@@ -13331,7 +12879,7 @@
         </p:nvSpPr>
         <p:spPr>
           <a:xfrm>
-            <a:off x="4201668" y="5426964"/>
+            <a:off x="4201668" y="5015484"/>
             <a:ext cx="82296" cy="82296"/>
           </a:xfrm>
           <a:prstGeom prst="ellipse">
@@ -13351,7 +12899,7 @@
         </p:nvSpPr>
         <p:spPr>
           <a:xfrm>
-            <a:off x="7904988" y="5426964"/>
+            <a:off x="7904988" y="5015484"/>
             <a:ext cx="82296" cy="82296"/>
           </a:xfrm>
           <a:prstGeom prst="ellipse">
@@ -13692,7 +13240,7 @@
                 <a:ea typeface="Inter" pitchFamily="34" charset="-122"/>
                 <a:cs typeface="Inter" pitchFamily="34" charset="-120"/>
               </a:rPr>
-              <a:t>FI, CO, PA ve PS; beş paralel yapı değil, tek mimari.</a:t>
+              <a:t>FI · CO · PA · PS</a:t>
             </a:r>
             <a:endParaRPr lang="en-US" sz="1150" dirty="0"/>
           </a:p>
@@ -13813,7 +13361,7 @@
                 <a:ea typeface="Inter" pitchFamily="34" charset="-122"/>
                 <a:cs typeface="Inter" pitchFamily="34" charset="-120"/>
               </a:rPr>
-              <a:t>Brownfield, greenfield ya da seçici geçiş, kanıta dayanarak.</a:t>
+              <a:t>Brownfield · Greenfield · Seçici geçiş</a:t>
             </a:r>
             <a:endParaRPr lang="en-US" sz="1150" dirty="0"/>
           </a:p>
@@ -13934,7 +13482,7 @@
                 <a:ea typeface="Inter" pitchFamily="34" charset="-122"/>
                 <a:cs typeface="Inter" pitchFamily="34" charset="-120"/>
               </a:rPr>
-              <a:t>Süreçlerinizin ne kadarı standarda oturuyor.</a:t>
+              <a:t>Fit-to-standard değerlendirmesi ve kurulum</a:t>
             </a:r>
             <a:endParaRPr lang="en-US" sz="1150" dirty="0"/>
           </a:p>
@@ -14055,7 +13603,7 @@
                 <a:ea typeface="Inter" pitchFamily="34" charset="-122"/>
                 <a:cs typeface="Inter" pitchFamily="34" charset="-120"/>
               </a:rPr>
-              <a:t>Mimari, göç ve RISE’ın açık bıraktığı sorumluluk sınırları.</a:t>
+              <a:t>RISE mimarisi ve göç yönetimi</a:t>
             </a:r>
             <a:endParaRPr lang="en-US" sz="1150" dirty="0"/>
           </a:p>
@@ -14176,7 +13724,7 @@
                 <a:ea typeface="Inter" pitchFamily="34" charset="-122"/>
                 <a:cs typeface="Inter" pitchFamily="34" charset="-120"/>
               </a:rPr>
-              <a:t>Verinizin ve disiplininizin gerçekten taşıdığı yetenekler.</a:t>
+              <a:t>Mutabakat · Anomali tespiti · Tahmin</a:t>
             </a:r>
             <a:endParaRPr lang="en-US" sz="1150" dirty="0"/>
           </a:p>
